--- a/public/program-ru.pptx
+++ b/public/program-ru.pptx
@@ -135,7 +135,7 @@
           <a:p>
             <a:fld id="{0C391B6F-BBFA-438A-9286-1FC62C3499A0}" type="datetimeFigureOut">
               <a:rPr lang="ru-RU" smtClean="0"/>
-              <a:t>26.02.2026</a:t>
+              <a:t>18.03.2026</a:t>
             </a:fld>
             <a:endParaRPr lang="ru-RU"/>
           </a:p>
@@ -379,7 +379,7 @@
           <a:p>
             <a:fld id="{1D8BD707-D9CF-40AE-B4C6-C98DA3205C09}" type="datetimeFigureOut">
               <a:rPr lang="en-US"/>
-              <a:t>2/26/2026</a:t>
+              <a:t>3/18/2026</a:t>
             </a:fld>
             <a:endParaRPr lang="en-US"/>
           </a:p>
@@ -822,7 +822,7 @@
           <a:p>
             <a:fld id="{1D8BD707-D9CF-40AE-B4C6-C98DA3205C09}" type="datetimeFigureOut">
               <a:rPr lang="en-US"/>
-              <a:t>2/26/2026</a:t>
+              <a:t>3/18/2026</a:t>
             </a:fld>
             <a:endParaRPr lang="en-US"/>
           </a:p>
@@ -1036,7 +1036,7 @@
           <a:p>
             <a:fld id="{1D8BD707-D9CF-40AE-B4C6-C98DA3205C09}" type="datetimeFigureOut">
               <a:rPr lang="en-US"/>
-              <a:t>2/26/2026</a:t>
+              <a:t>3/18/2026</a:t>
             </a:fld>
             <a:endParaRPr lang="en-US"/>
           </a:p>
@@ -1184,7 +1184,7 @@
           <a:p>
             <a:fld id="{1D8BD707-D9CF-40AE-B4C6-C98DA3205C09}" type="datetimeFigureOut">
               <a:rPr lang="en-US"/>
-              <a:t>2/26/2026</a:t>
+              <a:t>3/18/2026</a:t>
             </a:fld>
             <a:endParaRPr lang="en-US"/>
           </a:p>
@@ -1383,7 +1383,7 @@
           <a:p>
             <a:fld id="{1D8BD707-D9CF-40AE-B4C6-C98DA3205C09}" type="datetimeFigureOut">
               <a:rPr lang="en-US"/>
-              <a:t>2/26/2026</a:t>
+              <a:t>3/18/2026</a:t>
             </a:fld>
             <a:endParaRPr lang="en-US"/>
           </a:p>
@@ -1606,7 +1606,7 @@
           <a:p>
             <a:fld id="{1D8BD707-D9CF-40AE-B4C6-C98DA3205C09}" type="datetimeFigureOut">
               <a:rPr lang="en-US"/>
-              <a:t>2/26/2026</a:t>
+              <a:t>3/18/2026</a:t>
             </a:fld>
             <a:endParaRPr lang="en-US"/>
           </a:p>
@@ -1942,7 +1942,7 @@
         </p:nvSpPr>
         <p:spPr>
           <a:xfrm>
-            <a:off x="1423498" y="1394843"/>
+            <a:off x="1423498" y="1336787"/>
             <a:ext cx="5053280" cy="382156"/>
           </a:xfrm>
           <a:prstGeom prst="rect">
@@ -2004,8 +2004,8 @@
         </p:nvSpPr>
         <p:spPr>
           <a:xfrm>
-            <a:off x="660400" y="1906481"/>
-            <a:ext cx="6584315" cy="3544560"/>
+            <a:off x="660400" y="1848425"/>
+            <a:ext cx="6584315" cy="3375283"/>
           </a:xfrm>
           <a:prstGeom prst="rect">
             <a:avLst/>
@@ -2031,7 +2031,7 @@
                 <a:ea typeface="Roboto" panose="02000000000000000000" pitchFamily="2" charset="0"/>
                 <a:cs typeface="Roboto" panose="02000000000000000000" pitchFamily="2" charset="0"/>
               </a:rPr>
-              <a:t>Казахстанско-Германский </a:t>
+              <a:t>Первый Казахстанско-Германский </a:t>
             </a:r>
           </a:p>
           <a:p>
@@ -2335,7 +2335,29 @@
                 <a:ea typeface="Roboto" panose="02000000000000000000" pitchFamily="2" charset="0"/>
                 <a:cs typeface="Roboto" panose="02000000000000000000" pitchFamily="2" charset="0"/>
               </a:rPr>
-              <a:t>(синхронный</a:t>
+              <a:t>(</a:t>
+            </a:r>
+            <a:r>
+              <a:rPr lang="kk-KZ" sz="1100" dirty="0">
+                <a:solidFill>
+                  <a:srgbClr val="002060"/>
+                </a:solidFill>
+                <a:latin typeface="Century Gothic" panose="020B0502020202020204" pitchFamily="34" charset="0"/>
+                <a:ea typeface="Roboto" panose="02000000000000000000" pitchFamily="2" charset="0"/>
+                <a:cs typeface="Roboto" panose="02000000000000000000" pitchFamily="2" charset="0"/>
+              </a:rPr>
+              <a:t>С</a:t>
+            </a:r>
+            <a:r>
+              <a:rPr sz="1100" dirty="0" err="1">
+                <a:solidFill>
+                  <a:srgbClr val="002060"/>
+                </a:solidFill>
+                <a:latin typeface="Century Gothic" panose="020B0502020202020204" pitchFamily="34" charset="0"/>
+                <a:ea typeface="Roboto" panose="02000000000000000000" pitchFamily="2" charset="0"/>
+                <a:cs typeface="Roboto" panose="02000000000000000000" pitchFamily="2" charset="0"/>
+              </a:rPr>
+              <a:t>инхронный</a:t>
             </a:r>
             <a:r>
               <a:rPr sz="1100" spc="-40" dirty="0">
@@ -2404,6 +2426,28 @@
               <a:t>немецкого</a:t>
             </a:r>
             <a:r>
+              <a:rPr lang="kk-KZ" sz="1100" dirty="0">
+                <a:solidFill>
+                  <a:srgbClr val="002060"/>
+                </a:solidFill>
+                <a:latin typeface="Century Gothic" panose="020B0502020202020204" pitchFamily="34" charset="0"/>
+                <a:ea typeface="Roboto" panose="02000000000000000000" pitchFamily="2" charset="0"/>
+                <a:cs typeface="Roboto" panose="02000000000000000000" pitchFamily="2" charset="0"/>
+              </a:rPr>
+              <a:t> </a:t>
+            </a:r>
+            <a:r>
+              <a:rPr lang="de-DE" sz="1100" dirty="0">
+                <a:solidFill>
+                  <a:srgbClr val="002060"/>
+                </a:solidFill>
+                <a:latin typeface="Century Gothic" panose="020B0502020202020204" pitchFamily="34" charset="0"/>
+                <a:ea typeface="Roboto" panose="02000000000000000000" pitchFamily="2" charset="0"/>
+                <a:cs typeface="Roboto" panose="02000000000000000000" pitchFamily="2" charset="0"/>
+              </a:rPr>
+              <a:t>↔</a:t>
+            </a:r>
+            <a:r>
               <a:rPr sz="1100" spc="-50" dirty="0">
                 <a:solidFill>
                   <a:srgbClr val="002060"/>
@@ -2434,18 +2478,7 @@
                 <a:ea typeface="Roboto" panose="02000000000000000000" pitchFamily="2" charset="0"/>
                 <a:cs typeface="Roboto" panose="02000000000000000000" pitchFamily="2" charset="0"/>
               </a:rPr>
-              <a:t> казахский и</a:t>
-            </a:r>
-            <a:r>
-              <a:rPr sz="1100" spc="-30" dirty="0">
-                <a:solidFill>
-                  <a:srgbClr val="002060"/>
-                </a:solidFill>
-                <a:latin typeface="Century Gothic" panose="020B0502020202020204" pitchFamily="34" charset="0"/>
-                <a:ea typeface="Roboto" panose="02000000000000000000" pitchFamily="2" charset="0"/>
-                <a:cs typeface="Roboto" panose="02000000000000000000" pitchFamily="2" charset="0"/>
-              </a:rPr>
-              <a:t> </a:t>
+              <a:t> казахский/</a:t>
             </a:r>
             <a:r>
               <a:rPr sz="1100" dirty="0" err="1">
@@ -2470,151 +2503,15 @@
               <a:t>й </a:t>
             </a:r>
             <a:r>
-              <a:rPr sz="1100" spc="-40" dirty="0">
-                <a:solidFill>
-                  <a:srgbClr val="002060"/>
-                </a:solidFill>
-                <a:latin typeface="Century Gothic" panose="020B0502020202020204" pitchFamily="34" charset="0"/>
-                <a:ea typeface="Roboto" panose="02000000000000000000" pitchFamily="2" charset="0"/>
-                <a:cs typeface="Roboto" panose="02000000000000000000" pitchFamily="2" charset="0"/>
-              </a:rPr>
-              <a:t> </a:t>
-            </a:r>
-            <a:endParaRPr lang="ru-RU" sz="1100" spc="-40" dirty="0">
-              <a:solidFill>
-                <a:srgbClr val="002060"/>
-              </a:solidFill>
-              <a:latin typeface="Century Gothic" panose="020B0502020202020204" pitchFamily="34" charset="0"/>
-              <a:ea typeface="Roboto" panose="02000000000000000000" pitchFamily="2" charset="0"/>
-              <a:cs typeface="Roboto" panose="02000000000000000000" pitchFamily="2" charset="0"/>
-            </a:endParaRPr>
-          </a:p>
-          <a:p>
-            <a:pPr algn="ctr">
-              <a:lnSpc>
-                <a:spcPct val="100000"/>
-              </a:lnSpc>
-            </a:pPr>
-            <a:r>
-              <a:rPr sz="1100" dirty="0">
-                <a:solidFill>
-                  <a:srgbClr val="002060"/>
-                </a:solidFill>
-                <a:latin typeface="Century Gothic" panose="020B0502020202020204" pitchFamily="34" charset="0"/>
-                <a:ea typeface="Roboto" panose="02000000000000000000" pitchFamily="2" charset="0"/>
-                <a:cs typeface="Roboto" panose="02000000000000000000" pitchFamily="2" charset="0"/>
-              </a:rPr>
-              <a:t>и</a:t>
-            </a:r>
-            <a:r>
-              <a:rPr sz="1100" spc="-40" dirty="0">
-                <a:solidFill>
-                  <a:srgbClr val="002060"/>
-                </a:solidFill>
-                <a:latin typeface="Century Gothic" panose="020B0502020202020204" pitchFamily="34" charset="0"/>
-                <a:ea typeface="Roboto" panose="02000000000000000000" pitchFamily="2" charset="0"/>
-                <a:cs typeface="Roboto" panose="02000000000000000000" pitchFamily="2" charset="0"/>
-              </a:rPr>
-              <a:t> </a:t>
-            </a:r>
-            <a:r>
-              <a:rPr sz="1100" dirty="0">
-                <a:solidFill>
-                  <a:srgbClr val="002060"/>
-                </a:solidFill>
-                <a:latin typeface="Century Gothic" panose="020B0502020202020204" pitchFamily="34" charset="0"/>
-                <a:ea typeface="Roboto" panose="02000000000000000000" pitchFamily="2" charset="0"/>
-                <a:cs typeface="Roboto" panose="02000000000000000000" pitchFamily="2" charset="0"/>
-              </a:rPr>
-              <a:t>с</a:t>
-            </a:r>
-            <a:r>
-              <a:rPr sz="1100" spc="-30" dirty="0">
-                <a:solidFill>
-                  <a:srgbClr val="002060"/>
-                </a:solidFill>
-                <a:latin typeface="Century Gothic" panose="020B0502020202020204" pitchFamily="34" charset="0"/>
-                <a:ea typeface="Roboto" panose="02000000000000000000" pitchFamily="2" charset="0"/>
-                <a:cs typeface="Roboto" panose="02000000000000000000" pitchFamily="2" charset="0"/>
-              </a:rPr>
-              <a:t> </a:t>
-            </a:r>
-            <a:r>
-              <a:rPr lang="ru-RU" sz="1100" spc="-30" dirty="0">
-                <a:solidFill>
-                  <a:srgbClr val="002060"/>
-                </a:solidFill>
-                <a:latin typeface="Century Gothic" panose="020B0502020202020204" pitchFamily="34" charset="0"/>
-                <a:ea typeface="Roboto" panose="02000000000000000000" pitchFamily="2" charset="0"/>
-                <a:cs typeface="Roboto" panose="02000000000000000000" pitchFamily="2" charset="0"/>
-              </a:rPr>
-              <a:t>казахского и </a:t>
-            </a:r>
-            <a:r>
-              <a:rPr sz="1100" dirty="0" err="1">
-                <a:solidFill>
-                  <a:srgbClr val="002060"/>
-                </a:solidFill>
-                <a:latin typeface="Century Gothic" panose="020B0502020202020204" pitchFamily="34" charset="0"/>
-                <a:ea typeface="Roboto" panose="02000000000000000000" pitchFamily="2" charset="0"/>
-                <a:cs typeface="Roboto" panose="02000000000000000000" pitchFamily="2" charset="0"/>
-              </a:rPr>
-              <a:t>русского</a:t>
-            </a:r>
-            <a:r>
-              <a:rPr sz="1100" spc="-50" dirty="0">
-                <a:solidFill>
-                  <a:srgbClr val="002060"/>
-                </a:solidFill>
-                <a:latin typeface="Century Gothic" panose="020B0502020202020204" pitchFamily="34" charset="0"/>
-                <a:ea typeface="Roboto" panose="02000000000000000000" pitchFamily="2" charset="0"/>
-                <a:cs typeface="Roboto" panose="02000000000000000000" pitchFamily="2" charset="0"/>
-              </a:rPr>
-              <a:t> </a:t>
-            </a:r>
-            <a:r>
-              <a:rPr sz="1100" dirty="0">
-                <a:solidFill>
-                  <a:srgbClr val="002060"/>
-                </a:solidFill>
-                <a:latin typeface="Century Gothic" panose="020B0502020202020204" pitchFamily="34" charset="0"/>
-                <a:ea typeface="Roboto" panose="02000000000000000000" pitchFamily="2" charset="0"/>
-                <a:cs typeface="Roboto" panose="02000000000000000000" pitchFamily="2" charset="0"/>
-              </a:rPr>
-              <a:t>на</a:t>
-            </a:r>
-            <a:r>
-              <a:rPr sz="1100" spc="-30" dirty="0">
-                <a:solidFill>
-                  <a:srgbClr val="002060"/>
-                </a:solidFill>
-                <a:latin typeface="Century Gothic" panose="020B0502020202020204" pitchFamily="34" charset="0"/>
-                <a:ea typeface="Roboto" panose="02000000000000000000" pitchFamily="2" charset="0"/>
-                <a:cs typeface="Roboto" panose="02000000000000000000" pitchFamily="2" charset="0"/>
-              </a:rPr>
-              <a:t> </a:t>
-            </a:r>
-            <a:r>
-              <a:rPr sz="1100" dirty="0">
-                <a:solidFill>
-                  <a:srgbClr val="002060"/>
-                </a:solidFill>
-                <a:latin typeface="Century Gothic" panose="020B0502020202020204" pitchFamily="34" charset="0"/>
-                <a:ea typeface="Roboto" panose="02000000000000000000" pitchFamily="2" charset="0"/>
-                <a:cs typeface="Roboto" panose="02000000000000000000" pitchFamily="2" charset="0"/>
-              </a:rPr>
-              <a:t>немецкий</a:t>
-            </a:r>
-            <a:r>
-              <a:rPr sz="1100" spc="-40" dirty="0">
-                <a:solidFill>
-                  <a:srgbClr val="002060"/>
-                </a:solidFill>
-                <a:latin typeface="Century Gothic" panose="020B0502020202020204" pitchFamily="34" charset="0"/>
-                <a:ea typeface="Roboto" panose="02000000000000000000" pitchFamily="2" charset="0"/>
-                <a:cs typeface="Roboto" panose="02000000000000000000" pitchFamily="2" charset="0"/>
-              </a:rPr>
-              <a:t> </a:t>
+              <a:rPr sz="1100" spc="-10" dirty="0" err="1">
+                <a:solidFill>
+                  <a:srgbClr val="002060"/>
+                </a:solidFill>
+                <a:latin typeface="Century Gothic" panose="020B0502020202020204" pitchFamily="34" charset="0"/>
+                <a:ea typeface="Roboto" panose="02000000000000000000" pitchFamily="2" charset="0"/>
+                <a:cs typeface="Roboto" panose="02000000000000000000" pitchFamily="2" charset="0"/>
+              </a:rPr>
+              <a:t>языки</a:t>
             </a:r>
             <a:r>
               <a:rPr sz="1100" spc="-10" dirty="0">
@@ -2625,7 +2522,7 @@
                 <a:ea typeface="Roboto" panose="02000000000000000000" pitchFamily="2" charset="0"/>
                 <a:cs typeface="Roboto" panose="02000000000000000000" pitchFamily="2" charset="0"/>
               </a:rPr>
-              <a:t>языки)</a:t>
+              <a:t>)</a:t>
             </a:r>
             <a:endParaRPr sz="1100" dirty="0">
               <a:solidFill>
@@ -2815,7 +2712,7 @@
               </a:lnSpc>
             </a:pPr>
             <a:r>
-              <a:rPr sz="1400" dirty="0">
+              <a:rPr sz="1400" dirty="0" err="1">
                 <a:solidFill>
                   <a:srgbClr val="002060"/>
                 </a:solidFill>
@@ -2837,15 +2734,15 @@
               <a:t> </a:t>
             </a:r>
             <a:r>
-              <a:rPr sz="1400" dirty="0">
-                <a:solidFill>
-                  <a:srgbClr val="002060"/>
-                </a:solidFill>
-                <a:latin typeface="Century Gothic" panose="020B0502020202020204" pitchFamily="34" charset="0"/>
-                <a:ea typeface="Roboto" panose="02000000000000000000" pitchFamily="2" charset="0"/>
-                <a:cs typeface="Roboto" panose="02000000000000000000" pitchFamily="2" charset="0"/>
-              </a:rPr>
-              <a:t>проходит</a:t>
+              <a:rPr lang="kk-KZ" sz="1400" dirty="0">
+                <a:solidFill>
+                  <a:srgbClr val="002060"/>
+                </a:solidFill>
+                <a:latin typeface="Century Gothic" panose="020B0502020202020204" pitchFamily="34" charset="0"/>
+                <a:ea typeface="Roboto" panose="02000000000000000000" pitchFamily="2" charset="0"/>
+                <a:cs typeface="Roboto" panose="02000000000000000000" pitchFamily="2" charset="0"/>
+              </a:rPr>
+              <a:t>органиизован</a:t>
             </a:r>
             <a:r>
               <a:rPr sz="1400" spc="-20" dirty="0">
@@ -2913,53 +2810,6 @@
           </a:p>
         </p:txBody>
       </p:sp>
-      <p:pic>
-        <p:nvPicPr>
-          <p:cNvPr id="7" name="Picture 6">
-            <a:extLst>
-              <a:ext uri="{FF2B5EF4-FFF2-40B4-BE49-F238E27FC236}">
-                <a16:creationId xmlns:a16="http://schemas.microsoft.com/office/drawing/2014/main" id="{E4141A2C-8A6B-DF1C-BECD-E4EFCBF531CF}"/>
-              </a:ext>
-            </a:extLst>
-          </p:cNvPr>
-          <p:cNvPicPr>
-            <a:picLocks noChangeAspect="1" noChangeArrowheads="1"/>
-          </p:cNvPicPr>
-          <p:nvPr/>
-        </p:nvPicPr>
-        <p:blipFill>
-          <a:blip r:embed="rId3" cstate="print">
-            <a:extLst>
-              <a:ext uri="{28A0092B-C50C-407E-A947-70E740481C1C}">
-                <a14:useLocalDpi xmlns:a14="http://schemas.microsoft.com/office/drawing/2010/main" val="0"/>
-              </a:ext>
-            </a:extLst>
-          </a:blip>
-          <a:srcRect/>
-          <a:stretch>
-            <a:fillRect/>
-          </a:stretch>
-        </p:blipFill>
-        <p:spPr bwMode="auto">
-          <a:xfrm>
-            <a:off x="3164351" y="5619643"/>
-            <a:ext cx="936162" cy="757687"/>
-          </a:xfrm>
-          <a:prstGeom prst="rect">
-            <a:avLst/>
-          </a:prstGeom>
-          <a:noFill/>
-          <a:extLst>
-            <a:ext uri="{909E8E84-426E-40DD-AFC4-6F175D3DCCD1}">
-              <a14:hiddenFill xmlns:a14="http://schemas.microsoft.com/office/drawing/2010/main">
-                <a:solidFill>
-                  <a:srgbClr val="FFFFFF"/>
-                </a:solidFill>
-              </a14:hiddenFill>
-            </a:ext>
-          </a:extLst>
-        </p:spPr>
-      </p:pic>
       <p:sp>
         <p:nvSpPr>
           <p:cNvPr id="9" name="object 2">
@@ -3050,14 +2900,44 @@
               </a:spcBef>
             </a:pPr>
             <a:r>
-              <a:rPr lang="de-DE" sz="1200" spc="-10" dirty="0" err="1">
+              <a:rPr lang="kk-KZ" sz="1200" dirty="0">
                 <a:solidFill>
                   <a:schemeClr val="bg1"/>
                 </a:solidFill>
                 <a:latin typeface="Century Gothic" panose="020B0502020202020204" pitchFamily="34" charset="0"/>
-                <a:ea typeface="Roboto" panose="02000000000000000000" pitchFamily="2" charset="0"/>
-                <a:cs typeface="Roboto" panose="02000000000000000000" pitchFamily="2" charset="0"/>
-                <a:hlinkClick r:id="rId4">
+                <a:cs typeface="Calibri"/>
+              </a:rPr>
+              <a:t> </a:t>
+            </a:r>
+            <a:r>
+              <a:rPr lang="en-US" sz="1200" dirty="0">
+                <a:solidFill>
+                  <a:schemeClr val="bg1"/>
+                </a:solidFill>
+                <a:latin typeface="Century Gothic" panose="020B0502020202020204" pitchFamily="34" charset="0"/>
+                <a:cs typeface="Calibri"/>
+              </a:rPr>
+              <a:t> </a:t>
+            </a:r>
+            <a:r>
+              <a:rPr lang="en-US" sz="1200" dirty="0" err="1">
+                <a:solidFill>
+                  <a:schemeClr val="bg1"/>
+                </a:solidFill>
+                <a:latin typeface="Century Gothic" panose="020B0502020202020204" pitchFamily="34" charset="0"/>
+                <a:cs typeface="Calibri"/>
+              </a:rPr>
+              <a:t>s.bolatkyzy</a:t>
+            </a:r>
+            <a:r>
+              <a:rPr lang="de-DE" sz="1200" spc="-10" dirty="0">
+                <a:solidFill>
+                  <a:schemeClr val="bg1"/>
+                </a:solidFill>
+                <a:latin typeface="Century Gothic" panose="020B0502020202020204" pitchFamily="34" charset="0"/>
+                <a:ea typeface="Roboto" panose="02000000000000000000" pitchFamily="2" charset="0"/>
+                <a:cs typeface="Roboto" panose="02000000000000000000" pitchFamily="2" charset="0"/>
+                <a:hlinkClick r:id="rId3">
                   <a:extLst>
                     <a:ext uri="{A12FA001-AC4F-418D-AE19-62706E023703}">
                       <ahyp:hlinkClr xmlns:ahyp="http://schemas.microsoft.com/office/drawing/2018/hyperlinkcolor" val="tx"/>
@@ -3065,7 +2945,7 @@
                   </a:extLst>
                 </a:hlinkClick>
               </a:rPr>
-              <a:t>z.tymbayeva@satbayev.university</a:t>
+              <a:t>@satbayev.university</a:t>
             </a:r>
             <a:r>
               <a:rPr lang="en-US" sz="1200" spc="-10" dirty="0">
@@ -3237,7 +3117,7 @@
               <a:t>Актовый зал им. К. </a:t>
             </a:r>
             <a:r>
-              <a:rPr lang="ru-RU" sz="1200">
+              <a:rPr lang="ru-RU" sz="1200" dirty="0" err="1">
                 <a:solidFill>
                   <a:srgbClr val="FFFFFF"/>
                 </a:solidFill>
@@ -3466,7 +3346,7 @@
               <a:t> </a:t>
             </a:r>
             <a:r>
-              <a:rPr sz="1200" dirty="0">
+              <a:rPr sz="1200" dirty="0" err="1">
                 <a:solidFill>
                   <a:srgbClr val="FFFFFF"/>
                 </a:solidFill>
@@ -3486,17 +3366,6 @@
                 <a:cs typeface="Roboto" panose="02000000000000000000" pitchFamily="2" charset="0"/>
               </a:rPr>
               <a:t> </a:t>
-            </a:r>
-            <a:r>
-              <a:rPr sz="1200" dirty="0">
-                <a:solidFill>
-                  <a:srgbClr val="FFFFFF"/>
-                </a:solidFill>
-                <a:latin typeface="Century Gothic" panose="020B0502020202020204" pitchFamily="34" charset="0"/>
-                <a:ea typeface="Roboto" panose="02000000000000000000" pitchFamily="2" charset="0"/>
-                <a:cs typeface="Roboto" panose="02000000000000000000" pitchFamily="2" charset="0"/>
-              </a:rPr>
-              <a:t>и</a:t>
             </a:r>
             <a:r>
               <a:rPr sz="1200" spc="-35" dirty="0">
@@ -3735,10 +3604,134 @@
       </p:sp>
       <p:pic>
         <p:nvPicPr>
-          <p:cNvPr id="1026" name="Picture 2">
+          <p:cNvPr id="3" name="Рисунок 2">
             <a:extLst>
               <a:ext uri="{FF2B5EF4-FFF2-40B4-BE49-F238E27FC236}">
-                <a16:creationId xmlns:a16="http://schemas.microsoft.com/office/drawing/2014/main" id="{A4E4641A-1A80-436D-BFB9-BB26767D8056}"/>
+                <a16:creationId xmlns:a16="http://schemas.microsoft.com/office/drawing/2014/main" id="{93E46722-83BE-E5A0-9726-AC4013CE40A2}"/>
+              </a:ext>
+            </a:extLst>
+          </p:cNvPr>
+          <p:cNvPicPr>
+            <a:picLocks noChangeAspect="1"/>
+          </p:cNvPicPr>
+          <p:nvPr/>
+        </p:nvPicPr>
+        <p:blipFill>
+          <a:blip r:embed="rId4"/>
+          <a:stretch>
+            <a:fillRect/>
+          </a:stretch>
+        </p:blipFill>
+        <p:spPr>
+          <a:xfrm>
+            <a:off x="4518271" y="5270293"/>
+            <a:ext cx="2179213" cy="871685"/>
+          </a:xfrm>
+          <a:prstGeom prst="rect">
+            <a:avLst/>
+          </a:prstGeom>
+        </p:spPr>
+      </p:pic>
+      <p:sp>
+        <p:nvSpPr>
+          <p:cNvPr id="8" name="object 3">
+            <a:extLst>
+              <a:ext uri="{FF2B5EF4-FFF2-40B4-BE49-F238E27FC236}">
+                <a16:creationId xmlns:a16="http://schemas.microsoft.com/office/drawing/2014/main" id="{A2AC19F2-BECF-9274-3908-E3669F00D9A4}"/>
+              </a:ext>
+            </a:extLst>
+          </p:cNvPr>
+          <p:cNvSpPr txBox="1"/>
+          <p:nvPr/>
+        </p:nvSpPr>
+        <p:spPr>
+          <a:xfrm>
+            <a:off x="3926698" y="9687079"/>
+            <a:ext cx="3294380" cy="226344"/>
+          </a:xfrm>
+          <a:prstGeom prst="rect">
+            <a:avLst/>
+          </a:prstGeom>
+        </p:spPr>
+        <p:txBody>
+          <a:bodyPr vert="horz" wrap="square" lIns="0" tIns="46355" rIns="0" bIns="0" rtlCol="0">
+            <a:spAutoFit/>
+          </a:bodyPr>
+          <a:lstStyle/>
+          <a:p>
+            <a:pPr marL="12700" marR="5080">
+              <a:lnSpc>
+                <a:spcPts val="1420"/>
+              </a:lnSpc>
+              <a:spcBef>
+                <a:spcPts val="365"/>
+              </a:spcBef>
+            </a:pPr>
+            <a:r>
+              <a:rPr lang="en-US" sz="1200" dirty="0">
+                <a:solidFill>
+                  <a:schemeClr val="bg1"/>
+                </a:solidFill>
+                <a:latin typeface="Century Gothic" panose="020B0502020202020204" pitchFamily="34" charset="0"/>
+                <a:cs typeface="Calibri"/>
+              </a:rPr>
+              <a:t> </a:t>
+            </a:r>
+            <a:r>
+              <a:rPr lang="en-US" sz="1200" dirty="0" err="1">
+                <a:solidFill>
+                  <a:schemeClr val="bg1"/>
+                </a:solidFill>
+                <a:latin typeface="Century Gothic" panose="020B0502020202020204" pitchFamily="34" charset="0"/>
+                <a:cs typeface="Calibri"/>
+              </a:rPr>
+              <a:t>s.bolatkyzy</a:t>
+            </a:r>
+            <a:r>
+              <a:rPr lang="en-US" sz="1200" dirty="0">
+                <a:solidFill>
+                  <a:schemeClr val="bg1"/>
+                </a:solidFill>
+                <a:latin typeface="Century Gothic" panose="020B0502020202020204" pitchFamily="34" charset="0"/>
+                <a:cs typeface="Calibri"/>
+              </a:rPr>
+              <a:t> </a:t>
+            </a:r>
+            <a:r>
+              <a:rPr lang="de-DE" sz="1200" spc="-10" dirty="0">
+                <a:solidFill>
+                  <a:schemeClr val="bg1"/>
+                </a:solidFill>
+                <a:latin typeface="Century Gothic" panose="020B0502020202020204" pitchFamily="34" charset="0"/>
+                <a:ea typeface="Roboto" panose="02000000000000000000" pitchFamily="2" charset="0"/>
+                <a:cs typeface="Roboto" panose="02000000000000000000" pitchFamily="2" charset="0"/>
+                <a:hlinkClick r:id="rId3">
+                  <a:extLst>
+                    <a:ext uri="{A12FA001-AC4F-418D-AE19-62706E023703}">
+                      <ahyp:hlinkClr xmlns:ahyp="http://schemas.microsoft.com/office/drawing/2018/hyperlinkcolor" val="tx"/>
+                    </a:ext>
+                  </a:extLst>
+                </a:hlinkClick>
+              </a:rPr>
+              <a:t>@satbayev.university</a:t>
+            </a:r>
+            <a:endParaRPr sz="1200" dirty="0">
+              <a:solidFill>
+                <a:schemeClr val="bg1"/>
+              </a:solidFill>
+              <a:latin typeface="Century Gothic" panose="020B0502020202020204" pitchFamily="34" charset="0"/>
+              <a:ea typeface="Roboto" panose="02000000000000000000" pitchFamily="2" charset="0"/>
+              <a:cs typeface="Roboto" panose="02000000000000000000" pitchFamily="2" charset="0"/>
+            </a:endParaRPr>
+          </a:p>
+        </p:txBody>
+      </p:sp>
+      <p:pic>
+        <p:nvPicPr>
+          <p:cNvPr id="1028" name="Picture 4" descr="Фотосурет сипаттамасы жоқ.">
+            <a:extLst>
+              <a:ext uri="{FF2B5EF4-FFF2-40B4-BE49-F238E27FC236}">
+                <a16:creationId xmlns:a16="http://schemas.microsoft.com/office/drawing/2014/main" id="{C16B9B65-7ADD-D9AD-BA6D-2DA381DA3141}"/>
               </a:ext>
             </a:extLst>
           </p:cNvPr>
@@ -3762,243 +3755,8 @@
         </p:blipFill>
         <p:spPr bwMode="auto">
           <a:xfrm>
-            <a:off x="4364205" y="6607508"/>
-            <a:ext cx="2313065" cy="634055"/>
-          </a:xfrm>
-          <a:prstGeom prst="rect">
-            <a:avLst/>
-          </a:prstGeom>
-          <a:noFill/>
-          <a:extLst>
-            <a:ext uri="{909E8E84-426E-40DD-AFC4-6F175D3DCCD1}">
-              <a14:hiddenFill xmlns:a14="http://schemas.microsoft.com/office/drawing/2010/main">
-                <a:solidFill>
-                  <a:srgbClr val="FFFFFF"/>
-                </a:solidFill>
-              </a14:hiddenFill>
-            </a:ext>
-          </a:extLst>
-        </p:spPr>
-      </p:pic>
-      <p:pic>
-        <p:nvPicPr>
-          <p:cNvPr id="3" name="Рисунок 2">
-            <a:extLst>
-              <a:ext uri="{FF2B5EF4-FFF2-40B4-BE49-F238E27FC236}">
-                <a16:creationId xmlns:a16="http://schemas.microsoft.com/office/drawing/2014/main" id="{93E46722-83BE-E5A0-9726-AC4013CE40A2}"/>
-              </a:ext>
-            </a:extLst>
-          </p:cNvPr>
-          <p:cNvPicPr>
-            <a:picLocks noChangeAspect="1"/>
-          </p:cNvPicPr>
-          <p:nvPr/>
-        </p:nvPicPr>
-        <p:blipFill>
-          <a:blip r:embed="rId6"/>
-          <a:stretch>
-            <a:fillRect/>
-          </a:stretch>
-        </p:blipFill>
-        <p:spPr>
-          <a:xfrm>
-            <a:off x="4516437" y="5498177"/>
-            <a:ext cx="2160833" cy="864333"/>
-          </a:xfrm>
-          <a:prstGeom prst="rect">
-            <a:avLst/>
-          </a:prstGeom>
-        </p:spPr>
-      </p:pic>
-      <p:sp>
-        <p:nvSpPr>
-          <p:cNvPr id="8" name="object 3">
-            <a:extLst>
-              <a:ext uri="{FF2B5EF4-FFF2-40B4-BE49-F238E27FC236}">
-                <a16:creationId xmlns:a16="http://schemas.microsoft.com/office/drawing/2014/main" id="{A2AC19F2-BECF-9274-3908-E3669F00D9A4}"/>
-              </a:ext>
-            </a:extLst>
-          </p:cNvPr>
-          <p:cNvSpPr txBox="1"/>
-          <p:nvPr/>
-        </p:nvSpPr>
-        <p:spPr>
-          <a:xfrm>
-            <a:off x="3941446" y="9687079"/>
-            <a:ext cx="3294380" cy="226344"/>
-          </a:xfrm>
-          <a:prstGeom prst="rect">
-            <a:avLst/>
-          </a:prstGeom>
-        </p:spPr>
-        <p:txBody>
-          <a:bodyPr vert="horz" wrap="square" lIns="0" tIns="46355" rIns="0" bIns="0" rtlCol="0">
-            <a:spAutoFit/>
-          </a:bodyPr>
-          <a:lstStyle/>
-          <a:p>
-            <a:pPr marL="12700" marR="5080">
-              <a:lnSpc>
-                <a:spcPts val="1420"/>
-              </a:lnSpc>
-              <a:spcBef>
-                <a:spcPts val="365"/>
-              </a:spcBef>
-            </a:pPr>
-            <a:r>
-              <a:rPr lang="de-DE" sz="1200" spc="-10" dirty="0" err="1">
-                <a:solidFill>
-                  <a:schemeClr val="bg1"/>
-                </a:solidFill>
-                <a:latin typeface="Century Gothic" panose="020B0502020202020204" pitchFamily="34" charset="0"/>
-                <a:ea typeface="Roboto" panose="02000000000000000000" pitchFamily="2" charset="0"/>
-                <a:cs typeface="Roboto" panose="02000000000000000000" pitchFamily="2" charset="0"/>
-                <a:hlinkClick r:id="rId4">
-                  <a:extLst>
-                    <a:ext uri="{A12FA001-AC4F-418D-AE19-62706E023703}">
-                      <ahyp:hlinkClr xmlns:ahyp="http://schemas.microsoft.com/office/drawing/2018/hyperlinkcolor" val="tx"/>
-                    </a:ext>
-                  </a:extLst>
-                </a:hlinkClick>
-              </a:rPr>
-              <a:t>z.tymbayeva@satbayev.university</a:t>
-            </a:r>
-            <a:endParaRPr sz="1200" dirty="0">
-              <a:solidFill>
-                <a:schemeClr val="bg1"/>
-              </a:solidFill>
-              <a:latin typeface="Century Gothic" panose="020B0502020202020204" pitchFamily="34" charset="0"/>
-              <a:ea typeface="Roboto" panose="02000000000000000000" pitchFamily="2" charset="0"/>
-              <a:cs typeface="Roboto" panose="02000000000000000000" pitchFamily="2" charset="0"/>
-            </a:endParaRPr>
-          </a:p>
-        </p:txBody>
-      </p:sp>
-      <p:pic>
-        <p:nvPicPr>
-          <p:cNvPr id="1028" name="Picture 4" descr="Фотосурет сипаттамасы жоқ.">
-            <a:extLst>
-              <a:ext uri="{FF2B5EF4-FFF2-40B4-BE49-F238E27FC236}">
-                <a16:creationId xmlns:a16="http://schemas.microsoft.com/office/drawing/2014/main" id="{C16B9B65-7ADD-D9AD-BA6D-2DA381DA3141}"/>
-              </a:ext>
-            </a:extLst>
-          </p:cNvPr>
-          <p:cNvPicPr>
-            <a:picLocks noChangeAspect="1" noChangeArrowheads="1"/>
-          </p:cNvPicPr>
-          <p:nvPr/>
-        </p:nvPicPr>
-        <p:blipFill>
-          <a:blip r:embed="rId7" cstate="print">
-            <a:extLst>
-              <a:ext uri="{28A0092B-C50C-407E-A947-70E740481C1C}">
-                <a14:useLocalDpi xmlns:a14="http://schemas.microsoft.com/office/drawing/2010/main" val="0"/>
-              </a:ext>
-            </a:extLst>
-          </a:blip>
-          <a:srcRect/>
-          <a:stretch>
-            <a:fillRect/>
-          </a:stretch>
-        </p:blipFill>
-        <p:spPr bwMode="auto">
-          <a:xfrm>
-            <a:off x="1109584" y="5621864"/>
-            <a:ext cx="1132396" cy="1009650"/>
-          </a:xfrm>
-          <a:prstGeom prst="rect">
-            <a:avLst/>
-          </a:prstGeom>
-          <a:noFill/>
-          <a:extLst>
-            <a:ext uri="{909E8E84-426E-40DD-AFC4-6F175D3DCCD1}">
-              <a14:hiddenFill xmlns:a14="http://schemas.microsoft.com/office/drawing/2010/main">
-                <a:solidFill>
-                  <a:srgbClr val="FFFFFF"/>
-                </a:solidFill>
-              </a14:hiddenFill>
-            </a:ext>
-          </a:extLst>
-        </p:spPr>
-      </p:pic>
-      <p:pic>
-        <p:nvPicPr>
-          <p:cNvPr id="1036" name="Picture 12" descr="German Cooperation Logo Vector">
-            <a:extLst>
-              <a:ext uri="{FF2B5EF4-FFF2-40B4-BE49-F238E27FC236}">
-                <a16:creationId xmlns:a16="http://schemas.microsoft.com/office/drawing/2014/main" id="{794AAC9D-A4D1-40B3-DE3D-7DF8782A8901}"/>
-              </a:ext>
-            </a:extLst>
-          </p:cNvPr>
-          <p:cNvPicPr>
-            <a:picLocks noChangeAspect="1" noChangeArrowheads="1"/>
-          </p:cNvPicPr>
-          <p:nvPr/>
-        </p:nvPicPr>
-        <p:blipFill>
-          <a:blip r:embed="rId8" cstate="print">
-            <a:extLst>
-              <a:ext uri="{28A0092B-C50C-407E-A947-70E740481C1C}">
-                <a14:useLocalDpi xmlns:a14="http://schemas.microsoft.com/office/drawing/2010/main" val="0"/>
-              </a:ext>
-            </a:extLst>
-          </a:blip>
-          <a:srcRect/>
-          <a:stretch>
-            <a:fillRect/>
-          </a:stretch>
-        </p:blipFill>
-        <p:spPr bwMode="auto">
-          <a:xfrm>
-            <a:off x="2667000" y="6536868"/>
-            <a:ext cx="1308742" cy="794148"/>
-          </a:xfrm>
-          <a:prstGeom prst="rect">
-            <a:avLst/>
-          </a:prstGeom>
-          <a:noFill/>
-          <a:extLst>
-            <a:ext uri="{909E8E84-426E-40DD-AFC4-6F175D3DCCD1}">
-              <a14:hiddenFill xmlns:a14="http://schemas.microsoft.com/office/drawing/2010/main">
-                <a:solidFill>
-                  <a:srgbClr val="FFFFFF"/>
-                </a:solidFill>
-              </a14:hiddenFill>
-            </a:ext>
-          </a:extLst>
-        </p:spPr>
-      </p:pic>
-      <p:pic>
-        <p:nvPicPr>
-          <p:cNvPr id="15" name="Picture 6">
-            <a:extLst>
-              <a:ext uri="{FF2B5EF4-FFF2-40B4-BE49-F238E27FC236}">
-                <a16:creationId xmlns:a16="http://schemas.microsoft.com/office/drawing/2014/main" id="{FF341CFD-073B-95EE-3B81-85360D29EFE0}"/>
-              </a:ext>
-            </a:extLst>
-          </p:cNvPr>
-          <p:cNvPicPr>
-            <a:picLocks noChangeAspect="1" noChangeArrowheads="1"/>
-          </p:cNvPicPr>
-          <p:nvPr/>
-        </p:nvPicPr>
-        <p:blipFill>
-          <a:blip r:embed="rId3" cstate="print">
-            <a:extLst>
-              <a:ext uri="{28A0092B-C50C-407E-A947-70E740481C1C}">
-                <a14:useLocalDpi xmlns:a14="http://schemas.microsoft.com/office/drawing/2010/main" val="0"/>
-              </a:ext>
-            </a:extLst>
-          </a:blip>
-          <a:srcRect/>
-          <a:stretch>
-            <a:fillRect/>
-          </a:stretch>
-        </p:blipFill>
-        <p:spPr bwMode="auto">
-          <a:xfrm>
-            <a:off x="641503" y="312694"/>
-            <a:ext cx="936162" cy="757687"/>
+            <a:off x="928879" y="5444674"/>
+            <a:ext cx="1390929" cy="1240160"/>
           </a:xfrm>
           <a:prstGeom prst="rect">
             <a:avLst/>
@@ -4081,7 +3839,7 @@
                 <a:ea typeface="Roboto" panose="02000000000000000000" pitchFamily="2" charset="0"/>
                 <a:cs typeface="Roboto" panose="02000000000000000000" pitchFamily="2" charset="0"/>
               </a:rPr>
-              <a:t>kazgerlogisticsforum.kz</a:t>
+              <a:t>kazgerlogisticsforum.kz </a:t>
             </a:r>
             <a:r>
               <a:rPr lang="ru-RU" sz="1200" b="1" i="1" spc="70" dirty="0">
@@ -4105,6 +3863,114 @@
           </a:p>
         </p:txBody>
       </p:sp>
+      <p:pic>
+        <p:nvPicPr>
+          <p:cNvPr id="19" name="Рисунок 18" descr="Изображение выглядит как Графика, Шрифт, графический дизайн, снимок экрана&#10;&#10;Автоматически созданное описание">
+            <a:extLst>
+              <a:ext uri="{FF2B5EF4-FFF2-40B4-BE49-F238E27FC236}">
+                <a16:creationId xmlns:a16="http://schemas.microsoft.com/office/drawing/2014/main" id="{8F33752A-5400-C3BA-1FAC-339A0CEBA65F}"/>
+              </a:ext>
+            </a:extLst>
+          </p:cNvPr>
+          <p:cNvPicPr>
+            <a:picLocks noChangeAspect="1"/>
+          </p:cNvPicPr>
+          <p:nvPr/>
+        </p:nvPicPr>
+        <p:blipFill>
+          <a:blip r:embed="rId6" cstate="print">
+            <a:extLst>
+              <a:ext uri="{28A0092B-C50C-407E-A947-70E740481C1C}">
+                <a14:useLocalDpi xmlns:a14="http://schemas.microsoft.com/office/drawing/2010/main" val="0"/>
+              </a:ext>
+            </a:extLst>
+          </a:blip>
+          <a:stretch>
+            <a:fillRect/>
+          </a:stretch>
+        </p:blipFill>
+        <p:spPr>
+          <a:xfrm>
+            <a:off x="2934245" y="5442239"/>
+            <a:ext cx="1155408" cy="544293"/>
+          </a:xfrm>
+          <a:prstGeom prst="rect">
+            <a:avLst/>
+          </a:prstGeom>
+        </p:spPr>
+      </p:pic>
+      <p:pic>
+        <p:nvPicPr>
+          <p:cNvPr id="21" name="Рисунок 20" descr="Изображение выглядит как текст, графический дизайн, Графика, Шрифт&#10;&#10;Автоматически созданное описание">
+            <a:extLst>
+              <a:ext uri="{FF2B5EF4-FFF2-40B4-BE49-F238E27FC236}">
+                <a16:creationId xmlns:a16="http://schemas.microsoft.com/office/drawing/2014/main" id="{8213D2C3-7A38-6D32-9379-3BE386688FEC}"/>
+              </a:ext>
+            </a:extLst>
+          </p:cNvPr>
+          <p:cNvPicPr>
+            <a:picLocks noChangeAspect="1"/>
+          </p:cNvPicPr>
+          <p:nvPr/>
+        </p:nvPicPr>
+        <p:blipFill>
+          <a:blip r:embed="rId7" cstate="print">
+            <a:extLst>
+              <a:ext uri="{28A0092B-C50C-407E-A947-70E740481C1C}">
+                <a14:useLocalDpi xmlns:a14="http://schemas.microsoft.com/office/drawing/2010/main" val="0"/>
+              </a:ext>
+            </a:extLst>
+          </a:blip>
+          <a:stretch>
+            <a:fillRect/>
+          </a:stretch>
+        </p:blipFill>
+        <p:spPr>
+          <a:xfrm>
+            <a:off x="2712418" y="6299274"/>
+            <a:ext cx="2895237" cy="1063688"/>
+          </a:xfrm>
+          <a:prstGeom prst="rect">
+            <a:avLst/>
+          </a:prstGeom>
+        </p:spPr>
+      </p:pic>
+      <p:pic>
+        <p:nvPicPr>
+          <p:cNvPr id="22" name="Рисунок 21" descr="Изображение выглядит как Графика, Шрифт, графический дизайн, снимок экрана&#10;&#10;Автоматически созданное описание">
+            <a:extLst>
+              <a:ext uri="{FF2B5EF4-FFF2-40B4-BE49-F238E27FC236}">
+                <a16:creationId xmlns:a16="http://schemas.microsoft.com/office/drawing/2014/main" id="{1D6A952D-A16E-01DD-37DC-8BC325D6C8B3}"/>
+              </a:ext>
+            </a:extLst>
+          </p:cNvPr>
+          <p:cNvPicPr>
+            <a:picLocks noChangeAspect="1"/>
+          </p:cNvPicPr>
+          <p:nvPr/>
+        </p:nvPicPr>
+        <p:blipFill>
+          <a:blip r:embed="rId8" cstate="print">
+            <a:extLst>
+              <a:ext uri="{28A0092B-C50C-407E-A947-70E740481C1C}">
+                <a14:useLocalDpi xmlns:a14="http://schemas.microsoft.com/office/drawing/2010/main" val="0"/>
+              </a:ext>
+            </a:extLst>
+          </a:blip>
+          <a:stretch>
+            <a:fillRect/>
+          </a:stretch>
+        </p:blipFill>
+        <p:spPr>
+          <a:xfrm>
+            <a:off x="356595" y="310292"/>
+            <a:ext cx="1197622" cy="564179"/>
+          </a:xfrm>
+          <a:prstGeom prst="rect">
+            <a:avLst/>
+          </a:prstGeom>
+        </p:spPr>
+      </p:pic>
     </p:spTree>
     <p:extLst>
       <p:ext uri="{BB962C8B-B14F-4D97-AF65-F5344CB8AC3E}">
@@ -4188,53 +4054,6 @@
           </a:extLst>
         </p:spPr>
       </p:pic>
-      <p:pic>
-        <p:nvPicPr>
-          <p:cNvPr id="4" name="Picture 6">
-            <a:extLst>
-              <a:ext uri="{FF2B5EF4-FFF2-40B4-BE49-F238E27FC236}">
-                <a16:creationId xmlns:a16="http://schemas.microsoft.com/office/drawing/2014/main" id="{27E2CB62-0CA2-5EDF-DF03-3B5766C1C889}"/>
-              </a:ext>
-            </a:extLst>
-          </p:cNvPr>
-          <p:cNvPicPr>
-            <a:picLocks noChangeAspect="1" noChangeArrowheads="1"/>
-          </p:cNvPicPr>
-          <p:nvPr/>
-        </p:nvPicPr>
-        <p:blipFill>
-          <a:blip r:embed="rId3" cstate="print">
-            <a:extLst>
-              <a:ext uri="{28A0092B-C50C-407E-A947-70E740481C1C}">
-                <a14:useLocalDpi xmlns:a14="http://schemas.microsoft.com/office/drawing/2010/main" val="0"/>
-              </a:ext>
-            </a:extLst>
-          </a:blip>
-          <a:srcRect/>
-          <a:stretch>
-            <a:fillRect/>
-          </a:stretch>
-        </p:blipFill>
-        <p:spPr bwMode="auto">
-          <a:xfrm>
-            <a:off x="595086" y="234566"/>
-            <a:ext cx="936162" cy="757687"/>
-          </a:xfrm>
-          <a:prstGeom prst="rect">
-            <a:avLst/>
-          </a:prstGeom>
-          <a:noFill/>
-          <a:extLst>
-            <a:ext uri="{909E8E84-426E-40DD-AFC4-6F175D3DCCD1}">
-              <a14:hiddenFill xmlns:a14="http://schemas.microsoft.com/office/drawing/2010/main">
-                <a:solidFill>
-                  <a:srgbClr val="FFFFFF"/>
-                </a:solidFill>
-              </a14:hiddenFill>
-            </a:ext>
-          </a:extLst>
-        </p:spPr>
-      </p:pic>
       <p:sp>
         <p:nvSpPr>
           <p:cNvPr id="2" name="object 2">
@@ -4249,8 +4068,8 @@
         </p:nvSpPr>
         <p:spPr>
           <a:xfrm>
-            <a:off x="1009650" y="1504949"/>
-            <a:ext cx="5924292" cy="8089266"/>
+            <a:off x="576944" y="1359809"/>
+            <a:ext cx="6839857" cy="8927059"/>
           </a:xfrm>
           <a:prstGeom prst="rect">
             <a:avLst/>
@@ -4508,6 +4327,26 @@
               <a:t>в</a:t>
             </a:r>
             <a:r>
+              <a:rPr lang="en-US" sz="1200" noProof="0" dirty="0">
+                <a:solidFill>
+                  <a:srgbClr val="002060"/>
+                </a:solidFill>
+                <a:latin typeface="Century Gothic" panose="020B0502020202020204" pitchFamily="34" charset="0"/>
+                <a:cs typeface="Calibri"/>
+              </a:rPr>
+              <a:t> </a:t>
+            </a:r>
+            <a:r>
+              <a:rPr lang="ru-RU" sz="1200" b="1" noProof="0" dirty="0">
+                <a:solidFill>
+                  <a:srgbClr val="002060"/>
+                </a:solidFill>
+                <a:latin typeface="Century Gothic" panose="020B0502020202020204" pitchFamily="34" charset="0"/>
+                <a:cs typeface="Calibri"/>
+              </a:rPr>
+              <a:t>Первом</a:t>
+            </a:r>
+            <a:r>
               <a:rPr lang="ru-RU" sz="1200" spc="-10" noProof="0" dirty="0">
                 <a:solidFill>
                   <a:srgbClr val="002060"/>
@@ -4711,18 +4550,48 @@
                 <a:latin typeface="Century Gothic" panose="020B0502020202020204" pitchFamily="34" charset="0"/>
                 <a:cs typeface="Calibri"/>
               </a:rPr>
-              <a:t>Для получения дополнительной информации Вы можете обращаться по следующим контактам: </a:t>
-            </a:r>
-            <a:r>
-              <a:rPr lang="de-DE" sz="1200" noProof="0" dirty="0" err="1">
-                <a:solidFill>
-                  <a:srgbClr val="002060"/>
-                </a:solidFill>
-                <a:latin typeface="Century Gothic" panose="020B0502020202020204" pitchFamily="34" charset="0"/>
-                <a:cs typeface="Calibri"/>
-                <a:hlinkClick r:id="rId4"/>
-              </a:rPr>
-              <a:t>z.tymbayeva@satbayev.university</a:t>
+              <a:t>Для получения дополнительной информации Вы можете обращаться по следующим контактам</a:t>
+            </a:r>
+            <a:r>
+              <a:rPr lang="kk-KZ" sz="1200" dirty="0">
+                <a:solidFill>
+                  <a:srgbClr val="002060"/>
+                </a:solidFill>
+                <a:latin typeface="Century Gothic" panose="020B0502020202020204" pitchFamily="34" charset="0"/>
+                <a:cs typeface="Calibri"/>
+              </a:rPr>
+              <a:t>; </a:t>
+            </a:r>
+            <a:r>
+              <a:rPr lang="en-US" sz="1200" dirty="0">
+                <a:solidFill>
+                  <a:srgbClr val="002060"/>
+                </a:solidFill>
+                <a:latin typeface="Century Gothic" panose="020B0502020202020204" pitchFamily="34" charset="0"/>
+                <a:cs typeface="Calibri"/>
+              </a:rPr>
+              <a:t> </a:t>
+            </a:r>
+            <a:r>
+              <a:rPr lang="en-US" sz="1200" dirty="0" err="1">
+                <a:solidFill>
+                  <a:srgbClr val="002060"/>
+                </a:solidFill>
+                <a:latin typeface="Century Gothic" panose="020B0502020202020204" pitchFamily="34" charset="0"/>
+                <a:cs typeface="Calibri"/>
+              </a:rPr>
+              <a:t>s.bolatkyzy</a:t>
+            </a:r>
+            <a:r>
+              <a:rPr lang="de-DE" sz="1200" noProof="0" dirty="0">
+                <a:solidFill>
+                  <a:srgbClr val="002060"/>
+                </a:solidFill>
+                <a:latin typeface="Century Gothic" panose="020B0502020202020204" pitchFamily="34" charset="0"/>
+                <a:cs typeface="Calibri"/>
+                <a:hlinkClick r:id="rId3"/>
+              </a:rPr>
+              <a:t>@satbayev.university</a:t>
             </a:r>
             <a:r>
               <a:rPr lang="ru-RU" sz="1200" noProof="0" dirty="0">
@@ -4901,16 +4770,13 @@
               </a:rPr>
               <a:t>нам заранее</a:t>
             </a:r>
-            <a:r>
-              <a:rPr lang="ru-RU" sz="1200" spc="-10" noProof="0" dirty="0">
-                <a:solidFill>
-                  <a:srgbClr val="002060"/>
-                </a:solidFill>
-                <a:latin typeface="Century Gothic" panose="020B0502020202020204" pitchFamily="34" charset="0"/>
-                <a:cs typeface="Calibri"/>
-              </a:rPr>
-              <a:t> </a:t>
-            </a:r>
+          </a:p>
+          <a:p>
+            <a:pPr marL="12700" indent="349250" algn="just">
+              <a:spcBef>
+                <a:spcPts val="455"/>
+              </a:spcBef>
+            </a:pPr>
             <a:r>
               <a:rPr lang="ru-RU" sz="1200" noProof="0" dirty="0">
                 <a:solidFill>
@@ -4943,7 +4809,7 @@
                 </a:uFill>
                 <a:latin typeface="Century Gothic" panose="020B0502020202020204" pitchFamily="34" charset="0"/>
                 <a:cs typeface="Calibri"/>
-                <a:hlinkClick r:id="rId5">
+                <a:hlinkClick r:id="rId4">
                   <a:extLst>
                     <a:ext uri="{A12FA001-AC4F-418D-AE19-62706E023703}">
                       <ahyp:hlinkClr xmlns:ahyp="http://schemas.microsoft.com/office/drawing/2018/hyperlinkcolor" val="tx"/>
@@ -4960,7 +4826,7 @@
                 </a:solidFill>
                 <a:latin typeface="Century Gothic" panose="020B0502020202020204" pitchFamily="34" charset="0"/>
                 <a:cs typeface="Calibri"/>
-                <a:hlinkClick r:id="rId5">
+                <a:hlinkClick r:id="rId4">
                   <a:extLst>
                     <a:ext uri="{A12FA001-AC4F-418D-AE19-62706E023703}">
                       <ahyp:hlinkClr xmlns:ahyp="http://schemas.microsoft.com/office/drawing/2018/hyperlinkcolor" val="tx"/>
@@ -5140,14 +5006,216 @@
             </a:r>
           </a:p>
           <a:p>
-            <a:pPr marL="13970" marR="2704465" algn="just">
+            <a:pPr marL="12700" indent="349250" algn="just">
               <a:lnSpc>
-                <a:spcPts val="1100"/>
+                <a:spcPct val="100000"/>
               </a:lnSpc>
               <a:spcBef>
-                <a:spcPts val="35"/>
+                <a:spcPts val="625"/>
               </a:spcBef>
             </a:pPr>
+            <a:endParaRPr lang="ru-RU" sz="1200" b="1" spc="-20" dirty="0">
+              <a:solidFill>
+                <a:srgbClr val="002060"/>
+              </a:solidFill>
+              <a:latin typeface="Century Gothic" panose="020B0502020202020204" pitchFamily="34" charset="0"/>
+              <a:cs typeface="Calibri"/>
+            </a:endParaRPr>
+          </a:p>
+          <a:p>
+            <a:pPr marL="12700" indent="349250" algn="just">
+              <a:lnSpc>
+                <a:spcPct val="100000"/>
+              </a:lnSpc>
+              <a:spcBef>
+                <a:spcPts val="625"/>
+              </a:spcBef>
+            </a:pPr>
+            <a:r>
+              <a:rPr lang="ru-RU" sz="1200" b="1" i="1" spc="-20" dirty="0">
+                <a:solidFill>
+                  <a:srgbClr val="002060"/>
+                </a:solidFill>
+                <a:latin typeface="Century Gothic" panose="020B0502020202020204" pitchFamily="34" charset="0"/>
+                <a:cs typeface="Calibri"/>
+              </a:rPr>
+              <a:t>и</a:t>
+            </a:r>
+          </a:p>
+          <a:p>
+            <a:pPr marL="12700" indent="349250" algn="just">
+              <a:spcBef>
+                <a:spcPts val="710"/>
+              </a:spcBef>
+            </a:pPr>
+            <a:endParaRPr lang="ru-RU" sz="1200" b="1" spc="-10" noProof="0" dirty="0">
+              <a:solidFill>
+                <a:srgbClr val="002060"/>
+              </a:solidFill>
+              <a:uFill>
+                <a:solidFill>
+                  <a:srgbClr val="39A0D2"/>
+                </a:solidFill>
+              </a:uFill>
+              <a:latin typeface="Century Gothic" panose="020B0502020202020204" pitchFamily="34" charset="0"/>
+              <a:cs typeface="Calibri"/>
+            </a:endParaRPr>
+          </a:p>
+          <a:p>
+            <a:pPr marL="12700" indent="349250" algn="just">
+              <a:spcBef>
+                <a:spcPts val="710"/>
+              </a:spcBef>
+            </a:pPr>
+            <a:r>
+              <a:rPr lang="en-US" sz="1200" b="1" spc="-10" noProof="0" dirty="0">
+                <a:solidFill>
+                  <a:srgbClr val="002060"/>
+                </a:solidFill>
+                <a:uFill>
+                  <a:solidFill>
+                    <a:srgbClr val="39A0D2"/>
+                  </a:solidFill>
+                </a:uFill>
+                <a:latin typeface="Century Gothic" panose="020B0502020202020204" pitchFamily="34" charset="0"/>
+                <a:cs typeface="Calibri"/>
+              </a:rPr>
+              <a:t>Mirco Nowak</a:t>
+            </a:r>
+            <a:r>
+              <a:rPr lang="en-US" sz="1200" spc="-10" noProof="0" dirty="0">
+                <a:solidFill>
+                  <a:srgbClr val="002060"/>
+                </a:solidFill>
+                <a:uFill>
+                  <a:solidFill>
+                    <a:srgbClr val="39A0D2"/>
+                  </a:solidFill>
+                </a:uFill>
+                <a:latin typeface="Century Gothic" panose="020B0502020202020204" pitchFamily="34" charset="0"/>
+                <a:cs typeface="Calibri"/>
+              </a:rPr>
+              <a:t>, </a:t>
+            </a:r>
+          </a:p>
+          <a:p>
+            <a:pPr marL="12700" indent="349250" algn="just">
+              <a:spcBef>
+                <a:spcPts val="710"/>
+              </a:spcBef>
+            </a:pPr>
+            <a:r>
+              <a:rPr lang="ru-RU" sz="1200" b="1" spc="-10" noProof="0" dirty="0">
+                <a:solidFill>
+                  <a:srgbClr val="002060"/>
+                </a:solidFill>
+                <a:uFill>
+                  <a:solidFill>
+                    <a:srgbClr val="39A0D2"/>
+                  </a:solidFill>
+                </a:uFill>
+                <a:latin typeface="Century Gothic" panose="020B0502020202020204" pitchFamily="34" charset="0"/>
+                <a:cs typeface="Calibri"/>
+              </a:rPr>
+              <a:t>Генеральный директор, LUNO Group, </a:t>
+            </a:r>
+          </a:p>
+          <a:p>
+            <a:pPr marL="12700" indent="349250" algn="just">
+              <a:spcBef>
+                <a:spcPts val="710"/>
+              </a:spcBef>
+            </a:pPr>
+            <a:r>
+              <a:rPr lang="ru-RU" sz="1200" b="1" spc="-10" noProof="0" dirty="0">
+                <a:solidFill>
+                  <a:srgbClr val="002060"/>
+                </a:solidFill>
+                <a:uFill>
+                  <a:solidFill>
+                    <a:srgbClr val="39A0D2"/>
+                  </a:solidFill>
+                </a:uFill>
+                <a:latin typeface="Century Gothic" panose="020B0502020202020204" pitchFamily="34" charset="0"/>
+                <a:cs typeface="Calibri"/>
+              </a:rPr>
+              <a:t>Председатель Евразийского отделения </a:t>
+            </a:r>
+            <a:r>
+              <a:rPr lang="en-US" sz="1200" b="1" spc="-10" noProof="0" dirty="0" err="1">
+                <a:solidFill>
+                  <a:srgbClr val="002060"/>
+                </a:solidFill>
+                <a:uFill>
+                  <a:solidFill>
+                    <a:srgbClr val="39A0D2"/>
+                  </a:solidFill>
+                </a:uFill>
+                <a:latin typeface="Century Gothic" panose="020B0502020202020204" pitchFamily="34" charset="0"/>
+                <a:cs typeface="Calibri"/>
+              </a:rPr>
+              <a:t>Bundesvereinigung</a:t>
+            </a:r>
+            <a:r>
+              <a:rPr lang="en-US" sz="1200" b="1" spc="-10" noProof="0" dirty="0">
+                <a:solidFill>
+                  <a:srgbClr val="002060"/>
+                </a:solidFill>
+                <a:uFill>
+                  <a:solidFill>
+                    <a:srgbClr val="39A0D2"/>
+                  </a:solidFill>
+                </a:uFill>
+                <a:latin typeface="Century Gothic" panose="020B0502020202020204" pitchFamily="34" charset="0"/>
+                <a:cs typeface="Calibri"/>
+              </a:rPr>
+              <a:t> </a:t>
+            </a:r>
+            <a:r>
+              <a:rPr lang="en-US" sz="1200" b="1" spc="-10" noProof="0" dirty="0" err="1">
+                <a:solidFill>
+                  <a:srgbClr val="002060"/>
+                </a:solidFill>
+                <a:uFill>
+                  <a:solidFill>
+                    <a:srgbClr val="39A0D2"/>
+                  </a:solidFill>
+                </a:uFill>
+                <a:latin typeface="Century Gothic" panose="020B0502020202020204" pitchFamily="34" charset="0"/>
+                <a:cs typeface="Calibri"/>
+              </a:rPr>
+              <a:t>Logistik</a:t>
+            </a:r>
+            <a:r>
+              <a:rPr lang="en-US" sz="1200" b="1" spc="-10" noProof="0" dirty="0">
+                <a:solidFill>
+                  <a:srgbClr val="002060"/>
+                </a:solidFill>
+                <a:uFill>
+                  <a:solidFill>
+                    <a:srgbClr val="39A0D2"/>
+                  </a:solidFill>
+                </a:uFill>
+                <a:latin typeface="Century Gothic" panose="020B0502020202020204" pitchFamily="34" charset="0"/>
+                <a:cs typeface="Calibri"/>
+              </a:rPr>
+              <a:t> (BVL), </a:t>
+            </a:r>
+            <a:r>
+              <a:rPr lang="ru-RU" sz="1200" b="1" spc="-10" noProof="0" dirty="0">
+                <a:solidFill>
+                  <a:srgbClr val="002060"/>
+                </a:solidFill>
+                <a:uFill>
+                  <a:solidFill>
+                    <a:srgbClr val="39A0D2"/>
+                  </a:solidFill>
+                </a:uFill>
+                <a:latin typeface="Century Gothic" panose="020B0502020202020204" pitchFamily="34" charset="0"/>
+                <a:cs typeface="Calibri"/>
+              </a:rPr>
+              <a:t>Германия</a:t>
+            </a:r>
             <a:endParaRPr lang="ru-RU" sz="1200" spc="-20" noProof="0" dirty="0">
               <a:solidFill>
                 <a:srgbClr val="002060"/>
@@ -5158,6 +5226,42 @@
           </a:p>
         </p:txBody>
       </p:sp>
+      <p:pic>
+        <p:nvPicPr>
+          <p:cNvPr id="5" name="Рисунок 4" descr="Изображение выглядит как Графика, Шрифт, графический дизайн, снимок экрана&#10;&#10;Автоматически созданное описание">
+            <a:extLst>
+              <a:ext uri="{FF2B5EF4-FFF2-40B4-BE49-F238E27FC236}">
+                <a16:creationId xmlns:a16="http://schemas.microsoft.com/office/drawing/2014/main" id="{0767B7AB-2458-5A62-3299-AF72C8974BE2}"/>
+              </a:ext>
+            </a:extLst>
+          </p:cNvPr>
+          <p:cNvPicPr>
+            <a:picLocks noChangeAspect="1"/>
+          </p:cNvPicPr>
+          <p:nvPr/>
+        </p:nvPicPr>
+        <p:blipFill>
+          <a:blip r:embed="rId5" cstate="print">
+            <a:extLst>
+              <a:ext uri="{28A0092B-C50C-407E-A947-70E740481C1C}">
+                <a14:useLocalDpi xmlns:a14="http://schemas.microsoft.com/office/drawing/2010/main" val="0"/>
+              </a:ext>
+            </a:extLst>
+          </a:blip>
+          <a:stretch>
+            <a:fillRect/>
+          </a:stretch>
+        </p:blipFill>
+        <p:spPr>
+          <a:xfrm>
+            <a:off x="356595" y="310292"/>
+            <a:ext cx="1197622" cy="564179"/>
+          </a:xfrm>
+          <a:prstGeom prst="rect">
+            <a:avLst/>
+          </a:prstGeom>
+        </p:spPr>
+      </p:pic>
     </p:spTree>
     <p:extLst>
       <p:ext uri="{BB962C8B-B14F-4D97-AF65-F5344CB8AC3E}">
@@ -5241,53 +5345,6 @@
           </a:extLst>
         </p:spPr>
       </p:pic>
-      <p:pic>
-        <p:nvPicPr>
-          <p:cNvPr id="4" name="Picture 6">
-            <a:extLst>
-              <a:ext uri="{FF2B5EF4-FFF2-40B4-BE49-F238E27FC236}">
-                <a16:creationId xmlns:a16="http://schemas.microsoft.com/office/drawing/2014/main" id="{FC236C3E-A948-ED90-6833-23B21CA3CA2D}"/>
-              </a:ext>
-            </a:extLst>
-          </p:cNvPr>
-          <p:cNvPicPr>
-            <a:picLocks noChangeAspect="1" noChangeArrowheads="1"/>
-          </p:cNvPicPr>
-          <p:nvPr/>
-        </p:nvPicPr>
-        <p:blipFill>
-          <a:blip r:embed="rId3" cstate="print">
-            <a:extLst>
-              <a:ext uri="{28A0092B-C50C-407E-A947-70E740481C1C}">
-                <a14:useLocalDpi xmlns:a14="http://schemas.microsoft.com/office/drawing/2010/main" val="0"/>
-              </a:ext>
-            </a:extLst>
-          </a:blip>
-          <a:srcRect/>
-          <a:stretch>
-            <a:fillRect/>
-          </a:stretch>
-        </p:blipFill>
-        <p:spPr bwMode="auto">
-          <a:xfrm>
-            <a:off x="595086" y="234566"/>
-            <a:ext cx="936162" cy="757687"/>
-          </a:xfrm>
-          <a:prstGeom prst="rect">
-            <a:avLst/>
-          </a:prstGeom>
-          <a:noFill/>
-          <a:extLst>
-            <a:ext uri="{909E8E84-426E-40DD-AFC4-6F175D3DCCD1}">
-              <a14:hiddenFill xmlns:a14="http://schemas.microsoft.com/office/drawing/2010/main">
-                <a:solidFill>
-                  <a:srgbClr val="FFFFFF"/>
-                </a:solidFill>
-              </a14:hiddenFill>
-            </a:ext>
-          </a:extLst>
-        </p:spPr>
-      </p:pic>
       <p:sp>
         <p:nvSpPr>
           <p:cNvPr id="2" name="object 2">
@@ -5302,8 +5359,8 @@
         </p:nvSpPr>
         <p:spPr>
           <a:xfrm>
-            <a:off x="595086" y="1246049"/>
-            <a:ext cx="6706544" cy="9048631"/>
+            <a:off x="595086" y="1202505"/>
+            <a:ext cx="6502400" cy="8871852"/>
           </a:xfrm>
           <a:prstGeom prst="rect">
             <a:avLst/>
@@ -5374,7 +5431,7 @@
                 <a:effectLst/>
                 <a:latin typeface="Century Gothic" panose="020B0502020202020204" pitchFamily="34" charset="0"/>
               </a:rPr>
-              <a:t>Казахстанско-Германского транспортно-логистического форума</a:t>
+              <a:t>Первый Казахстанско-Германский транспортно-логистический форум</a:t>
             </a:r>
             <a:br>
               <a:rPr kumimoji="0" lang="ru-RU" altLang="ru-RU" sz="1100" b="1" i="0" u="none" strike="noStrike" cap="none" normalizeH="0" baseline="0" dirty="0">
@@ -5694,7 +5751,7 @@
             </a:r>
           </a:p>
           <a:p>
-            <a:pPr marL="330200" algn="just">
+            <a:pPr marL="355600" algn="just">
               <a:spcBef>
                 <a:spcPts val="15"/>
               </a:spcBef>
@@ -5768,7 +5825,7 @@
             </a:endParaRPr>
           </a:p>
           <a:p>
-            <a:pPr marL="330200" marR="382270" algn="just" rtl="0">
+            <a:pPr marL="355600" marR="382270" algn="just" rtl="0">
               <a:lnSpc>
                 <a:spcPct val="102200"/>
               </a:lnSpc>
@@ -5790,10 +5847,10 @@
                 <a:effectLst/>
                 <a:latin typeface="Century Gothic" panose="020B0502020202020204" pitchFamily="34" charset="0"/>
               </a:rPr>
-              <a:t>Г-жа Джудит Бланк</a:t>
-            </a:r>
-            <a:r>
-              <a:rPr kumimoji="0" lang="ru-RU" altLang="ru-RU" sz="1100" b="0" i="0" u="none" strike="noStrike" cap="none" normalizeH="0" baseline="0" dirty="0">
+              <a:t>Г-н Йоахим Фриц, </a:t>
+            </a:r>
+            <a:r>
+              <a:rPr kumimoji="0" lang="ru-RU" altLang="ru-RU" sz="1100" i="0" u="none" strike="noStrike" cap="none" normalizeH="0" baseline="0" dirty="0">
                 <a:ln>
                   <a:noFill/>
                 </a:ln>
@@ -5803,18 +5860,8 @@
                 <a:effectLst/>
                 <a:latin typeface="Century Gothic" panose="020B0502020202020204" pitchFamily="34" charset="0"/>
               </a:rPr>
-              <a:t>, директор проекта, Региональная программа содействия торговле в Центральной Азии/Программа развития потенциала TCTC, GIZ Центральная Азия</a:t>
-            </a:r>
-          </a:p>
-          <a:p>
-            <a:pPr marL="355600" algn="just">
-              <a:lnSpc>
-                <a:spcPct val="100000"/>
-              </a:lnSpc>
-              <a:spcBef>
-                <a:spcPts val="15"/>
-              </a:spcBef>
-            </a:pPr>
+              <a:t>региональный директор GIZ по Центральной Азии</a:t>
+            </a:r>
             <a:endParaRPr sz="1100" dirty="0">
               <a:solidFill>
                 <a:srgbClr val="002060"/>
@@ -5833,6 +5880,567 @@
               </a:spcBef>
             </a:pPr>
             <a:r>
+              <a:rPr lang="ru-RU" sz="1100" dirty="0">
+                <a:solidFill>
+                  <a:srgbClr val="002060"/>
+                </a:solidFill>
+                <a:latin typeface="Century Gothic" panose="020B0502020202020204" pitchFamily="34" charset="0"/>
+                <a:cs typeface="Calibri"/>
+              </a:rPr>
+              <a:t>11:20 – 11:50 </a:t>
+            </a:r>
+            <a:r>
+              <a:rPr lang="ru-RU" sz="1100" b="1" dirty="0">
+                <a:solidFill>
+                  <a:srgbClr val="002060"/>
+                </a:solidFill>
+                <a:latin typeface="Century Gothic" panose="020B0502020202020204" pitchFamily="34" charset="0"/>
+                <a:cs typeface="Calibri"/>
+              </a:rPr>
+              <a:t>Импульсы</a:t>
+            </a:r>
+            <a:r>
+              <a:rPr lang="ru-RU" sz="1100" dirty="0">
+                <a:solidFill>
+                  <a:srgbClr val="002060"/>
+                </a:solidFill>
+                <a:latin typeface="Century Gothic" panose="020B0502020202020204" pitchFamily="34" charset="0"/>
+                <a:cs typeface="Calibri"/>
+              </a:rPr>
+              <a:t> </a:t>
+            </a:r>
+          </a:p>
+          <a:p>
+            <a:pPr marL="26034" algn="just">
+              <a:lnSpc>
+                <a:spcPct val="100000"/>
+              </a:lnSpc>
+              <a:spcBef>
+                <a:spcPts val="625"/>
+              </a:spcBef>
+            </a:pPr>
+            <a:r>
+              <a:rPr lang="ru-RU" sz="1100" b="1" dirty="0">
+                <a:solidFill>
+                  <a:srgbClr val="002060"/>
+                </a:solidFill>
+                <a:latin typeface="Century Gothic" panose="020B0502020202020204" pitchFamily="34" charset="0"/>
+                <a:cs typeface="Calibri"/>
+              </a:rPr>
+              <a:t>Модератор: г-н Марат М. Идрисов, </a:t>
+            </a:r>
+            <a:r>
+              <a:rPr lang="ru-RU" sz="1100" dirty="0">
+                <a:solidFill>
+                  <a:srgbClr val="002060"/>
+                </a:solidFill>
+                <a:latin typeface="Century Gothic" panose="020B0502020202020204" pitchFamily="34" charset="0"/>
+                <a:cs typeface="Calibri"/>
+              </a:rPr>
+              <a:t>Казахстанский институт развития промышленности</a:t>
+            </a:r>
+          </a:p>
+          <a:p>
+            <a:pPr marL="26034" algn="just">
+              <a:lnSpc>
+                <a:spcPct val="100000"/>
+              </a:lnSpc>
+              <a:spcBef>
+                <a:spcPts val="625"/>
+              </a:spcBef>
+            </a:pPr>
+            <a:r>
+              <a:rPr lang="ru-RU" sz="1100" b="1" dirty="0">
+                <a:solidFill>
+                  <a:srgbClr val="002060"/>
+                </a:solidFill>
+                <a:latin typeface="Century Gothic" panose="020B0502020202020204" pitchFamily="34" charset="0"/>
+                <a:cs typeface="Calibri"/>
+              </a:rPr>
+              <a:t>Спикеры:</a:t>
+            </a:r>
+          </a:p>
+          <a:p>
+            <a:pPr marL="358775" algn="just">
+              <a:lnSpc>
+                <a:spcPct val="100000"/>
+              </a:lnSpc>
+              <a:spcBef>
+                <a:spcPts val="625"/>
+              </a:spcBef>
+            </a:pPr>
+            <a:r>
+              <a:rPr lang="ru-RU" sz="1100" b="1" dirty="0">
+                <a:solidFill>
+                  <a:srgbClr val="002060"/>
+                </a:solidFill>
+                <a:latin typeface="Century Gothic" panose="020B0502020202020204" pitchFamily="34" charset="0"/>
+                <a:cs typeface="Calibri"/>
+              </a:rPr>
+              <a:t>г-жа Гульмира С. Муханова, </a:t>
+            </a:r>
+            <a:r>
+              <a:rPr lang="ru-RU" sz="1100" dirty="0">
+                <a:solidFill>
+                  <a:srgbClr val="002060"/>
+                </a:solidFill>
+                <a:latin typeface="Century Gothic" panose="020B0502020202020204" pitchFamily="34" charset="0"/>
+                <a:cs typeface="Calibri"/>
+              </a:rPr>
+              <a:t>Кандидат технических наук, доцент, профессор Школы транспортной инженерии и логистики им. М. </a:t>
+            </a:r>
+            <a:r>
+              <a:rPr lang="ru-RU" sz="1100" dirty="0" err="1">
+                <a:solidFill>
+                  <a:srgbClr val="002060"/>
+                </a:solidFill>
+                <a:latin typeface="Century Gothic" panose="020B0502020202020204" pitchFamily="34" charset="0"/>
+                <a:cs typeface="Calibri"/>
+              </a:rPr>
+              <a:t>Тынышпаева</a:t>
+            </a:r>
+            <a:endParaRPr lang="ru-RU" sz="1100" dirty="0">
+              <a:solidFill>
+                <a:srgbClr val="002060"/>
+              </a:solidFill>
+              <a:latin typeface="Century Gothic" panose="020B0502020202020204" pitchFamily="34" charset="0"/>
+              <a:cs typeface="Calibri"/>
+            </a:endParaRPr>
+          </a:p>
+          <a:p>
+            <a:pPr marL="358775" algn="just">
+              <a:lnSpc>
+                <a:spcPct val="100000"/>
+              </a:lnSpc>
+              <a:spcBef>
+                <a:spcPts val="625"/>
+              </a:spcBef>
+            </a:pPr>
+            <a:r>
+              <a:rPr lang="ru-RU" sz="1100" b="1" dirty="0">
+                <a:solidFill>
+                  <a:srgbClr val="002060"/>
+                </a:solidFill>
+                <a:latin typeface="Century Gothic" panose="020B0502020202020204" pitchFamily="34" charset="0"/>
+                <a:cs typeface="Calibri"/>
+              </a:rPr>
+              <a:t>г-жа Джудит Бланк, </a:t>
+            </a:r>
+            <a:r>
+              <a:rPr lang="ru-RU" sz="1100" dirty="0">
+                <a:solidFill>
+                  <a:srgbClr val="002060"/>
+                </a:solidFill>
+                <a:latin typeface="Century Gothic" panose="020B0502020202020204" pitchFamily="34" charset="0"/>
+                <a:cs typeface="Calibri"/>
+              </a:rPr>
+              <a:t>Руководитель проекта, Региональная программа содействия торговле в Центральной Азии/Программа развития потенциала TCTC, GIZ Центральная Азия</a:t>
+            </a:r>
+          </a:p>
+          <a:p>
+            <a:pPr marL="358775" algn="just">
+              <a:lnSpc>
+                <a:spcPct val="100000"/>
+              </a:lnSpc>
+              <a:spcBef>
+                <a:spcPts val="625"/>
+              </a:spcBef>
+            </a:pPr>
+            <a:r>
+              <a:rPr lang="ru-RU" sz="1100" b="1" dirty="0">
+                <a:solidFill>
+                  <a:srgbClr val="002060"/>
+                </a:solidFill>
+                <a:latin typeface="Century Gothic" panose="020B0502020202020204" pitchFamily="34" charset="0"/>
+                <a:cs typeface="Calibri"/>
+              </a:rPr>
+              <a:t>Г-н Владимир </a:t>
+            </a:r>
+            <a:r>
+              <a:rPr lang="ru-RU" sz="1100" b="1" dirty="0" err="1">
+                <a:solidFill>
+                  <a:srgbClr val="002060"/>
+                </a:solidFill>
+                <a:latin typeface="Century Gothic" panose="020B0502020202020204" pitchFamily="34" charset="0"/>
+                <a:cs typeface="Calibri"/>
+              </a:rPr>
+              <a:t>Туреханов</a:t>
+            </a:r>
+            <a:r>
+              <a:rPr lang="ru-RU" sz="1100" b="1" dirty="0">
+                <a:solidFill>
+                  <a:srgbClr val="002060"/>
+                </a:solidFill>
+                <a:latin typeface="Century Gothic" panose="020B0502020202020204" pitchFamily="34" charset="0"/>
+                <a:cs typeface="Calibri"/>
+              </a:rPr>
+              <a:t>, </a:t>
+            </a:r>
+            <a:r>
+              <a:rPr lang="ru-RU" sz="1100" dirty="0">
+                <a:solidFill>
+                  <a:srgbClr val="002060"/>
+                </a:solidFill>
+                <a:latin typeface="Century Gothic" panose="020B0502020202020204" pitchFamily="34" charset="0"/>
+                <a:cs typeface="Calibri"/>
+              </a:rPr>
+              <a:t>руководитель Казахстанской ассоциации автоматизации и робототехники (KAAR)</a:t>
+            </a:r>
+          </a:p>
+          <a:p>
+            <a:pPr marL="26034" algn="just">
+              <a:lnSpc>
+                <a:spcPct val="100000"/>
+              </a:lnSpc>
+              <a:spcBef>
+                <a:spcPts val="625"/>
+              </a:spcBef>
+            </a:pPr>
+            <a:r>
+              <a:rPr lang="ru-RU" sz="1100" dirty="0">
+                <a:solidFill>
+                  <a:srgbClr val="002060"/>
+                </a:solidFill>
+                <a:latin typeface="Century Gothic" panose="020B0502020202020204" pitchFamily="34" charset="0"/>
+                <a:cs typeface="Calibri"/>
+              </a:rPr>
+              <a:t>11:50 – 13:00 </a:t>
+            </a:r>
+            <a:r>
+              <a:rPr lang="ru-RU" sz="1100" b="1" dirty="0">
+                <a:solidFill>
+                  <a:srgbClr val="002060"/>
+                </a:solidFill>
+                <a:latin typeface="Century Gothic" panose="020B0502020202020204" pitchFamily="34" charset="0"/>
+                <a:cs typeface="Calibri"/>
+              </a:rPr>
+              <a:t>Панельная дискуссия </a:t>
+            </a:r>
+            <a:r>
+              <a:rPr lang="en-US" sz="1100" b="1" dirty="0">
+                <a:solidFill>
+                  <a:srgbClr val="002060"/>
+                </a:solidFill>
+                <a:latin typeface="Century Gothic" panose="020B0502020202020204" pitchFamily="34" charset="0"/>
+                <a:cs typeface="Calibri"/>
+              </a:rPr>
+              <a:t>“</a:t>
+            </a:r>
+            <a:r>
+              <a:rPr lang="ru-RU" sz="1100" b="1" dirty="0">
+                <a:solidFill>
+                  <a:srgbClr val="002060"/>
+                </a:solidFill>
+                <a:latin typeface="Century Gothic" panose="020B0502020202020204" pitchFamily="34" charset="0"/>
+                <a:cs typeface="Calibri"/>
+              </a:rPr>
+              <a:t>Средний коридор</a:t>
+            </a:r>
+            <a:r>
+              <a:rPr lang="en-US" sz="1100" b="1" dirty="0">
+                <a:solidFill>
+                  <a:srgbClr val="002060"/>
+                </a:solidFill>
+                <a:latin typeface="Century Gothic" panose="020B0502020202020204" pitchFamily="34" charset="0"/>
+                <a:cs typeface="Calibri"/>
+              </a:rPr>
+              <a:t>”</a:t>
+            </a:r>
+            <a:r>
+              <a:rPr lang="ru-RU" sz="1100" b="1" dirty="0">
+                <a:solidFill>
+                  <a:srgbClr val="002060"/>
+                </a:solidFill>
+                <a:latin typeface="Century Gothic" panose="020B0502020202020204" pitchFamily="34" charset="0"/>
+                <a:cs typeface="Calibri"/>
+              </a:rPr>
+              <a:t> </a:t>
+            </a:r>
+            <a:endParaRPr lang="en-US" sz="1100" b="1" dirty="0">
+              <a:solidFill>
+                <a:srgbClr val="002060"/>
+              </a:solidFill>
+              <a:latin typeface="Century Gothic" panose="020B0502020202020204" pitchFamily="34" charset="0"/>
+              <a:cs typeface="Calibri"/>
+            </a:endParaRPr>
+          </a:p>
+          <a:p>
+            <a:pPr marL="26034" algn="just">
+              <a:lnSpc>
+                <a:spcPct val="100000"/>
+              </a:lnSpc>
+              <a:spcBef>
+                <a:spcPts val="625"/>
+              </a:spcBef>
+            </a:pPr>
+            <a:r>
+              <a:rPr lang="ru-RU" sz="1100" b="1" dirty="0">
+                <a:solidFill>
+                  <a:srgbClr val="002060"/>
+                </a:solidFill>
+                <a:latin typeface="Century Gothic" panose="020B0502020202020204" pitchFamily="34" charset="0"/>
+                <a:cs typeface="Calibri"/>
+              </a:rPr>
+              <a:t>Модератор: г-н Мирко Новак, </a:t>
+            </a:r>
+            <a:r>
+              <a:rPr lang="ru-RU" sz="1100" dirty="0">
+                <a:solidFill>
+                  <a:srgbClr val="002060"/>
+                </a:solidFill>
+                <a:latin typeface="Century Gothic" panose="020B0502020202020204" pitchFamily="34" charset="0"/>
+                <a:cs typeface="Calibri"/>
+              </a:rPr>
+              <a:t>генеральный директор LUNO Group; Председатель Евразийского отделения </a:t>
+            </a:r>
+            <a:r>
+              <a:rPr lang="ru-RU" sz="1100" dirty="0" err="1">
+                <a:solidFill>
+                  <a:srgbClr val="002060"/>
+                </a:solidFill>
+                <a:latin typeface="Century Gothic" panose="020B0502020202020204" pitchFamily="34" charset="0"/>
+                <a:cs typeface="Calibri"/>
+              </a:rPr>
+              <a:t>Bundesvereinigung</a:t>
+            </a:r>
+            <a:r>
+              <a:rPr lang="ru-RU" sz="1100" dirty="0">
+                <a:solidFill>
+                  <a:srgbClr val="002060"/>
+                </a:solidFill>
+                <a:latin typeface="Century Gothic" panose="020B0502020202020204" pitchFamily="34" charset="0"/>
+                <a:cs typeface="Calibri"/>
+              </a:rPr>
+              <a:t> </a:t>
+            </a:r>
+            <a:r>
+              <a:rPr lang="ru-RU" sz="1100" dirty="0" err="1">
+                <a:solidFill>
+                  <a:srgbClr val="002060"/>
+                </a:solidFill>
+                <a:latin typeface="Century Gothic" panose="020B0502020202020204" pitchFamily="34" charset="0"/>
+                <a:cs typeface="Calibri"/>
+              </a:rPr>
+              <a:t>Logistik</a:t>
+            </a:r>
+            <a:r>
+              <a:rPr lang="ru-RU" sz="1100" dirty="0">
+                <a:solidFill>
+                  <a:srgbClr val="002060"/>
+                </a:solidFill>
+                <a:latin typeface="Century Gothic" panose="020B0502020202020204" pitchFamily="34" charset="0"/>
+                <a:cs typeface="Calibri"/>
+              </a:rPr>
+              <a:t> (BVL), Германия</a:t>
+            </a:r>
+          </a:p>
+          <a:p>
+            <a:pPr marL="26034" algn="just">
+              <a:lnSpc>
+                <a:spcPct val="100000"/>
+              </a:lnSpc>
+              <a:spcBef>
+                <a:spcPts val="625"/>
+              </a:spcBef>
+            </a:pPr>
+            <a:r>
+              <a:rPr lang="ru-RU" sz="1100" b="1" dirty="0">
+                <a:solidFill>
+                  <a:srgbClr val="002060"/>
+                </a:solidFill>
+                <a:latin typeface="Century Gothic" panose="020B0502020202020204" pitchFamily="34" charset="0"/>
+                <a:cs typeface="Calibri"/>
+              </a:rPr>
+              <a:t>Спикеры:</a:t>
+            </a:r>
+          </a:p>
+          <a:p>
+            <a:pPr marL="358775" algn="just">
+              <a:lnSpc>
+                <a:spcPct val="100000"/>
+              </a:lnSpc>
+              <a:spcBef>
+                <a:spcPts val="625"/>
+              </a:spcBef>
+            </a:pPr>
+            <a:r>
+              <a:rPr lang="ru-RU" sz="1100" dirty="0">
+                <a:solidFill>
+                  <a:srgbClr val="002060"/>
+                </a:solidFill>
+                <a:latin typeface="Century Gothic" panose="020B0502020202020204" pitchFamily="34" charset="0"/>
+                <a:cs typeface="Calibri"/>
+              </a:rPr>
+              <a:t>Представитель Ассоциации «</a:t>
+            </a:r>
+            <a:r>
+              <a:rPr lang="ru-RU" sz="1100" dirty="0" err="1">
+                <a:solidFill>
+                  <a:srgbClr val="002060"/>
+                </a:solidFill>
+                <a:latin typeface="Century Gothic" panose="020B0502020202020204" pitchFamily="34" charset="0"/>
+                <a:cs typeface="Calibri"/>
+              </a:rPr>
+              <a:t>КазЛогистик</a:t>
+            </a:r>
+            <a:r>
+              <a:rPr lang="ru-RU" sz="1100" dirty="0">
+                <a:solidFill>
+                  <a:srgbClr val="002060"/>
+                </a:solidFill>
+                <a:latin typeface="Century Gothic" panose="020B0502020202020204" pitchFamily="34" charset="0"/>
+                <a:cs typeface="Calibri"/>
+              </a:rPr>
+              <a:t>»</a:t>
+            </a:r>
+          </a:p>
+          <a:p>
+            <a:pPr marL="358775" algn="just">
+              <a:lnSpc>
+                <a:spcPct val="100000"/>
+              </a:lnSpc>
+              <a:spcBef>
+                <a:spcPts val="625"/>
+              </a:spcBef>
+            </a:pPr>
+            <a:r>
+              <a:rPr lang="ru-RU" sz="1100" dirty="0">
+                <a:solidFill>
+                  <a:srgbClr val="002060"/>
+                </a:solidFill>
+                <a:latin typeface="Century Gothic" panose="020B0502020202020204" pitchFamily="34" charset="0"/>
+                <a:cs typeface="Calibri"/>
+              </a:rPr>
+              <a:t>Представители казахстанских и немецких компаний </a:t>
+            </a:r>
+            <a:r>
+              <a:rPr lang="ru-RU" sz="1100">
+                <a:solidFill>
+                  <a:srgbClr val="002060"/>
+                </a:solidFill>
+                <a:latin typeface="Century Gothic" panose="020B0502020202020204" pitchFamily="34" charset="0"/>
+                <a:cs typeface="Calibri"/>
+              </a:rPr>
+              <a:t>и учреждений</a:t>
+            </a:r>
+            <a:endParaRPr lang="ru-RU" sz="1100" dirty="0">
+              <a:solidFill>
+                <a:srgbClr val="002060"/>
+              </a:solidFill>
+              <a:latin typeface="Century Gothic" panose="020B0502020202020204" pitchFamily="34" charset="0"/>
+              <a:cs typeface="Calibri"/>
+            </a:endParaRPr>
+          </a:p>
+          <a:p>
+            <a:pPr marL="26034" algn="just">
+              <a:spcBef>
+                <a:spcPts val="625"/>
+              </a:spcBef>
+            </a:pPr>
+            <a:r>
+              <a:rPr lang="ru-RU" sz="1100" dirty="0">
+                <a:solidFill>
+                  <a:srgbClr val="002060"/>
+                </a:solidFill>
+                <a:latin typeface="Century Gothic" panose="020B0502020202020204" pitchFamily="34" charset="0"/>
+                <a:cs typeface="Calibri"/>
+              </a:rPr>
+              <a:t>13:00 – 14:30 </a:t>
+            </a:r>
+            <a:r>
+              <a:rPr lang="ru-RU" sz="1100" b="1" dirty="0">
+                <a:solidFill>
+                  <a:srgbClr val="002060"/>
+                </a:solidFill>
+                <a:latin typeface="Century Gothic" panose="020B0502020202020204" pitchFamily="34" charset="0"/>
+                <a:cs typeface="Calibri"/>
+              </a:rPr>
+              <a:t>Обеденный перерыв</a:t>
+            </a:r>
+          </a:p>
+          <a:p>
+            <a:pPr algn="just"/>
+            <a:endParaRPr lang="ru-RU" sz="1100" dirty="0">
+              <a:latin typeface="Century Gothic" panose="020B0502020202020204" pitchFamily="34" charset="0"/>
+            </a:endParaRPr>
+          </a:p>
+          <a:p>
+            <a:pPr marL="26034" algn="just">
+              <a:spcBef>
+                <a:spcPts val="625"/>
+              </a:spcBef>
+            </a:pPr>
+            <a:r>
+              <a:rPr lang="ru-RU" sz="1100" dirty="0">
+                <a:solidFill>
+                  <a:srgbClr val="002060"/>
+                </a:solidFill>
+                <a:latin typeface="Century Gothic" panose="020B0502020202020204" pitchFamily="34" charset="0"/>
+                <a:cs typeface="Calibri"/>
+              </a:rPr>
+              <a:t>14:30 – 17:00 </a:t>
+            </a:r>
+            <a:r>
+              <a:rPr lang="ru-RU" sz="1100" b="1" dirty="0">
+                <a:solidFill>
+                  <a:srgbClr val="002060"/>
+                </a:solidFill>
+                <a:latin typeface="Century Gothic" panose="020B0502020202020204" pitchFamily="34" charset="0"/>
+                <a:cs typeface="Calibri"/>
+              </a:rPr>
+              <a:t>B2B-встречи</a:t>
+            </a:r>
+          </a:p>
+          <a:p>
+            <a:pPr marL="26034" algn="just">
+              <a:spcBef>
+                <a:spcPts val="625"/>
+              </a:spcBef>
+            </a:pPr>
+            <a:r>
+              <a:rPr lang="ru-RU" sz="1100" dirty="0">
+                <a:solidFill>
+                  <a:srgbClr val="002060"/>
+                </a:solidFill>
+                <a:latin typeface="Century Gothic" panose="020B0502020202020204" pitchFamily="34" charset="0"/>
+                <a:cs typeface="Calibri"/>
+              </a:rPr>
+              <a:t>Серия целевых деловых встреч, ориентированных на поиск потенциальных партнёров и обсуждение совместных научных, образовательных и бизнес-проектов. Для удобства участников будет функционировать официальный сайт форума с информацией об участниках и системой бронирования встреч</a:t>
+            </a:r>
+            <a:r>
+              <a:rPr lang="ru-RU" sz="1100" dirty="0">
+                <a:latin typeface="Century Gothic" panose="020B0502020202020204" pitchFamily="34" charset="0"/>
+              </a:rPr>
+              <a:t>.</a:t>
+            </a:r>
+          </a:p>
+          <a:p>
+            <a:pPr marL="26034" algn="just">
+              <a:lnSpc>
+                <a:spcPct val="100000"/>
+              </a:lnSpc>
+              <a:spcBef>
+                <a:spcPts val="625"/>
+              </a:spcBef>
+            </a:pPr>
+            <a:endParaRPr lang="ru-RU" sz="1100" dirty="0">
+              <a:solidFill>
+                <a:srgbClr val="002060"/>
+              </a:solidFill>
+              <a:latin typeface="Century Gothic" panose="020B0502020202020204" pitchFamily="34" charset="0"/>
+              <a:cs typeface="Calibri"/>
+            </a:endParaRPr>
+          </a:p>
+          <a:p>
+            <a:pPr marL="26034" algn="just">
+              <a:lnSpc>
+                <a:spcPct val="100000"/>
+              </a:lnSpc>
+              <a:spcBef>
+                <a:spcPts val="625"/>
+              </a:spcBef>
+            </a:pPr>
+            <a:r>
               <a:rPr sz="1100" dirty="0">
                 <a:solidFill>
                   <a:srgbClr val="002060"/>
@@ -5850,7 +6458,7 @@
                 <a:latin typeface="Century Gothic" panose="020B0502020202020204" pitchFamily="34" charset="0"/>
                 <a:cs typeface="Calibri"/>
               </a:rPr>
-              <a:t>1</a:t>
+              <a:t>7</a:t>
             </a:r>
             <a:r>
               <a:rPr sz="1100" dirty="0">
@@ -5870,10 +6478,20 @@
                 <a:latin typeface="Century Gothic" panose="020B0502020202020204" pitchFamily="34" charset="0"/>
                 <a:cs typeface="Calibri"/>
               </a:rPr>
-              <a:t>20 – 12:20</a:t>
-            </a:r>
-            <a:r>
-              <a:rPr sz="1100" spc="40" dirty="0">
+              <a:t>0</a:t>
+            </a:r>
+            <a:r>
+              <a:rPr sz="1100" dirty="0">
+                <a:solidFill>
+                  <a:srgbClr val="002060"/>
+                </a:solidFill>
+                <a:latin typeface="Century Gothic" panose="020B0502020202020204" pitchFamily="34" charset="0"/>
+                <a:cs typeface="Calibri"/>
+              </a:rPr>
+              <a:t>0</a:t>
+            </a:r>
+            <a:r>
+              <a:rPr sz="1100" spc="5" dirty="0">
                 <a:solidFill>
                   <a:srgbClr val="002060"/>
                 </a:solidFill>
@@ -5883,6 +6501,67 @@
               <a:t> </a:t>
             </a:r>
             <a:r>
+              <a:rPr sz="1100" b="1" spc="-10" dirty="0">
+                <a:solidFill>
+                  <a:srgbClr val="002060"/>
+                </a:solidFill>
+                <a:latin typeface="Century Gothic" panose="020B0502020202020204" pitchFamily="34" charset="0"/>
+                <a:cs typeface="Calibri"/>
+              </a:rPr>
+              <a:t>Завершение</a:t>
+            </a:r>
+            <a:r>
+              <a:rPr sz="1100" b="1" spc="25" dirty="0">
+                <a:solidFill>
+                  <a:srgbClr val="002060"/>
+                </a:solidFill>
+                <a:latin typeface="Century Gothic" panose="020B0502020202020204" pitchFamily="34" charset="0"/>
+                <a:cs typeface="Calibri"/>
+              </a:rPr>
+              <a:t> </a:t>
+            </a:r>
+            <a:r>
+              <a:rPr sz="1100" b="1" spc="-10" dirty="0">
+                <a:solidFill>
+                  <a:srgbClr val="002060"/>
+                </a:solidFill>
+                <a:latin typeface="Century Gothic" panose="020B0502020202020204" pitchFamily="34" charset="0"/>
+                <a:cs typeface="Calibri"/>
+              </a:rPr>
+              <a:t>Форума</a:t>
+            </a:r>
+            <a:endParaRPr sz="1100" dirty="0">
+              <a:solidFill>
+                <a:srgbClr val="002060"/>
+              </a:solidFill>
+              <a:latin typeface="Century Gothic" panose="020B0502020202020204" pitchFamily="34" charset="0"/>
+              <a:cs typeface="Calibri"/>
+            </a:endParaRPr>
+          </a:p>
+          <a:p>
+            <a:pPr marL="26034" algn="just">
+              <a:lnSpc>
+                <a:spcPct val="100000"/>
+              </a:lnSpc>
+              <a:spcBef>
+                <a:spcPts val="600"/>
+              </a:spcBef>
+            </a:pPr>
+            <a:endParaRPr lang="ru-RU" sz="1100" b="1" dirty="0">
+              <a:solidFill>
+                <a:srgbClr val="002060"/>
+              </a:solidFill>
+              <a:latin typeface="Century Gothic" panose="020B0502020202020204" pitchFamily="34" charset="0"/>
+              <a:cs typeface="Calibri"/>
+            </a:endParaRPr>
+          </a:p>
+          <a:p>
+            <a:pPr marL="26034" algn="just">
+              <a:spcBef>
+                <a:spcPts val="600"/>
+              </a:spcBef>
+            </a:pPr>
+            <a:r>
               <a:rPr sz="1100" b="1" dirty="0" err="1">
                 <a:solidFill>
                   <a:srgbClr val="002060"/>
@@ -5890,10 +6569,10 @@
                 <a:latin typeface="Century Gothic" panose="020B0502020202020204" pitchFamily="34" charset="0"/>
                 <a:cs typeface="Calibri"/>
               </a:rPr>
-              <a:t>Пленарное</a:t>
-            </a:r>
-            <a:r>
-              <a:rPr sz="1100" b="1" spc="-25" dirty="0">
+              <a:t>Вечерний</a:t>
+            </a:r>
+            <a:r>
+              <a:rPr sz="1100" b="1" spc="-30" dirty="0">
                 <a:solidFill>
                   <a:srgbClr val="002060"/>
                 </a:solidFill>
@@ -5903,6 +6582,180 @@
               <a:t> </a:t>
             </a:r>
             <a:r>
+              <a:rPr sz="1100" b="1" spc="-20" dirty="0" err="1">
+                <a:solidFill>
+                  <a:srgbClr val="002060"/>
+                </a:solidFill>
+                <a:latin typeface="Century Gothic" panose="020B0502020202020204" pitchFamily="34" charset="0"/>
+                <a:cs typeface="Calibri"/>
+              </a:rPr>
+              <a:t>прием</a:t>
+            </a:r>
+            <a:r>
+              <a:rPr lang="ru-RU" sz="1100" b="1" spc="-20" dirty="0">
+                <a:solidFill>
+                  <a:srgbClr val="002060"/>
+                </a:solidFill>
+                <a:latin typeface="Century Gothic" panose="020B0502020202020204" pitchFamily="34" charset="0"/>
+                <a:cs typeface="Calibri"/>
+              </a:rPr>
+              <a:t> </a:t>
+            </a:r>
+            <a:r>
+              <a:rPr lang="en-US" sz="1100" spc="-10" noProof="0" dirty="0">
+                <a:solidFill>
+                  <a:srgbClr val="002060"/>
+                </a:solidFill>
+                <a:uFill>
+                  <a:solidFill>
+                    <a:srgbClr val="39A0D2"/>
+                  </a:solidFill>
+                </a:uFill>
+                <a:latin typeface="Century Gothic" panose="020B0502020202020204" pitchFamily="34" charset="0"/>
+                <a:cs typeface="Calibri"/>
+              </a:rPr>
+              <a:t>(</a:t>
+            </a:r>
+            <a:r>
+              <a:rPr lang="en-US" sz="1100" spc="-10" noProof="0" dirty="0" err="1">
+                <a:solidFill>
+                  <a:srgbClr val="002060"/>
+                </a:solidFill>
+                <a:highlight>
+                  <a:srgbClr val="FFFF00"/>
+                </a:highlight>
+                <a:uFill>
+                  <a:solidFill>
+                    <a:srgbClr val="39A0D2"/>
+                  </a:solidFill>
+                </a:uFill>
+                <a:latin typeface="Century Gothic" panose="020B0502020202020204" pitchFamily="34" charset="0"/>
+                <a:cs typeface="Calibri"/>
+              </a:rPr>
+              <a:t>Paulaner</a:t>
+            </a:r>
+            <a:r>
+              <a:rPr lang="en-US" sz="1100" spc="-10" noProof="0" dirty="0">
+                <a:solidFill>
+                  <a:srgbClr val="002060"/>
+                </a:solidFill>
+                <a:highlight>
+                  <a:srgbClr val="FFFF00"/>
+                </a:highlight>
+                <a:uFill>
+                  <a:solidFill>
+                    <a:srgbClr val="39A0D2"/>
+                  </a:solidFill>
+                </a:uFill>
+                <a:latin typeface="Century Gothic" panose="020B0502020202020204" pitchFamily="34" charset="0"/>
+                <a:cs typeface="Calibri"/>
+              </a:rPr>
+              <a:t> </a:t>
+            </a:r>
+            <a:r>
+              <a:rPr lang="en-US" sz="1100" spc="-10" noProof="0" dirty="0" err="1">
+                <a:solidFill>
+                  <a:srgbClr val="002060"/>
+                </a:solidFill>
+                <a:highlight>
+                  <a:srgbClr val="FFFF00"/>
+                </a:highlight>
+                <a:uFill>
+                  <a:solidFill>
+                    <a:srgbClr val="39A0D2"/>
+                  </a:solidFill>
+                </a:uFill>
+                <a:latin typeface="Century Gothic" panose="020B0502020202020204" pitchFamily="34" charset="0"/>
+                <a:cs typeface="Calibri"/>
+              </a:rPr>
+              <a:t>Bräuhaus</a:t>
+            </a:r>
+            <a:r>
+              <a:rPr lang="en-US" sz="1100" spc="-10" noProof="0" dirty="0">
+                <a:solidFill>
+                  <a:srgbClr val="002060"/>
+                </a:solidFill>
+                <a:highlight>
+                  <a:srgbClr val="FFFF00"/>
+                </a:highlight>
+                <a:uFill>
+                  <a:solidFill>
+                    <a:srgbClr val="39A0D2"/>
+                  </a:solidFill>
+                </a:uFill>
+                <a:latin typeface="Century Gothic" panose="020B0502020202020204" pitchFamily="34" charset="0"/>
+                <a:cs typeface="Calibri"/>
+              </a:rPr>
+              <a:t> Almaty)</a:t>
+            </a:r>
+          </a:p>
+          <a:p>
+            <a:pPr marL="26034" algn="just">
+              <a:spcBef>
+                <a:spcPts val="600"/>
+              </a:spcBef>
+            </a:pPr>
+            <a:r>
+              <a:rPr lang="ru-RU" sz="1100" spc="-20" dirty="0">
+                <a:solidFill>
+                  <a:srgbClr val="002060"/>
+                </a:solidFill>
+                <a:latin typeface="Century Gothic" panose="020B0502020202020204" pitchFamily="34" charset="0"/>
+                <a:cs typeface="Calibri"/>
+              </a:rPr>
+              <a:t>18:00 </a:t>
+            </a:r>
+            <a:r>
+              <a:rPr sz="1100" b="1" spc="-20" dirty="0" err="1">
+                <a:solidFill>
+                  <a:srgbClr val="002060"/>
+                </a:solidFill>
+                <a:latin typeface="Century Gothic" panose="020B0502020202020204" pitchFamily="34" charset="0"/>
+                <a:cs typeface="Calibri"/>
+              </a:rPr>
+              <a:t>Нетворкинг</a:t>
+            </a:r>
+            <a:r>
+              <a:rPr sz="1100" b="1" spc="-20" dirty="0">
+                <a:solidFill>
+                  <a:srgbClr val="002060"/>
+                </a:solidFill>
+                <a:latin typeface="Century Gothic" panose="020B0502020202020204" pitchFamily="34" charset="0"/>
+                <a:cs typeface="Calibri"/>
+              </a:rPr>
+              <a:t>, вечерний фуршет</a:t>
+            </a:r>
+          </a:p>
+          <a:p>
+            <a:pPr marL="26034" algn="just">
+              <a:lnSpc>
+                <a:spcPct val="100000"/>
+              </a:lnSpc>
+              <a:spcBef>
+                <a:spcPts val="615"/>
+              </a:spcBef>
+            </a:pPr>
+            <a:r>
+              <a:rPr lang="ru-RU" sz="1100" dirty="0">
+                <a:solidFill>
+                  <a:srgbClr val="002060"/>
+                </a:solidFill>
+                <a:latin typeface="Century Gothic" panose="020B0502020202020204" pitchFamily="34" charset="0"/>
+                <a:cs typeface="Calibri"/>
+              </a:rPr>
+              <a:t>21</a:t>
+            </a:r>
+            <a:r>
+              <a:rPr lang="ru-RU" sz="1100" spc="20" dirty="0">
+                <a:solidFill>
+                  <a:srgbClr val="002060"/>
+                </a:solidFill>
+                <a:latin typeface="Century Gothic" panose="020B0502020202020204" pitchFamily="34" charset="0"/>
+                <a:cs typeface="Calibri"/>
+              </a:rPr>
+              <a:t>:00 </a:t>
+            </a:r>
+            <a:r>
               <a:rPr sz="1100" b="1" spc="-10" dirty="0" err="1">
                 <a:solidFill>
                   <a:srgbClr val="002060"/>
@@ -5910,7 +6763,70 @@
                 <a:latin typeface="Century Gothic" panose="020B0502020202020204" pitchFamily="34" charset="0"/>
                 <a:cs typeface="Calibri"/>
               </a:rPr>
-              <a:t>заседание</a:t>
+              <a:t>Завершение</a:t>
+            </a:r>
+            <a:r>
+              <a:rPr sz="1100" b="1" spc="25" dirty="0">
+                <a:solidFill>
+                  <a:srgbClr val="002060"/>
+                </a:solidFill>
+                <a:latin typeface="Century Gothic" panose="020B0502020202020204" pitchFamily="34" charset="0"/>
+                <a:cs typeface="Calibri"/>
+              </a:rPr>
+              <a:t> </a:t>
+            </a:r>
+            <a:r>
+              <a:rPr sz="1100" b="1" spc="-10" dirty="0">
+                <a:solidFill>
+                  <a:srgbClr val="002060"/>
+                </a:solidFill>
+                <a:latin typeface="Century Gothic" panose="020B0502020202020204" pitchFamily="34" charset="0"/>
+                <a:cs typeface="Calibri"/>
+              </a:rPr>
+              <a:t>мероприятия</a:t>
+            </a:r>
+            <a:endParaRPr sz="1100" dirty="0">
+              <a:solidFill>
+                <a:srgbClr val="002060"/>
+              </a:solidFill>
+              <a:latin typeface="Century Gothic" panose="020B0502020202020204" pitchFamily="34" charset="0"/>
+              <a:cs typeface="Calibri"/>
+            </a:endParaRPr>
+          </a:p>
+          <a:p>
+            <a:pPr marL="26034" marR="1444625" algn="just" rtl="0">
+              <a:lnSpc>
+                <a:spcPct val="184400"/>
+              </a:lnSpc>
+              <a:spcBef>
+                <a:spcPts val="10"/>
+              </a:spcBef>
+            </a:pPr>
+            <a:r>
+              <a:rPr kumimoji="0" lang="ru-RU" altLang="ru-RU" sz="1100" b="0" i="0" u="none" strike="noStrike" cap="none" normalizeH="0" baseline="0" dirty="0">
+                <a:ln>
+                  <a:noFill/>
+                </a:ln>
+                <a:solidFill>
+                  <a:srgbClr val="002060"/>
+                </a:solidFill>
+                <a:effectLst/>
+                <a:latin typeface="Century Gothic" panose="020B0502020202020204" pitchFamily="34" charset="0"/>
+              </a:rPr>
+              <a:t>Дресс-код: </a:t>
+            </a:r>
+            <a:r>
+              <a:rPr kumimoji="0" lang="en-US" altLang="ru-RU" sz="1100" b="1" i="0" u="none" strike="noStrike" cap="none" normalizeH="0" baseline="0" dirty="0">
+                <a:ln>
+                  <a:noFill/>
+                </a:ln>
+                <a:solidFill>
+                  <a:srgbClr val="002060"/>
+                </a:solidFill>
+                <a:effectLst/>
+                <a:latin typeface="Century Gothic" panose="020B0502020202020204" pitchFamily="34" charset="0"/>
+              </a:rPr>
+              <a:t>Business Casual</a:t>
             </a:r>
             <a:endParaRPr lang="ru-RU" sz="1100" b="1" spc="-10" dirty="0">
               <a:solidFill>
@@ -5920,1113 +6836,44 @@
               <a:cs typeface="Calibri"/>
             </a:endParaRPr>
           </a:p>
-          <a:p>
-            <a:pPr marL="26034" algn="just">
-              <a:lnSpc>
-                <a:spcPct val="100000"/>
-              </a:lnSpc>
-              <a:spcBef>
-                <a:spcPts val="625"/>
-              </a:spcBef>
-            </a:pPr>
-            <a:r>
-              <a:rPr kumimoji="0" lang="ru-RU" altLang="ru-RU" sz="1100" b="1" i="1" u="none" strike="noStrike" cap="none" normalizeH="0" baseline="0" dirty="0">
-                <a:ln>
-                  <a:noFill/>
-                </a:ln>
-                <a:solidFill>
-                  <a:srgbClr val="002060"/>
-                </a:solidFill>
-                <a:effectLst/>
-                <a:latin typeface="Century Gothic" panose="020B0502020202020204" pitchFamily="34" charset="0"/>
-              </a:rPr>
-              <a:t>Модератор: </a:t>
-            </a:r>
-            <a:r>
-              <a:rPr kumimoji="0" lang="ru-RU" altLang="ru-RU" sz="1100" u="none" strike="noStrike" cap="none" normalizeH="0" baseline="0" dirty="0">
-                <a:ln>
-                  <a:noFill/>
-                </a:ln>
-                <a:solidFill>
-                  <a:srgbClr val="002060"/>
-                </a:solidFill>
-                <a:effectLst/>
-                <a:latin typeface="Century Gothic" panose="020B0502020202020204" pitchFamily="34" charset="0"/>
-              </a:rPr>
-              <a:t>г-н Идрисов М.М., </a:t>
-            </a:r>
-            <a:r>
-              <a:rPr kumimoji="0" lang="ru-RU" altLang="ru-RU" sz="1100" b="0" i="0" u="none" strike="noStrike" cap="none" normalizeH="0" baseline="0" dirty="0">
-                <a:ln>
-                  <a:noFill/>
-                </a:ln>
-                <a:solidFill>
-                  <a:srgbClr val="002060"/>
-                </a:solidFill>
-                <a:effectLst/>
-                <a:latin typeface="Century Gothic" panose="020B0502020202020204" pitchFamily="34" charset="0"/>
-              </a:rPr>
-              <a:t>«Казахстанский институт развития промышленности»</a:t>
-            </a:r>
-            <a:endParaRPr kumimoji="0" lang="ru-RU" altLang="ru-RU" sz="1100" b="1" i="0" u="none" strike="noStrike" cap="none" spc="-10" normalizeH="0" baseline="0" dirty="0">
-              <a:ln>
-                <a:noFill/>
-              </a:ln>
-              <a:solidFill>
-                <a:srgbClr val="002060"/>
-              </a:solidFill>
-              <a:effectLst/>
-              <a:latin typeface="Century Gothic" panose="020B0502020202020204" pitchFamily="34" charset="0"/>
-              <a:cs typeface="Calibri"/>
-            </a:endParaRPr>
-          </a:p>
-          <a:p>
-            <a:pPr marL="330836" marR="382270" algn="just">
-              <a:lnSpc>
-                <a:spcPct val="102200"/>
-              </a:lnSpc>
-              <a:spcBef>
-                <a:spcPts val="145"/>
-              </a:spcBef>
-              <a:tabLst>
-                <a:tab pos="558165" algn="l"/>
-              </a:tabLst>
-            </a:pPr>
-            <a:r>
-              <a:rPr lang="ru-RU" sz="1100" b="1" dirty="0">
-                <a:solidFill>
-                  <a:srgbClr val="002060"/>
-                </a:solidFill>
-                <a:latin typeface="Century Gothic" panose="020B0502020202020204" pitchFamily="34" charset="0"/>
-                <a:cs typeface="Calibri"/>
-              </a:rPr>
-              <a:t>Г-жа Муханова Гульмира </a:t>
-            </a:r>
-            <a:r>
-              <a:rPr lang="ru-RU" sz="1100" b="1" dirty="0" err="1">
-                <a:solidFill>
-                  <a:srgbClr val="002060"/>
-                </a:solidFill>
-                <a:latin typeface="Century Gothic" panose="020B0502020202020204" pitchFamily="34" charset="0"/>
-                <a:cs typeface="Calibri"/>
-              </a:rPr>
-              <a:t>Самудиновна</a:t>
-            </a:r>
-            <a:r>
-              <a:rPr lang="ru-RU" sz="1100" dirty="0">
-                <a:solidFill>
-                  <a:srgbClr val="002060"/>
-                </a:solidFill>
-                <a:latin typeface="Century Gothic" panose="020B0502020202020204" pitchFamily="34" charset="0"/>
-                <a:cs typeface="Calibri"/>
-              </a:rPr>
-              <a:t>, кандидат технических наук, доцент, профессор Школы транспортной инженерии и логистики имени М. </a:t>
-            </a:r>
-            <a:r>
-              <a:rPr lang="ru-RU" sz="1100" dirty="0" err="1">
-                <a:solidFill>
-                  <a:srgbClr val="002060"/>
-                </a:solidFill>
-                <a:latin typeface="Century Gothic" panose="020B0502020202020204" pitchFamily="34" charset="0"/>
-                <a:cs typeface="Calibri"/>
-              </a:rPr>
-              <a:t>Тынышпаева</a:t>
-            </a:r>
-            <a:endParaRPr lang="ru-RU" sz="1100" dirty="0">
-              <a:solidFill>
-                <a:srgbClr val="002060"/>
-              </a:solidFill>
-              <a:latin typeface="Century Gothic" panose="020B0502020202020204" pitchFamily="34" charset="0"/>
-              <a:cs typeface="Calibri"/>
-            </a:endParaRPr>
-          </a:p>
-          <a:p>
-            <a:pPr marL="330836" marR="382270" algn="just">
-              <a:lnSpc>
-                <a:spcPct val="102200"/>
-              </a:lnSpc>
-              <a:spcBef>
-                <a:spcPts val="145"/>
-              </a:spcBef>
-              <a:tabLst>
-                <a:tab pos="558165" algn="l"/>
-              </a:tabLst>
-            </a:pPr>
-            <a:r>
-              <a:rPr lang="ru-RU" sz="1100" b="1" dirty="0">
-                <a:solidFill>
-                  <a:srgbClr val="002060"/>
-                </a:solidFill>
-                <a:latin typeface="Century Gothic" panose="020B0502020202020204" pitchFamily="34" charset="0"/>
-                <a:cs typeface="Calibri"/>
-              </a:rPr>
-              <a:t>Г-н </a:t>
-            </a:r>
-            <a:r>
-              <a:rPr lang="de-DE" sz="1100" b="1" dirty="0">
-                <a:solidFill>
-                  <a:srgbClr val="002060"/>
-                </a:solidFill>
-                <a:latin typeface="Century Gothic" panose="020B0502020202020204" pitchFamily="34" charset="0"/>
-                <a:cs typeface="Calibri"/>
-              </a:rPr>
-              <a:t>Mirco Nowak</a:t>
-            </a:r>
-            <a:r>
-              <a:rPr lang="de-DE" sz="1100" dirty="0">
-                <a:solidFill>
-                  <a:srgbClr val="002060"/>
-                </a:solidFill>
-                <a:latin typeface="Century Gothic" panose="020B0502020202020204" pitchFamily="34" charset="0"/>
-                <a:cs typeface="Calibri"/>
-              </a:rPr>
-              <a:t>,</a:t>
-            </a:r>
-            <a:r>
-              <a:rPr lang="ru-RU" sz="1100" dirty="0">
-                <a:solidFill>
-                  <a:srgbClr val="002060"/>
-                </a:solidFill>
-                <a:latin typeface="Century Gothic" panose="020B0502020202020204" pitchFamily="34" charset="0"/>
-                <a:cs typeface="Calibri"/>
-              </a:rPr>
-              <a:t> </a:t>
-            </a:r>
-            <a:r>
-              <a:rPr lang="de-DE" sz="1100" dirty="0">
-                <a:solidFill>
-                  <a:srgbClr val="002060"/>
-                </a:solidFill>
-                <a:latin typeface="Century Gothic" panose="020B0502020202020204" pitchFamily="34" charset="0"/>
-                <a:cs typeface="Calibri"/>
-              </a:rPr>
-              <a:t>CEO | LUNO-Group</a:t>
-            </a:r>
-            <a:r>
-              <a:rPr lang="ru-RU" sz="1100" dirty="0">
-                <a:solidFill>
-                  <a:srgbClr val="002060"/>
-                </a:solidFill>
-                <a:latin typeface="Century Gothic" panose="020B0502020202020204" pitchFamily="34" charset="0"/>
-                <a:cs typeface="Calibri"/>
-              </a:rPr>
-              <a:t> </a:t>
-            </a:r>
-            <a:r>
-              <a:rPr lang="de-DE" sz="1100" dirty="0">
-                <a:solidFill>
-                  <a:srgbClr val="002060"/>
-                </a:solidFill>
-                <a:latin typeface="Century Gothic" panose="020B0502020202020204" pitchFamily="34" charset="0"/>
-                <a:cs typeface="Calibri"/>
-              </a:rPr>
-              <a:t>Chairperson Chapter Eurasia | Bundesvereinigung Logistik (BVL), </a:t>
-            </a:r>
-            <a:r>
-              <a:rPr lang="ru-RU" sz="1100" dirty="0">
-                <a:solidFill>
-                  <a:srgbClr val="002060"/>
-                </a:solidFill>
-                <a:latin typeface="Century Gothic" panose="020B0502020202020204" pitchFamily="34" charset="0"/>
-                <a:cs typeface="Calibri"/>
-              </a:rPr>
-              <a:t>Германия</a:t>
-            </a:r>
-          </a:p>
-          <a:p>
-            <a:pPr marL="330836" marR="382270" algn="just" rtl="0">
-              <a:lnSpc>
-                <a:spcPct val="102200"/>
-              </a:lnSpc>
-              <a:spcBef>
-                <a:spcPts val="145"/>
-              </a:spcBef>
-              <a:tabLst>
-                <a:tab pos="558165" algn="l"/>
-              </a:tabLst>
-            </a:pPr>
-            <a:r>
-              <a:rPr kumimoji="0" lang="ru-RU" altLang="ru-RU" sz="1100" b="1" i="0" u="none" strike="noStrike" cap="none" normalizeH="0" baseline="0" dirty="0">
-                <a:ln>
-                  <a:noFill/>
-                </a:ln>
-                <a:solidFill>
-                  <a:srgbClr val="002060"/>
-                </a:solidFill>
-                <a:effectLst/>
-                <a:latin typeface="Century Gothic" panose="020B0502020202020204" pitchFamily="34" charset="0"/>
-              </a:rPr>
-              <a:t>Г-жа Джудит Бланк</a:t>
-            </a:r>
-            <a:r>
-              <a:rPr kumimoji="0" lang="ru-RU" altLang="ru-RU" sz="1100" b="0" i="0" u="none" strike="noStrike" cap="none" normalizeH="0" baseline="0" dirty="0">
-                <a:ln>
-                  <a:noFill/>
-                </a:ln>
-                <a:solidFill>
-                  <a:srgbClr val="002060"/>
-                </a:solidFill>
-                <a:effectLst/>
-                <a:latin typeface="Century Gothic" panose="020B0502020202020204" pitchFamily="34" charset="0"/>
-              </a:rPr>
-              <a:t>, директор проекта, Региональная программа содействия торговле в Центральной Азии/Программа развития потенциала TCTC, GIZ Центральная Азия</a:t>
-            </a:r>
-          </a:p>
-          <a:p>
-            <a:pPr marL="26034" algn="just">
-              <a:lnSpc>
-                <a:spcPct val="100000"/>
-              </a:lnSpc>
-              <a:spcBef>
-                <a:spcPts val="625"/>
-              </a:spcBef>
-            </a:pPr>
-            <a:r>
-              <a:rPr lang="kk-KZ" sz="1100" dirty="0">
-                <a:solidFill>
-                  <a:srgbClr val="002060"/>
-                </a:solidFill>
-                <a:latin typeface="Century Gothic" panose="020B0502020202020204" pitchFamily="34" charset="0"/>
-                <a:cs typeface="Calibri"/>
-              </a:rPr>
-              <a:t>12:20 – 12:30 </a:t>
-            </a:r>
-            <a:r>
-              <a:rPr lang="kk-KZ" sz="1100" b="1" dirty="0">
-                <a:solidFill>
-                  <a:srgbClr val="002060"/>
-                </a:solidFill>
-                <a:latin typeface="Century Gothic" panose="020B0502020202020204" pitchFamily="34" charset="0"/>
-                <a:cs typeface="Calibri"/>
-              </a:rPr>
-              <a:t>Кофе брейк</a:t>
-            </a:r>
-          </a:p>
-          <a:p>
-            <a:pPr marL="26034" algn="just">
-              <a:spcBef>
-                <a:spcPts val="625"/>
-              </a:spcBef>
-            </a:pPr>
-            <a:r>
-              <a:rPr sz="1100" dirty="0">
-                <a:solidFill>
-                  <a:srgbClr val="002060"/>
-                </a:solidFill>
-                <a:latin typeface="Century Gothic" panose="020B0502020202020204" pitchFamily="34" charset="0"/>
-                <a:cs typeface="Calibri"/>
-              </a:rPr>
-              <a:t>1</a:t>
-            </a:r>
-            <a:r>
-              <a:rPr lang="ru-RU" sz="1100" dirty="0">
-                <a:solidFill>
-                  <a:srgbClr val="002060"/>
-                </a:solidFill>
-                <a:latin typeface="Century Gothic" panose="020B0502020202020204" pitchFamily="34" charset="0"/>
-                <a:cs typeface="Calibri"/>
-              </a:rPr>
-              <a:t>2</a:t>
-            </a:r>
-            <a:r>
-              <a:rPr sz="1100" dirty="0">
-                <a:solidFill>
-                  <a:srgbClr val="002060"/>
-                </a:solidFill>
-                <a:latin typeface="Century Gothic" panose="020B0502020202020204" pitchFamily="34" charset="0"/>
-                <a:cs typeface="Calibri"/>
-              </a:rPr>
-              <a:t>:</a:t>
-            </a:r>
-            <a:r>
-              <a:rPr lang="ru-RU" sz="1100" dirty="0">
-                <a:solidFill>
-                  <a:srgbClr val="002060"/>
-                </a:solidFill>
-                <a:latin typeface="Century Gothic" panose="020B0502020202020204" pitchFamily="34" charset="0"/>
-                <a:cs typeface="Calibri"/>
-              </a:rPr>
-              <a:t>3</a:t>
-            </a:r>
-            <a:r>
-              <a:rPr sz="1100" dirty="0">
-                <a:solidFill>
-                  <a:srgbClr val="002060"/>
-                </a:solidFill>
-                <a:latin typeface="Century Gothic" panose="020B0502020202020204" pitchFamily="34" charset="0"/>
-                <a:cs typeface="Calibri"/>
-              </a:rPr>
-              <a:t>0</a:t>
-            </a:r>
-            <a:r>
-              <a:rPr lang="ru-RU" sz="1100" dirty="0">
-                <a:solidFill>
-                  <a:srgbClr val="002060"/>
-                </a:solidFill>
-                <a:latin typeface="Century Gothic" panose="020B0502020202020204" pitchFamily="34" charset="0"/>
-                <a:cs typeface="Calibri"/>
-              </a:rPr>
-              <a:t> – 1</a:t>
-            </a:r>
-            <a:r>
-              <a:rPr lang="en-US" sz="1100" dirty="0">
-                <a:solidFill>
-                  <a:srgbClr val="002060"/>
-                </a:solidFill>
-                <a:latin typeface="Century Gothic" panose="020B0502020202020204" pitchFamily="34" charset="0"/>
-                <a:cs typeface="Calibri"/>
-              </a:rPr>
-              <a:t>2</a:t>
-            </a:r>
-            <a:r>
-              <a:rPr lang="ru-RU" sz="1100" dirty="0">
-                <a:solidFill>
-                  <a:srgbClr val="002060"/>
-                </a:solidFill>
-                <a:latin typeface="Century Gothic" panose="020B0502020202020204" pitchFamily="34" charset="0"/>
-                <a:cs typeface="Calibri"/>
-              </a:rPr>
-              <a:t>:</a:t>
-            </a:r>
-            <a:r>
-              <a:rPr lang="en-US" sz="1100" dirty="0">
-                <a:solidFill>
-                  <a:srgbClr val="002060"/>
-                </a:solidFill>
-                <a:latin typeface="Century Gothic" panose="020B0502020202020204" pitchFamily="34" charset="0"/>
-                <a:cs typeface="Calibri"/>
-              </a:rPr>
-              <a:t>45</a:t>
-            </a:r>
-            <a:r>
-              <a:rPr sz="1100" spc="-35" dirty="0">
-                <a:solidFill>
-                  <a:srgbClr val="002060"/>
-                </a:solidFill>
-                <a:latin typeface="Century Gothic" panose="020B0502020202020204" pitchFamily="34" charset="0"/>
-                <a:cs typeface="Calibri"/>
-              </a:rPr>
-              <a:t> </a:t>
-            </a:r>
-            <a:r>
-              <a:rPr lang="en-US" sz="1100" b="1" spc="-35" dirty="0">
-                <a:solidFill>
-                  <a:srgbClr val="002060"/>
-                </a:solidFill>
-                <a:latin typeface="Century Gothic" panose="020B0502020202020204" pitchFamily="34" charset="0"/>
-                <a:cs typeface="Calibri"/>
-              </a:rPr>
-              <a:t>Q&amp;A session with speakers</a:t>
-            </a:r>
-            <a:endParaRPr lang="ru-RU" sz="1100" b="1" spc="-35" dirty="0">
-              <a:solidFill>
-                <a:srgbClr val="002060"/>
-              </a:solidFill>
-              <a:latin typeface="Century Gothic" panose="020B0502020202020204" pitchFamily="34" charset="0"/>
-              <a:cs typeface="Calibri"/>
-            </a:endParaRPr>
-          </a:p>
-          <a:p>
-            <a:pPr marL="26034" algn="just">
-              <a:spcBef>
-                <a:spcPts val="625"/>
-              </a:spcBef>
-            </a:pPr>
-            <a:r>
-              <a:rPr lang="ru-RU" sz="1100" b="1" i="1" spc="-35" dirty="0">
-                <a:solidFill>
-                  <a:srgbClr val="002060"/>
-                </a:solidFill>
-                <a:latin typeface="Century Gothic" panose="020B0502020202020204" pitchFamily="34" charset="0"/>
-                <a:cs typeface="Calibri"/>
-              </a:rPr>
-              <a:t>Модератор:</a:t>
-            </a:r>
-            <a:r>
-              <a:rPr lang="ru-RU" sz="1100" b="1" spc="-35" dirty="0">
-                <a:solidFill>
-                  <a:srgbClr val="002060"/>
-                </a:solidFill>
-                <a:latin typeface="Century Gothic" panose="020B0502020202020204" pitchFamily="34" charset="0"/>
-                <a:cs typeface="Calibri"/>
-              </a:rPr>
-              <a:t> </a:t>
-            </a:r>
-            <a:r>
-              <a:rPr lang="ru-RU" sz="1100" spc="-35" dirty="0">
-                <a:solidFill>
-                  <a:srgbClr val="002060"/>
-                </a:solidFill>
-                <a:latin typeface="Century Gothic" panose="020B0502020202020204" pitchFamily="34" charset="0"/>
-                <a:cs typeface="Calibri"/>
-              </a:rPr>
-              <a:t>г-н</a:t>
-            </a:r>
-            <a:r>
-              <a:rPr lang="en-US" sz="1100" spc="-35" dirty="0">
-                <a:solidFill>
-                  <a:srgbClr val="002060"/>
-                </a:solidFill>
-                <a:latin typeface="Century Gothic" panose="020B0502020202020204" pitchFamily="34" charset="0"/>
-                <a:cs typeface="Calibri"/>
-              </a:rPr>
-              <a:t> </a:t>
-            </a:r>
-            <a:r>
-              <a:rPr kumimoji="0" lang="ru-RU" altLang="ru-RU" sz="1100" b="0" i="0" u="none" strike="noStrike" cap="none" normalizeH="0" baseline="0" dirty="0">
-                <a:ln>
-                  <a:noFill/>
-                </a:ln>
-                <a:solidFill>
-                  <a:srgbClr val="002060"/>
-                </a:solidFill>
-                <a:effectLst/>
-                <a:latin typeface="Century Gothic" panose="020B0502020202020204" pitchFamily="34" charset="0"/>
-              </a:rPr>
-              <a:t>Идрисов М.М., «Казахстанский институт развития промышленности»</a:t>
-            </a:r>
-            <a:endParaRPr kumimoji="0" lang="ru-RU" altLang="ru-RU" sz="1100" b="1" i="0" u="none" strike="noStrike" cap="none" spc="-10" normalizeH="0" baseline="0" dirty="0">
-              <a:ln>
-                <a:noFill/>
-              </a:ln>
-              <a:solidFill>
-                <a:srgbClr val="002060"/>
-              </a:solidFill>
-              <a:effectLst/>
-              <a:latin typeface="Century Gothic" panose="020B0502020202020204" pitchFamily="34" charset="0"/>
-              <a:cs typeface="Calibri"/>
-            </a:endParaRPr>
-          </a:p>
-          <a:p>
-            <a:pPr marL="26034" algn="just">
-              <a:lnSpc>
-                <a:spcPct val="100000"/>
-              </a:lnSpc>
-              <a:spcBef>
-                <a:spcPts val="625"/>
-              </a:spcBef>
-            </a:pPr>
-            <a:r>
-              <a:rPr lang="en-US" sz="1100" spc="-35" dirty="0">
-                <a:solidFill>
-                  <a:srgbClr val="002060"/>
-                </a:solidFill>
-                <a:latin typeface="Century Gothic" panose="020B0502020202020204" pitchFamily="34" charset="0"/>
-                <a:cs typeface="Calibri"/>
-              </a:rPr>
-              <a:t>12:45 – 13:00 </a:t>
-            </a:r>
-            <a:r>
-              <a:rPr lang="en-US" sz="1100" b="1" spc="-35" dirty="0">
-                <a:solidFill>
-                  <a:srgbClr val="002060"/>
-                </a:solidFill>
-                <a:latin typeface="Century Gothic" panose="020B0502020202020204" pitchFamily="34" charset="0"/>
-                <a:cs typeface="Calibri"/>
-              </a:rPr>
-              <a:t>Q&amp;A session </a:t>
-            </a:r>
-            <a:r>
-              <a:rPr lang="kk-KZ" sz="1100" b="1" spc="-35" dirty="0">
-                <a:solidFill>
-                  <a:srgbClr val="002060"/>
-                </a:solidFill>
-                <a:latin typeface="Century Gothic" panose="020B0502020202020204" pitchFamily="34" charset="0"/>
-                <a:cs typeface="Calibri"/>
-              </a:rPr>
-              <a:t>с участниками форума</a:t>
-            </a:r>
-            <a:r>
-              <a:rPr lang="ru-RU" sz="1100" b="1" spc="-35" dirty="0">
-                <a:solidFill>
-                  <a:srgbClr val="002060"/>
-                </a:solidFill>
-                <a:latin typeface="Century Gothic" panose="020B0502020202020204" pitchFamily="34" charset="0"/>
-                <a:cs typeface="Calibri"/>
-              </a:rPr>
-              <a:t>, </a:t>
-            </a:r>
-            <a:r>
-              <a:rPr lang="ru-RU" sz="1100" b="1" noProof="0" dirty="0">
-                <a:solidFill>
-                  <a:srgbClr val="002060"/>
-                </a:solidFill>
-                <a:latin typeface="Century Gothic" panose="020B0502020202020204" pitchFamily="34" charset="0"/>
-                <a:cs typeface="Calibri"/>
-              </a:rPr>
-              <a:t>Открытая</a:t>
-            </a:r>
-            <a:r>
-              <a:rPr lang="ru-RU" sz="1100" b="1" spc="-25" noProof="0" dirty="0">
-                <a:solidFill>
-                  <a:srgbClr val="002060"/>
-                </a:solidFill>
-                <a:latin typeface="Century Gothic" panose="020B0502020202020204" pitchFamily="34" charset="0"/>
-                <a:cs typeface="Calibri"/>
-              </a:rPr>
-              <a:t> </a:t>
-            </a:r>
-            <a:r>
-              <a:rPr lang="ru-RU" sz="1100" b="1" noProof="0" dirty="0">
-                <a:solidFill>
-                  <a:srgbClr val="002060"/>
-                </a:solidFill>
-                <a:latin typeface="Century Gothic" panose="020B0502020202020204" pitchFamily="34" charset="0"/>
-                <a:cs typeface="Calibri"/>
-              </a:rPr>
-              <a:t>дискуссия</a:t>
-            </a:r>
-            <a:r>
-              <a:rPr lang="ru-RU" sz="1100" b="1" spc="-15" dirty="0">
-                <a:solidFill>
-                  <a:srgbClr val="002060"/>
-                </a:solidFill>
-                <a:latin typeface="Century Gothic" panose="020B0502020202020204" pitchFamily="34" charset="0"/>
-                <a:cs typeface="Calibri"/>
-              </a:rPr>
-              <a:t>, </a:t>
-            </a:r>
-          </a:p>
-          <a:p>
-            <a:pPr marL="26034" algn="just">
-              <a:lnSpc>
-                <a:spcPct val="100000"/>
-              </a:lnSpc>
-              <a:spcBef>
-                <a:spcPts val="625"/>
-              </a:spcBef>
-            </a:pPr>
-            <a:r>
-              <a:rPr lang="ru-RU" sz="1100" b="1" i="1" spc="-15" dirty="0">
-                <a:solidFill>
-                  <a:srgbClr val="002060"/>
-                </a:solidFill>
-                <a:latin typeface="Century Gothic" panose="020B0502020202020204" pitchFamily="34" charset="0"/>
-                <a:cs typeface="Calibri"/>
-              </a:rPr>
-              <a:t>М</a:t>
-            </a:r>
-            <a:r>
-              <a:rPr lang="ru-RU" sz="1100" b="1" i="1" spc="-35" dirty="0">
-                <a:solidFill>
-                  <a:srgbClr val="002060"/>
-                </a:solidFill>
-                <a:latin typeface="Century Gothic" panose="020B0502020202020204" pitchFamily="34" charset="0"/>
-                <a:cs typeface="Calibri"/>
-              </a:rPr>
-              <a:t>одератор:</a:t>
-            </a:r>
-            <a:r>
-              <a:rPr lang="ru-RU" sz="1100" spc="-35" dirty="0">
-                <a:solidFill>
-                  <a:srgbClr val="002060"/>
-                </a:solidFill>
-                <a:latin typeface="Century Gothic" panose="020B0502020202020204" pitchFamily="34" charset="0"/>
-                <a:cs typeface="Calibri"/>
-              </a:rPr>
-              <a:t> г-н</a:t>
-            </a:r>
-            <a:r>
-              <a:rPr lang="en-US" sz="1100" spc="-35" dirty="0">
-                <a:solidFill>
-                  <a:srgbClr val="002060"/>
-                </a:solidFill>
-                <a:latin typeface="Century Gothic" panose="020B0502020202020204" pitchFamily="34" charset="0"/>
-                <a:cs typeface="Calibri"/>
-              </a:rPr>
-              <a:t> </a:t>
-            </a:r>
-            <a:r>
-              <a:rPr kumimoji="0" lang="ru-RU" altLang="ru-RU" sz="1100" b="0" i="0" u="none" strike="noStrike" cap="none" normalizeH="0" baseline="0" dirty="0">
-                <a:ln>
-                  <a:noFill/>
-                </a:ln>
-                <a:solidFill>
-                  <a:srgbClr val="002060"/>
-                </a:solidFill>
-                <a:effectLst/>
-                <a:latin typeface="Century Gothic" panose="020B0502020202020204" pitchFamily="34" charset="0"/>
-              </a:rPr>
-              <a:t>Идрисов М.М., «Казахстанский институт развития промышленности»</a:t>
-            </a:r>
-            <a:endParaRPr lang="ru-RU" sz="1100" noProof="0" dirty="0">
-              <a:solidFill>
-                <a:srgbClr val="002060"/>
-              </a:solidFill>
-              <a:latin typeface="Century Gothic" panose="020B0502020202020204" pitchFamily="34" charset="0"/>
-              <a:cs typeface="Calibri"/>
-            </a:endParaRPr>
-          </a:p>
-          <a:p>
-            <a:pPr marL="26034" algn="just">
-              <a:lnSpc>
-                <a:spcPct val="100000"/>
-              </a:lnSpc>
-              <a:spcBef>
-                <a:spcPts val="625"/>
-              </a:spcBef>
-            </a:pPr>
-            <a:endParaRPr lang="ru-RU" sz="1100" dirty="0">
-              <a:solidFill>
-                <a:srgbClr val="002060"/>
-              </a:solidFill>
-              <a:latin typeface="Century Gothic" panose="020B0502020202020204" pitchFamily="34" charset="0"/>
-              <a:cs typeface="Calibri"/>
-            </a:endParaRPr>
-          </a:p>
-          <a:p>
-            <a:pPr marL="26034" algn="just">
-              <a:spcBef>
-                <a:spcPts val="625"/>
-              </a:spcBef>
-            </a:pPr>
-            <a:r>
-              <a:rPr lang="ru-RU" sz="1100" dirty="0">
-                <a:solidFill>
-                  <a:srgbClr val="002060"/>
-                </a:solidFill>
-                <a:latin typeface="Century Gothic" panose="020B0502020202020204" pitchFamily="34" charset="0"/>
-                <a:cs typeface="Calibri"/>
-              </a:rPr>
-              <a:t>13:00 – 14:30 </a:t>
-            </a:r>
-            <a:r>
-              <a:rPr lang="ru-RU" sz="1100" b="1" dirty="0">
-                <a:solidFill>
-                  <a:srgbClr val="002060"/>
-                </a:solidFill>
-                <a:latin typeface="Century Gothic" panose="020B0502020202020204" pitchFamily="34" charset="0"/>
-                <a:cs typeface="Calibri"/>
-              </a:rPr>
-              <a:t>Обеденный перерыв</a:t>
-            </a:r>
-          </a:p>
-          <a:p>
-            <a:pPr algn="just"/>
-            <a:endParaRPr lang="ru-RU" sz="1100" dirty="0">
-              <a:latin typeface="Century Gothic" panose="020B0502020202020204" pitchFamily="34" charset="0"/>
-            </a:endParaRPr>
-          </a:p>
-          <a:p>
-            <a:pPr marL="26034" algn="just">
-              <a:spcBef>
-                <a:spcPts val="625"/>
-              </a:spcBef>
-            </a:pPr>
-            <a:r>
-              <a:rPr lang="ru-RU" sz="1100" dirty="0">
-                <a:solidFill>
-                  <a:srgbClr val="002060"/>
-                </a:solidFill>
-                <a:latin typeface="Century Gothic" panose="020B0502020202020204" pitchFamily="34" charset="0"/>
-                <a:cs typeface="Calibri"/>
-              </a:rPr>
-              <a:t>14:30 – 17:00 </a:t>
-            </a:r>
-            <a:r>
-              <a:rPr lang="ru-RU" sz="1100" b="1" dirty="0">
-                <a:solidFill>
-                  <a:srgbClr val="002060"/>
-                </a:solidFill>
-                <a:latin typeface="Century Gothic" panose="020B0502020202020204" pitchFamily="34" charset="0"/>
-                <a:cs typeface="Calibri"/>
-              </a:rPr>
-              <a:t>B2B-встречи</a:t>
-            </a:r>
-          </a:p>
-          <a:p>
-            <a:pPr marL="26034" algn="just">
-              <a:spcBef>
-                <a:spcPts val="625"/>
-              </a:spcBef>
-            </a:pPr>
-            <a:r>
-              <a:rPr lang="ru-RU" sz="1100" dirty="0">
-                <a:solidFill>
-                  <a:srgbClr val="002060"/>
-                </a:solidFill>
-                <a:latin typeface="Century Gothic" panose="020B0502020202020204" pitchFamily="34" charset="0"/>
-                <a:cs typeface="Calibri"/>
-              </a:rPr>
-              <a:t>Серия целевых деловых встреч, ориентированных на поиск потенциальных партнёров и обсуждение совместных научных, образовательных и бизнес-проектов. Для удобства участников будет функционировать официальный сайт форума с информацией об участниках и системой бронирования встреч</a:t>
-            </a:r>
-            <a:r>
-              <a:rPr lang="ru-RU" sz="1100" dirty="0">
-                <a:latin typeface="Century Gothic" panose="020B0502020202020204" pitchFamily="34" charset="0"/>
-              </a:rPr>
-              <a:t>.</a:t>
-            </a:r>
-          </a:p>
-          <a:p>
-            <a:pPr marL="26034" algn="just">
-              <a:lnSpc>
-                <a:spcPct val="100000"/>
-              </a:lnSpc>
-              <a:spcBef>
-                <a:spcPts val="625"/>
-              </a:spcBef>
-            </a:pPr>
-            <a:endParaRPr lang="ru-RU" sz="1100" dirty="0">
-              <a:solidFill>
-                <a:srgbClr val="002060"/>
-              </a:solidFill>
-              <a:latin typeface="Century Gothic" panose="020B0502020202020204" pitchFamily="34" charset="0"/>
-              <a:cs typeface="Calibri"/>
-            </a:endParaRPr>
-          </a:p>
-          <a:p>
-            <a:pPr marL="26034" algn="just">
-              <a:lnSpc>
-                <a:spcPct val="100000"/>
-              </a:lnSpc>
-              <a:spcBef>
-                <a:spcPts val="625"/>
-              </a:spcBef>
-            </a:pPr>
-            <a:r>
-              <a:rPr sz="1100" dirty="0">
-                <a:solidFill>
-                  <a:srgbClr val="002060"/>
-                </a:solidFill>
-                <a:latin typeface="Century Gothic" panose="020B0502020202020204" pitchFamily="34" charset="0"/>
-                <a:cs typeface="Calibri"/>
-              </a:rPr>
-              <a:t>1</a:t>
-            </a:r>
-            <a:r>
-              <a:rPr lang="ru-RU" sz="1100" dirty="0">
-                <a:solidFill>
-                  <a:srgbClr val="002060"/>
-                </a:solidFill>
-                <a:latin typeface="Century Gothic" panose="020B0502020202020204" pitchFamily="34" charset="0"/>
-                <a:cs typeface="Calibri"/>
-              </a:rPr>
-              <a:t>7</a:t>
-            </a:r>
-            <a:r>
-              <a:rPr sz="1100" dirty="0">
-                <a:solidFill>
-                  <a:srgbClr val="002060"/>
-                </a:solidFill>
-                <a:latin typeface="Century Gothic" panose="020B0502020202020204" pitchFamily="34" charset="0"/>
-                <a:cs typeface="Calibri"/>
-              </a:rPr>
-              <a:t>:</a:t>
-            </a:r>
-            <a:r>
-              <a:rPr lang="ru-RU" sz="1100" dirty="0">
-                <a:solidFill>
-                  <a:srgbClr val="002060"/>
-                </a:solidFill>
-                <a:latin typeface="Century Gothic" panose="020B0502020202020204" pitchFamily="34" charset="0"/>
-                <a:cs typeface="Calibri"/>
-              </a:rPr>
-              <a:t>0</a:t>
-            </a:r>
-            <a:r>
-              <a:rPr sz="1100" dirty="0">
-                <a:solidFill>
-                  <a:srgbClr val="002060"/>
-                </a:solidFill>
-                <a:latin typeface="Century Gothic" panose="020B0502020202020204" pitchFamily="34" charset="0"/>
-                <a:cs typeface="Calibri"/>
-              </a:rPr>
-              <a:t>0</a:t>
-            </a:r>
-            <a:r>
-              <a:rPr sz="1100" spc="5" dirty="0">
-                <a:solidFill>
-                  <a:srgbClr val="002060"/>
-                </a:solidFill>
-                <a:latin typeface="Century Gothic" panose="020B0502020202020204" pitchFamily="34" charset="0"/>
-                <a:cs typeface="Calibri"/>
-              </a:rPr>
-              <a:t> </a:t>
-            </a:r>
-            <a:r>
-              <a:rPr sz="1100" b="1" spc="-10" dirty="0">
-                <a:solidFill>
-                  <a:srgbClr val="002060"/>
-                </a:solidFill>
-                <a:latin typeface="Century Gothic" panose="020B0502020202020204" pitchFamily="34" charset="0"/>
-                <a:cs typeface="Calibri"/>
-              </a:rPr>
-              <a:t>Завершение</a:t>
-            </a:r>
-            <a:r>
-              <a:rPr sz="1100" b="1" spc="25" dirty="0">
-                <a:solidFill>
-                  <a:srgbClr val="002060"/>
-                </a:solidFill>
-                <a:latin typeface="Century Gothic" panose="020B0502020202020204" pitchFamily="34" charset="0"/>
-                <a:cs typeface="Calibri"/>
-              </a:rPr>
-              <a:t> </a:t>
-            </a:r>
-            <a:r>
-              <a:rPr sz="1100" b="1" spc="-10" dirty="0">
-                <a:solidFill>
-                  <a:srgbClr val="002060"/>
-                </a:solidFill>
-                <a:latin typeface="Century Gothic" panose="020B0502020202020204" pitchFamily="34" charset="0"/>
-                <a:cs typeface="Calibri"/>
-              </a:rPr>
-              <a:t>Форума</a:t>
-            </a:r>
-            <a:endParaRPr sz="1100" dirty="0">
-              <a:solidFill>
-                <a:srgbClr val="002060"/>
-              </a:solidFill>
-              <a:latin typeface="Century Gothic" panose="020B0502020202020204" pitchFamily="34" charset="0"/>
-              <a:cs typeface="Calibri"/>
-            </a:endParaRPr>
-          </a:p>
-          <a:p>
-            <a:pPr marL="26034" algn="just">
-              <a:lnSpc>
-                <a:spcPct val="100000"/>
-              </a:lnSpc>
-              <a:spcBef>
-                <a:spcPts val="600"/>
-              </a:spcBef>
-            </a:pPr>
-            <a:endParaRPr lang="ru-RU" sz="1100" b="1" dirty="0">
-              <a:solidFill>
-                <a:srgbClr val="002060"/>
-              </a:solidFill>
-              <a:latin typeface="Century Gothic" panose="020B0502020202020204" pitchFamily="34" charset="0"/>
-              <a:cs typeface="Calibri"/>
-            </a:endParaRPr>
-          </a:p>
-          <a:p>
-            <a:pPr marL="26034" algn="just">
-              <a:spcBef>
-                <a:spcPts val="600"/>
-              </a:spcBef>
-            </a:pPr>
-            <a:r>
-              <a:rPr sz="1100" b="1" dirty="0" err="1">
-                <a:solidFill>
-                  <a:srgbClr val="002060"/>
-                </a:solidFill>
-                <a:latin typeface="Century Gothic" panose="020B0502020202020204" pitchFamily="34" charset="0"/>
-                <a:cs typeface="Calibri"/>
-              </a:rPr>
-              <a:t>Вечерний</a:t>
-            </a:r>
-            <a:r>
-              <a:rPr sz="1100" b="1" spc="-30" dirty="0">
-                <a:solidFill>
-                  <a:srgbClr val="002060"/>
-                </a:solidFill>
-                <a:latin typeface="Century Gothic" panose="020B0502020202020204" pitchFamily="34" charset="0"/>
-                <a:cs typeface="Calibri"/>
-              </a:rPr>
-              <a:t> </a:t>
-            </a:r>
-            <a:r>
-              <a:rPr sz="1100" b="1" spc="-20" dirty="0" err="1">
-                <a:solidFill>
-                  <a:srgbClr val="002060"/>
-                </a:solidFill>
-                <a:latin typeface="Century Gothic" panose="020B0502020202020204" pitchFamily="34" charset="0"/>
-                <a:cs typeface="Calibri"/>
-              </a:rPr>
-              <a:t>прием</a:t>
-            </a:r>
-            <a:r>
-              <a:rPr lang="ru-RU" sz="1100" b="1" spc="-20" dirty="0">
-                <a:solidFill>
-                  <a:srgbClr val="002060"/>
-                </a:solidFill>
-                <a:latin typeface="Century Gothic" panose="020B0502020202020204" pitchFamily="34" charset="0"/>
-                <a:cs typeface="Calibri"/>
-              </a:rPr>
-              <a:t> </a:t>
-            </a:r>
-            <a:endParaRPr lang="en-US" sz="1100" b="1" i="1" spc="-20" dirty="0">
-              <a:solidFill>
-                <a:srgbClr val="002060"/>
-              </a:solidFill>
-              <a:latin typeface="Century Gothic" panose="020B0502020202020204" pitchFamily="34" charset="0"/>
-              <a:cs typeface="Calibri"/>
-            </a:endParaRPr>
-          </a:p>
-          <a:p>
-            <a:pPr marL="26034" algn="just">
-              <a:spcBef>
-                <a:spcPts val="600"/>
-              </a:spcBef>
-            </a:pPr>
-            <a:r>
-              <a:rPr lang="ru-RU" sz="1100" spc="-20" dirty="0">
-                <a:solidFill>
-                  <a:srgbClr val="002060"/>
-                </a:solidFill>
-                <a:latin typeface="Century Gothic" panose="020B0502020202020204" pitchFamily="34" charset="0"/>
-                <a:cs typeface="Calibri"/>
-              </a:rPr>
-              <a:t>18:00 </a:t>
-            </a:r>
-            <a:r>
-              <a:rPr sz="1100" b="1" spc="-20" dirty="0" err="1">
-                <a:solidFill>
-                  <a:srgbClr val="002060"/>
-                </a:solidFill>
-                <a:latin typeface="Century Gothic" panose="020B0502020202020204" pitchFamily="34" charset="0"/>
-                <a:cs typeface="Calibri"/>
-              </a:rPr>
-              <a:t>Нетворкинг</a:t>
-            </a:r>
-            <a:r>
-              <a:rPr sz="1100" b="1" spc="-20" dirty="0">
-                <a:solidFill>
-                  <a:srgbClr val="002060"/>
-                </a:solidFill>
-                <a:latin typeface="Century Gothic" panose="020B0502020202020204" pitchFamily="34" charset="0"/>
-                <a:cs typeface="Calibri"/>
-              </a:rPr>
-              <a:t>, вечерний фуршет</a:t>
-            </a:r>
-          </a:p>
-          <a:p>
-            <a:pPr marL="26034" algn="just">
-              <a:lnSpc>
-                <a:spcPct val="100000"/>
-              </a:lnSpc>
-              <a:spcBef>
-                <a:spcPts val="615"/>
-              </a:spcBef>
-            </a:pPr>
-            <a:r>
-              <a:rPr lang="ru-RU" sz="1100" dirty="0">
-                <a:solidFill>
-                  <a:srgbClr val="002060"/>
-                </a:solidFill>
-                <a:latin typeface="Century Gothic" panose="020B0502020202020204" pitchFamily="34" charset="0"/>
-                <a:cs typeface="Calibri"/>
-              </a:rPr>
-              <a:t>21</a:t>
-            </a:r>
-            <a:r>
-              <a:rPr lang="ru-RU" sz="1100" spc="20" dirty="0">
-                <a:solidFill>
-                  <a:srgbClr val="002060"/>
-                </a:solidFill>
-                <a:latin typeface="Century Gothic" panose="020B0502020202020204" pitchFamily="34" charset="0"/>
-                <a:cs typeface="Calibri"/>
-              </a:rPr>
-              <a:t>:00 </a:t>
-            </a:r>
-            <a:r>
-              <a:rPr sz="1100" b="1" spc="-10" dirty="0" err="1">
-                <a:solidFill>
-                  <a:srgbClr val="002060"/>
-                </a:solidFill>
-                <a:latin typeface="Century Gothic" panose="020B0502020202020204" pitchFamily="34" charset="0"/>
-                <a:cs typeface="Calibri"/>
-              </a:rPr>
-              <a:t>Завершение</a:t>
-            </a:r>
-            <a:r>
-              <a:rPr sz="1100" b="1" spc="25" dirty="0">
-                <a:solidFill>
-                  <a:srgbClr val="002060"/>
-                </a:solidFill>
-                <a:latin typeface="Century Gothic" panose="020B0502020202020204" pitchFamily="34" charset="0"/>
-                <a:cs typeface="Calibri"/>
-              </a:rPr>
-              <a:t> </a:t>
-            </a:r>
-            <a:r>
-              <a:rPr sz="1100" b="1" spc="-10" dirty="0">
-                <a:solidFill>
-                  <a:srgbClr val="002060"/>
-                </a:solidFill>
-                <a:latin typeface="Century Gothic" panose="020B0502020202020204" pitchFamily="34" charset="0"/>
-                <a:cs typeface="Calibri"/>
-              </a:rPr>
-              <a:t>мероприятия</a:t>
-            </a:r>
-            <a:endParaRPr sz="1100" dirty="0">
-              <a:solidFill>
-                <a:srgbClr val="002060"/>
-              </a:solidFill>
-              <a:latin typeface="Century Gothic" panose="020B0502020202020204" pitchFamily="34" charset="0"/>
-              <a:cs typeface="Calibri"/>
-            </a:endParaRPr>
-          </a:p>
-          <a:p>
-            <a:pPr marL="26034" marR="1444625" algn="just" rtl="0">
-              <a:lnSpc>
-                <a:spcPct val="184400"/>
-              </a:lnSpc>
-              <a:spcBef>
-                <a:spcPts val="10"/>
-              </a:spcBef>
-            </a:pPr>
-            <a:r>
-              <a:rPr kumimoji="0" lang="ru-RU" altLang="ru-RU" sz="1100" b="0" i="0" u="none" strike="noStrike" cap="none" normalizeH="0" baseline="0" dirty="0">
-                <a:ln>
-                  <a:noFill/>
-                </a:ln>
-                <a:solidFill>
-                  <a:srgbClr val="002060"/>
-                </a:solidFill>
-                <a:effectLst/>
-                <a:latin typeface="Century Gothic" panose="020B0502020202020204" pitchFamily="34" charset="0"/>
-              </a:rPr>
-              <a:t>Дресс-код: </a:t>
-            </a:r>
-            <a:r>
-              <a:rPr kumimoji="0" lang="ru-RU" altLang="ru-RU" sz="1100" b="1" i="0" u="none" strike="noStrike" cap="none" normalizeH="0" baseline="0" dirty="0" err="1">
-                <a:ln>
-                  <a:noFill/>
-                </a:ln>
-                <a:solidFill>
-                  <a:srgbClr val="002060"/>
-                </a:solidFill>
-                <a:effectLst/>
-                <a:latin typeface="Century Gothic" panose="020B0502020202020204" pitchFamily="34" charset="0"/>
-              </a:rPr>
-              <a:t>casual</a:t>
-            </a:r>
-            <a:r>
-              <a:rPr kumimoji="0" lang="ru-RU" altLang="ru-RU" sz="1100" b="1" i="0" u="none" strike="noStrike" cap="none" normalizeH="0" baseline="0" dirty="0">
-                <a:ln>
-                  <a:noFill/>
-                </a:ln>
-                <a:solidFill>
-                  <a:srgbClr val="002060"/>
-                </a:solidFill>
-                <a:effectLst/>
-                <a:latin typeface="Century Gothic" panose="020B0502020202020204" pitchFamily="34" charset="0"/>
-              </a:rPr>
-              <a:t> </a:t>
-            </a:r>
-            <a:r>
-              <a:rPr kumimoji="0" lang="ru-RU" altLang="ru-RU" sz="1100" b="1" i="0" u="none" strike="noStrike" cap="none" normalizeH="0" baseline="0" dirty="0" err="1">
-                <a:ln>
-                  <a:noFill/>
-                </a:ln>
-                <a:solidFill>
-                  <a:srgbClr val="002060"/>
-                </a:solidFill>
-                <a:effectLst/>
-                <a:latin typeface="Century Gothic" panose="020B0502020202020204" pitchFamily="34" charset="0"/>
-              </a:rPr>
-              <a:t>formal</a:t>
-            </a:r>
-            <a:endParaRPr lang="ru-RU" sz="1100" b="1" spc="-10" dirty="0">
-              <a:solidFill>
-                <a:srgbClr val="002060"/>
-              </a:solidFill>
-              <a:latin typeface="Century Gothic" panose="020B0502020202020204" pitchFamily="34" charset="0"/>
-              <a:cs typeface="Calibri"/>
-            </a:endParaRPr>
-          </a:p>
         </p:txBody>
       </p:sp>
+      <p:pic>
+        <p:nvPicPr>
+          <p:cNvPr id="5" name="Рисунок 4" descr="Изображение выглядит как Графика, Шрифт, графический дизайн, снимок экрана&#10;&#10;Автоматически созданное описание">
+            <a:extLst>
+              <a:ext uri="{FF2B5EF4-FFF2-40B4-BE49-F238E27FC236}">
+                <a16:creationId xmlns:a16="http://schemas.microsoft.com/office/drawing/2014/main" id="{8DA373CF-6041-CFFD-BBBE-E5567F239872}"/>
+              </a:ext>
+            </a:extLst>
+          </p:cNvPr>
+          <p:cNvPicPr>
+            <a:picLocks noChangeAspect="1"/>
+          </p:cNvPicPr>
+          <p:nvPr/>
+        </p:nvPicPr>
+        <p:blipFill>
+          <a:blip r:embed="rId3" cstate="print">
+            <a:extLst>
+              <a:ext uri="{28A0092B-C50C-407E-A947-70E740481C1C}">
+                <a14:useLocalDpi xmlns:a14="http://schemas.microsoft.com/office/drawing/2010/main" val="0"/>
+              </a:ext>
+            </a:extLst>
+          </a:blip>
+          <a:stretch>
+            <a:fillRect/>
+          </a:stretch>
+        </p:blipFill>
+        <p:spPr>
+          <a:xfrm>
+            <a:off x="356595" y="310292"/>
+            <a:ext cx="1197622" cy="564179"/>
+          </a:xfrm>
+          <a:prstGeom prst="rect">
+            <a:avLst/>
+          </a:prstGeom>
+        </p:spPr>
+      </p:pic>
     </p:spTree>
     <p:extLst>
       <p:ext uri="{BB962C8B-B14F-4D97-AF65-F5344CB8AC3E}">

--- a/public/program-ru.pptx
+++ b/public/program-ru.pptx
@@ -2,15 +2,15 @@
 <file path=ppt/presentation.xml><?xml version="1.0" encoding="utf-8"?>
 <p:presentation xmlns:a="http://schemas.openxmlformats.org/drawingml/2006/main" xmlns:r="http://schemas.openxmlformats.org/officeDocument/2006/relationships" xmlns:p="http://schemas.openxmlformats.org/presentationml/2006/main">
   <p:sldMasterIdLst>
-    <p:sldMasterId id="2147483648" r:id="rId1"/>
+    <p:sldMasterId id="2147483648" r:id="rId4"/>
   </p:sldMasterIdLst>
   <p:handoutMasterIdLst>
-    <p:handoutMasterId r:id="rId5"/>
+    <p:handoutMasterId r:id="rId8"/>
   </p:handoutMasterIdLst>
   <p:sldIdLst>
-    <p:sldId id="261" r:id="rId2"/>
-    <p:sldId id="263" r:id="rId3"/>
-    <p:sldId id="264" r:id="rId4"/>
+    <p:sldId id="261" r:id="rId5"/>
+    <p:sldId id="263" r:id="rId6"/>
+    <p:sldId id="264" r:id="rId7"/>
   </p:sldIdLst>
   <p:sldSz cx="7569200" cy="10699750"/>
   <p:notesSz cx="7569200" cy="10699750"/>
@@ -34,11 +34,17 @@
         </p15:guide>
       </p15:sldGuideLst>
     </p:ext>
-    <p:ext uri="{2D200454-40CA-4A62-9FC3-DE9A4176ACB9}">
-      <p15:notesGuideLst xmlns:p15="http://schemas.microsoft.com/office/powerpoint/2012/main"/>
-    </p:ext>
   </p:extLst>
 </p:presentation>
+</file>
+
+<file path=ppt/revisionInfo.xml><?xml version="1.0" encoding="utf-8"?>
+<p1510:revInfo xmlns:a="http://schemas.openxmlformats.org/drawingml/2006/main" xmlns:r="http://schemas.openxmlformats.org/officeDocument/2006/relationships" xmlns:p1510="http://schemas.microsoft.com/office/powerpoint/2015/10/main">
+  <p1510:revLst>
+    <p1510:client id="{46D78F4C-65C3-4A7D-9BE8-9873A78A9957}" v="12" dt="2026-03-31T13:21:18.910"/>
+    <p1510:client id="{84A5BA13-2135-14CD-9F3A-AE01FF67B5BB}" v="6" dt="2026-03-31T09:04:37.700"/>
+  </p1510:revLst>
+</p1510:revInfo>
 </file>
 
 <file path=ppt/handoutMasters/handoutMaster1.xml><?xml version="1.0" encoding="utf-8"?>
@@ -135,7 +141,7 @@
           <a:p>
             <a:fld id="{0C391B6F-BBFA-438A-9286-1FC62C3499A0}" type="datetimeFigureOut">
               <a:rPr lang="ru-RU" smtClean="0"/>
-              <a:t>18.03.2026</a:t>
+              <a:t>01.04.2026</a:t>
             </a:fld>
             <a:endParaRPr lang="ru-RU"/>
           </a:p>
@@ -379,7 +385,7 @@
           <a:p>
             <a:fld id="{1D8BD707-D9CF-40AE-B4C6-C98DA3205C09}" type="datetimeFigureOut">
               <a:rPr lang="en-US"/>
-              <a:t>3/18/2026</a:t>
+              <a:t>4/1/2026</a:t>
             </a:fld>
             <a:endParaRPr lang="en-US"/>
           </a:p>
@@ -656,7 +662,7 @@
           <a:bodyPr wrap="square" lIns="0" tIns="0" rIns="0" bIns="0" rtlCol="0"/>
           <a:lstStyle/>
           <a:p>
-            <a:endParaRPr dirty="0"/>
+            <a:endParaRPr/>
           </a:p>
         </p:txBody>
       </p:sp>
@@ -822,7 +828,7 @@
           <a:p>
             <a:fld id="{1D8BD707-D9CF-40AE-B4C6-C98DA3205C09}" type="datetimeFigureOut">
               <a:rPr lang="en-US"/>
-              <a:t>3/18/2026</a:t>
+              <a:t>4/1/2026</a:t>
             </a:fld>
             <a:endParaRPr lang="en-US"/>
           </a:p>
@@ -1036,7 +1042,7 @@
           <a:p>
             <a:fld id="{1D8BD707-D9CF-40AE-B4C6-C98DA3205C09}" type="datetimeFigureOut">
               <a:rPr lang="en-US"/>
-              <a:t>3/18/2026</a:t>
+              <a:t>4/1/2026</a:t>
             </a:fld>
             <a:endParaRPr lang="en-US"/>
           </a:p>
@@ -1184,7 +1190,7 @@
           <a:p>
             <a:fld id="{1D8BD707-D9CF-40AE-B4C6-C98DA3205C09}" type="datetimeFigureOut">
               <a:rPr lang="en-US"/>
-              <a:t>3/18/2026</a:t>
+              <a:t>4/1/2026</a:t>
             </a:fld>
             <a:endParaRPr lang="en-US"/>
           </a:p>
@@ -1383,7 +1389,7 @@
           <a:p>
             <a:fld id="{1D8BD707-D9CF-40AE-B4C6-C98DA3205C09}" type="datetimeFigureOut">
               <a:rPr lang="en-US"/>
-              <a:t>3/18/2026</a:t>
+              <a:t>4/1/2026</a:t>
             </a:fld>
             <a:endParaRPr lang="en-US"/>
           </a:p>
@@ -1606,7 +1612,7 @@
           <a:p>
             <a:fld id="{1D8BD707-D9CF-40AE-B4C6-C98DA3205C09}" type="datetimeFigureOut">
               <a:rPr lang="en-US"/>
-              <a:t>3/18/2026</a:t>
+              <a:t>4/1/2026</a:t>
             </a:fld>
             <a:endParaRPr lang="en-US"/>
           </a:p>
@@ -1906,7 +1912,7 @@
         </p:blipFill>
         <p:spPr bwMode="auto">
           <a:xfrm>
-            <a:off x="5688426" y="101418"/>
+            <a:off x="5674040" y="72664"/>
             <a:ext cx="1613204" cy="1023984"/>
           </a:xfrm>
           <a:prstGeom prst="rect">
@@ -1964,7 +1970,7 @@
               </a:spcBef>
             </a:pPr>
             <a:r>
-              <a:rPr sz="2400" b="1" dirty="0">
+              <a:rPr sz="2400" b="1">
                 <a:latin typeface="Century Gothic" panose="020B0502020202020204" pitchFamily="34" charset="0"/>
                 <a:ea typeface="Roboto" panose="02000000000000000000" pitchFamily="2" charset="0"/>
                 <a:cs typeface="Roboto" panose="02000000000000000000" pitchFamily="2" charset="0"/>
@@ -1972,7 +1978,7 @@
               <a:t>Официальное</a:t>
             </a:r>
             <a:r>
-              <a:rPr sz="2400" b="1" spc="-114" dirty="0">
+              <a:rPr sz="2400" b="1" spc="-114">
                 <a:latin typeface="Century Gothic" panose="020B0502020202020204" pitchFamily="34" charset="0"/>
                 <a:ea typeface="Roboto" panose="02000000000000000000" pitchFamily="2" charset="0"/>
                 <a:cs typeface="Roboto" panose="02000000000000000000" pitchFamily="2" charset="0"/>
@@ -1980,7 +1986,7 @@
               <a:t> </a:t>
             </a:r>
             <a:r>
-              <a:rPr sz="2400" b="1" spc="-10" dirty="0">
+              <a:rPr sz="2400" b="1" spc="-10">
                 <a:latin typeface="Century Gothic" panose="020B0502020202020204" pitchFamily="34" charset="0"/>
                 <a:ea typeface="Roboto" panose="02000000000000000000" pitchFamily="2" charset="0"/>
                 <a:cs typeface="Roboto" panose="02000000000000000000" pitchFamily="2" charset="0"/>
@@ -2023,7 +2029,7 @@
               </a:lnSpc>
             </a:pPr>
             <a:r>
-              <a:rPr lang="ru-RU" b="1" dirty="0">
+              <a:rPr lang="ru-RU" b="1">
                 <a:solidFill>
                   <a:srgbClr val="002060"/>
                 </a:solidFill>
@@ -2041,7 +2047,7 @@
               </a:lnSpc>
             </a:pPr>
             <a:r>
-              <a:rPr lang="ru-RU" b="1" dirty="0">
+              <a:rPr lang="ru-RU" b="1">
                 <a:solidFill>
                   <a:srgbClr val="002060"/>
                 </a:solidFill>
@@ -2058,7 +2064,7 @@
                 <a:spcPct val="100000"/>
               </a:lnSpc>
             </a:pPr>
-            <a:endParaRPr lang="ru-RU" b="1" dirty="0">
+            <a:endParaRPr lang="ru-RU" b="1">
               <a:solidFill>
                 <a:srgbClr val="002060"/>
               </a:solidFill>
@@ -2074,7 +2080,7 @@
               </a:lnSpc>
             </a:pPr>
             <a:r>
-              <a:rPr lang="ru-RU" b="1" dirty="0">
+              <a:rPr lang="ru-RU" b="1">
                 <a:solidFill>
                   <a:srgbClr val="002060"/>
                 </a:solidFill>
@@ -2084,7 +2090,7 @@
               </a:rPr>
               <a:t>«Цифровизация, человеческий потенциал, транзитные возможности»</a:t>
             </a:r>
-            <a:endParaRPr dirty="0">
+            <a:endParaRPr>
               <a:solidFill>
                 <a:srgbClr val="002060"/>
               </a:solidFill>
@@ -2103,7 +2109,7 @@
               </a:spcBef>
             </a:pPr>
             <a:r>
-              <a:rPr lang="ru-RU" sz="1200" dirty="0">
+              <a:rPr lang="ru-RU" sz="1200">
                 <a:solidFill>
                   <a:srgbClr val="002060"/>
                 </a:solidFill>
@@ -2114,7 +2120,7 @@
               <a:t>Четверг</a:t>
             </a:r>
             <a:r>
-              <a:rPr sz="1200" dirty="0">
+              <a:rPr sz="1200">
                 <a:solidFill>
                   <a:srgbClr val="002060"/>
                 </a:solidFill>
@@ -2125,7 +2131,7 @@
               <a:t>,</a:t>
             </a:r>
             <a:r>
-              <a:rPr sz="1200" spc="-35" dirty="0">
+              <a:rPr sz="1200" spc="-35">
                 <a:solidFill>
                   <a:srgbClr val="002060"/>
                 </a:solidFill>
@@ -2136,7 +2142,7 @@
               <a:t> </a:t>
             </a:r>
             <a:r>
-              <a:rPr sz="1200" dirty="0">
+              <a:rPr sz="1200">
                 <a:solidFill>
                   <a:srgbClr val="002060"/>
                 </a:solidFill>
@@ -2147,7 +2153,7 @@
               <a:t>1</a:t>
             </a:r>
             <a:r>
-              <a:rPr lang="ru-RU" sz="1200" dirty="0">
+              <a:rPr lang="ru-RU" sz="1200">
                 <a:solidFill>
                   <a:srgbClr val="002060"/>
                 </a:solidFill>
@@ -2158,7 +2164,7 @@
               <a:t>4 мая 2026</a:t>
             </a:r>
             <a:r>
-              <a:rPr sz="1200" spc="-40" dirty="0">
+              <a:rPr sz="1200" spc="-40">
                 <a:solidFill>
                   <a:srgbClr val="002060"/>
                 </a:solidFill>
@@ -2169,7 +2175,7 @@
               <a:t> </a:t>
             </a:r>
             <a:r>
-              <a:rPr sz="1200" spc="-20" dirty="0">
+              <a:rPr sz="1200" spc="-20">
                 <a:solidFill>
                   <a:srgbClr val="002060"/>
                 </a:solidFill>
@@ -2179,7 +2185,7 @@
               </a:rPr>
               <a:t>года</a:t>
             </a:r>
-            <a:endParaRPr sz="1200" dirty="0">
+            <a:endParaRPr sz="1200">
               <a:solidFill>
                 <a:srgbClr val="002060"/>
               </a:solidFill>
@@ -2198,7 +2204,7 @@
               </a:spcBef>
             </a:pPr>
             <a:r>
-              <a:rPr sz="1200" dirty="0">
+              <a:rPr sz="1200">
                 <a:solidFill>
                   <a:srgbClr val="002060"/>
                 </a:solidFill>
@@ -2209,7 +2215,7 @@
               <a:t>1</a:t>
             </a:r>
             <a:r>
-              <a:rPr lang="ru-RU" sz="1200" dirty="0">
+              <a:rPr lang="ru-RU" sz="1200">
                 <a:solidFill>
                   <a:srgbClr val="002060"/>
                 </a:solidFill>
@@ -2220,7 +2226,7 @@
               <a:t>1:00</a:t>
             </a:r>
             <a:r>
-              <a:rPr sz="1200" spc="-40" dirty="0">
+              <a:rPr sz="1200" spc="-40">
                 <a:solidFill>
                   <a:srgbClr val="002060"/>
                 </a:solidFill>
@@ -2231,7 +2237,7 @@
               <a:t> </a:t>
             </a:r>
             <a:r>
-              <a:rPr sz="1200" dirty="0">
+              <a:rPr sz="1200">
                 <a:solidFill>
                   <a:srgbClr val="002060"/>
                 </a:solidFill>
@@ -2242,7 +2248,7 @@
               <a:t>-</a:t>
             </a:r>
             <a:r>
-              <a:rPr sz="1200" spc="-30" dirty="0">
+              <a:rPr sz="1200" spc="-30">
                 <a:solidFill>
                   <a:srgbClr val="002060"/>
                 </a:solidFill>
@@ -2253,7 +2259,7 @@
               <a:t> </a:t>
             </a:r>
             <a:r>
-              <a:rPr sz="1200" dirty="0">
+              <a:rPr sz="1200">
                 <a:solidFill>
                   <a:srgbClr val="002060"/>
                 </a:solidFill>
@@ -2264,7 +2270,7 @@
               <a:t>1</a:t>
             </a:r>
             <a:r>
-              <a:rPr lang="ru-RU" sz="1200" dirty="0">
+              <a:rPr lang="ru-RU" sz="1200">
                 <a:solidFill>
                   <a:srgbClr val="002060"/>
                 </a:solidFill>
@@ -2275,7 +2281,7 @@
               <a:t>7</a:t>
             </a:r>
             <a:r>
-              <a:rPr sz="1200" dirty="0">
+              <a:rPr sz="1200">
                 <a:solidFill>
                   <a:srgbClr val="002060"/>
                 </a:solidFill>
@@ -2286,7 +2292,7 @@
               <a:t>:00</a:t>
             </a:r>
             <a:r>
-              <a:rPr sz="1200" spc="-35" dirty="0">
+              <a:rPr sz="1200" spc="-35">
                 <a:solidFill>
                   <a:srgbClr val="002060"/>
                 </a:solidFill>
@@ -2296,7 +2302,7 @@
               </a:rPr>
               <a:t> </a:t>
             </a:r>
-            <a:endParaRPr lang="ru-RU" sz="1200" spc="-35" dirty="0">
+            <a:endParaRPr lang="ru-RU" sz="1200" spc="-35">
               <a:solidFill>
                 <a:srgbClr val="002060"/>
               </a:solidFill>
@@ -2311,7 +2317,7 @@
                 <a:spcPct val="100000"/>
               </a:lnSpc>
             </a:pPr>
-            <a:endParaRPr lang="ru-RU" sz="1100" dirty="0">
+            <a:endParaRPr lang="ru-RU" sz="1100">
               <a:solidFill>
                 <a:srgbClr val="002060"/>
               </a:solidFill>
@@ -2327,7 +2333,7 @@
               </a:lnSpc>
             </a:pPr>
             <a:r>
-              <a:rPr sz="1100" dirty="0">
+              <a:rPr sz="1100">
                 <a:solidFill>
                   <a:srgbClr val="002060"/>
                 </a:solidFill>
@@ -2338,7 +2344,7 @@
               <a:t>(</a:t>
             </a:r>
             <a:r>
-              <a:rPr lang="kk-KZ" sz="1100" dirty="0">
+              <a:rPr lang="kk-KZ" sz="1100">
                 <a:solidFill>
                   <a:srgbClr val="002060"/>
                 </a:solidFill>
@@ -2349,7 +2355,7 @@
               <a:t>С</a:t>
             </a:r>
             <a:r>
-              <a:rPr sz="1100" dirty="0" err="1">
+              <a:rPr sz="1100" err="1">
                 <a:solidFill>
                   <a:srgbClr val="002060"/>
                 </a:solidFill>
@@ -2360,7 +2366,7 @@
               <a:t>инхронный</a:t>
             </a:r>
             <a:r>
-              <a:rPr sz="1100" spc="-40" dirty="0">
+              <a:rPr sz="1100" spc="-40">
                 <a:solidFill>
                   <a:srgbClr val="002060"/>
                 </a:solidFill>
@@ -2371,7 +2377,7 @@
               <a:t> </a:t>
             </a:r>
             <a:r>
-              <a:rPr sz="1100" dirty="0">
+              <a:rPr sz="1100">
                 <a:solidFill>
                   <a:srgbClr val="002060"/>
                 </a:solidFill>
@@ -2382,7 +2388,7 @@
               <a:t>перевод</a:t>
             </a:r>
             <a:r>
-              <a:rPr sz="1100" spc="-35" dirty="0">
+              <a:rPr sz="1100" spc="-35">
                 <a:solidFill>
                   <a:srgbClr val="002060"/>
                 </a:solidFill>
@@ -2393,7 +2399,7 @@
               <a:t> </a:t>
             </a:r>
             <a:r>
-              <a:rPr sz="1100" dirty="0">
+              <a:rPr sz="1100">
                 <a:solidFill>
                   <a:srgbClr val="002060"/>
                 </a:solidFill>
@@ -2404,7 +2410,7 @@
               <a:t>с</a:t>
             </a:r>
             <a:r>
-              <a:rPr sz="1100" spc="-30" dirty="0">
+              <a:rPr sz="1100" spc="-30">
                 <a:solidFill>
                   <a:srgbClr val="002060"/>
                 </a:solidFill>
@@ -2415,7 +2421,7 @@
               <a:t> </a:t>
             </a:r>
             <a:r>
-              <a:rPr sz="1100" dirty="0" err="1">
+              <a:rPr sz="1100" err="1">
                 <a:solidFill>
                   <a:srgbClr val="002060"/>
                 </a:solidFill>
@@ -2426,7 +2432,7 @@
               <a:t>немецкого</a:t>
             </a:r>
             <a:r>
-              <a:rPr lang="kk-KZ" sz="1100" dirty="0">
+              <a:rPr lang="kk-KZ" sz="1100">
                 <a:solidFill>
                   <a:srgbClr val="002060"/>
                 </a:solidFill>
@@ -2437,7 +2443,7 @@
               <a:t> </a:t>
             </a:r>
             <a:r>
-              <a:rPr lang="de-DE" sz="1100" dirty="0">
+              <a:rPr lang="de-DE" sz="1100">
                 <a:solidFill>
                   <a:srgbClr val="002060"/>
                 </a:solidFill>
@@ -2448,7 +2454,7 @@
               <a:t>↔</a:t>
             </a:r>
             <a:r>
-              <a:rPr sz="1100" spc="-50" dirty="0">
+              <a:rPr sz="1100" spc="-50">
                 <a:solidFill>
                   <a:srgbClr val="002060"/>
                 </a:solidFill>
@@ -2459,7 +2465,7 @@
               <a:t> </a:t>
             </a:r>
             <a:r>
-              <a:rPr sz="1100" dirty="0" err="1">
+              <a:rPr sz="1100" err="1">
                 <a:solidFill>
                   <a:srgbClr val="002060"/>
                 </a:solidFill>
@@ -2470,7 +2476,7 @@
               <a:t>на</a:t>
             </a:r>
             <a:r>
-              <a:rPr lang="ru-RU" sz="1100" dirty="0">
+              <a:rPr lang="ru-RU" sz="1100">
                 <a:solidFill>
                   <a:srgbClr val="002060"/>
                 </a:solidFill>
@@ -2481,7 +2487,7 @@
               <a:t> казахский/</a:t>
             </a:r>
             <a:r>
-              <a:rPr sz="1100" dirty="0" err="1">
+              <a:rPr sz="1100" err="1">
                 <a:solidFill>
                   <a:srgbClr val="002060"/>
                 </a:solidFill>
@@ -2492,7 +2498,7 @@
               <a:t>русски</a:t>
             </a:r>
             <a:r>
-              <a:rPr lang="ru-RU" sz="1100" dirty="0">
+              <a:rPr lang="ru-RU" sz="1100">
                 <a:solidFill>
                   <a:srgbClr val="002060"/>
                 </a:solidFill>
@@ -2503,7 +2509,7 @@
               <a:t>й </a:t>
             </a:r>
             <a:r>
-              <a:rPr sz="1100" spc="-10" dirty="0" err="1">
+              <a:rPr sz="1100" spc="-10" err="1">
                 <a:solidFill>
                   <a:srgbClr val="002060"/>
                 </a:solidFill>
@@ -2514,7 +2520,7 @@
               <a:t>языки</a:t>
             </a:r>
             <a:r>
-              <a:rPr sz="1100" spc="-10" dirty="0">
+              <a:rPr sz="1100" spc="-10">
                 <a:solidFill>
                   <a:srgbClr val="002060"/>
                 </a:solidFill>
@@ -2524,7 +2530,7 @@
               </a:rPr>
               <a:t>)</a:t>
             </a:r>
-            <a:endParaRPr sz="1100" dirty="0">
+            <a:endParaRPr sz="1100">
               <a:solidFill>
                 <a:srgbClr val="002060"/>
               </a:solidFill>
@@ -2542,7 +2548,7 @@
                 <a:spcPts val="50"/>
               </a:spcBef>
             </a:pPr>
-            <a:endParaRPr sz="1100" dirty="0">
+            <a:endParaRPr sz="1100">
               <a:solidFill>
                 <a:srgbClr val="002060"/>
               </a:solidFill>
@@ -2558,7 +2564,7 @@
               </a:lnSpc>
             </a:pPr>
             <a:r>
-              <a:rPr sz="1400" u="sng" dirty="0">
+              <a:rPr sz="1400" u="sng">
                 <a:solidFill>
                   <a:srgbClr val="002060"/>
                 </a:solidFill>
@@ -2569,7 +2575,7 @@
               <a:t>В</a:t>
             </a:r>
             <a:r>
-              <a:rPr sz="1400" u="sng" spc="-20" dirty="0">
+              <a:rPr sz="1400" u="sng" spc="-20">
                 <a:solidFill>
                   <a:srgbClr val="002060"/>
                 </a:solidFill>
@@ -2580,7 +2586,7 @@
               <a:t> </a:t>
             </a:r>
             <a:r>
-              <a:rPr sz="1400" u="sng" spc="-10" dirty="0">
+              <a:rPr sz="1400" u="sng" spc="-10">
                 <a:solidFill>
                   <a:srgbClr val="002060"/>
                 </a:solidFill>
@@ -2591,7 +2597,7 @@
               <a:t>завершении</a:t>
             </a:r>
             <a:r>
-              <a:rPr sz="1400" u="sng" spc="-25" dirty="0">
+              <a:rPr sz="1400" u="sng" spc="-25">
                 <a:solidFill>
                   <a:srgbClr val="002060"/>
                 </a:solidFill>
@@ -2602,7 +2608,7 @@
               <a:t> </a:t>
             </a:r>
             <a:r>
-              <a:rPr sz="1400" u="sng" dirty="0">
+              <a:rPr sz="1400" u="sng">
                 <a:solidFill>
                   <a:srgbClr val="002060"/>
                 </a:solidFill>
@@ -2613,7 +2619,7 @@
               <a:t>форума</a:t>
             </a:r>
             <a:r>
-              <a:rPr sz="1400" u="sng" spc="-15" dirty="0">
+              <a:rPr sz="1400" u="sng" spc="-15">
                 <a:solidFill>
                   <a:srgbClr val="002060"/>
                 </a:solidFill>
@@ -2624,7 +2630,7 @@
               <a:t> </a:t>
             </a:r>
             <a:r>
-              <a:rPr sz="1400" u="sng" dirty="0">
+              <a:rPr sz="1400" u="sng">
                 <a:solidFill>
                   <a:srgbClr val="002060"/>
                 </a:solidFill>
@@ -2635,7 +2641,7 @@
               <a:t>-</a:t>
             </a:r>
             <a:r>
-              <a:rPr sz="1400" u="sng" spc="-20" dirty="0">
+              <a:rPr sz="1400" u="sng" spc="-20">
                 <a:solidFill>
                   <a:srgbClr val="002060"/>
                 </a:solidFill>
@@ -2646,7 +2652,7 @@
               <a:t> </a:t>
             </a:r>
             <a:r>
-              <a:rPr sz="1400" u="sng" spc="-10" dirty="0">
+              <a:rPr sz="1400" u="sng" spc="-10">
                 <a:solidFill>
                   <a:srgbClr val="002060"/>
                 </a:solidFill>
@@ -2657,7 +2663,7 @@
               <a:t>вечерний</a:t>
             </a:r>
             <a:r>
-              <a:rPr sz="1400" u="sng" spc="-25" dirty="0">
+              <a:rPr sz="1400" u="sng" spc="-25">
                 <a:solidFill>
                   <a:srgbClr val="002060"/>
                 </a:solidFill>
@@ -2668,7 +2674,7 @@
               <a:t> </a:t>
             </a:r>
             <a:r>
-              <a:rPr sz="1400" u="sng" spc="-10" dirty="0">
+              <a:rPr sz="1400" u="sng" spc="-10">
                 <a:solidFill>
                   <a:srgbClr val="002060"/>
                 </a:solidFill>
@@ -2678,7 +2684,7 @@
               </a:rPr>
               <a:t>прием</a:t>
             </a:r>
-            <a:endParaRPr sz="1400" u="sng" dirty="0">
+            <a:endParaRPr sz="1400" u="sng">
               <a:solidFill>
                 <a:srgbClr val="002060"/>
               </a:solidFill>
@@ -2696,7 +2702,7 @@
                 <a:spcPts val="380"/>
               </a:spcBef>
             </a:pPr>
-            <a:endParaRPr sz="1400" dirty="0">
+            <a:endParaRPr sz="1400">
               <a:solidFill>
                 <a:srgbClr val="002060"/>
               </a:solidFill>
@@ -2712,7 +2718,7 @@
               </a:lnSpc>
             </a:pPr>
             <a:r>
-              <a:rPr sz="1400" dirty="0" err="1">
+              <a:rPr sz="1400" err="1">
                 <a:solidFill>
                   <a:srgbClr val="002060"/>
                 </a:solidFill>
@@ -2723,7 +2729,7 @@
               <a:t>Форум</a:t>
             </a:r>
             <a:r>
-              <a:rPr sz="1400" spc="-10" dirty="0">
+              <a:rPr sz="1400" spc="-10">
                 <a:solidFill>
                   <a:srgbClr val="002060"/>
                 </a:solidFill>
@@ -2734,7 +2740,7 @@
               <a:t> </a:t>
             </a:r>
             <a:r>
-              <a:rPr lang="kk-KZ" sz="1400" dirty="0">
+              <a:rPr lang="kk-KZ" sz="1400">
                 <a:solidFill>
                   <a:srgbClr val="002060"/>
                 </a:solidFill>
@@ -2745,7 +2751,7 @@
               <a:t>органиизован</a:t>
             </a:r>
             <a:r>
-              <a:rPr sz="1400" spc="-20" dirty="0">
+              <a:rPr sz="1400" spc="-20">
                 <a:solidFill>
                   <a:srgbClr val="002060"/>
                 </a:solidFill>
@@ -2756,7 +2762,7 @@
               <a:t> </a:t>
             </a:r>
             <a:r>
-              <a:rPr sz="1400" dirty="0">
+              <a:rPr sz="1400">
                 <a:solidFill>
                   <a:srgbClr val="002060"/>
                 </a:solidFill>
@@ -2767,7 +2773,7 @@
               <a:t>в</a:t>
             </a:r>
             <a:r>
-              <a:rPr sz="1400" spc="-10" dirty="0">
+              <a:rPr sz="1400" spc="-10">
                 <a:solidFill>
                   <a:srgbClr val="002060"/>
                 </a:solidFill>
@@ -2778,7 +2784,7 @@
               <a:t> сотрудничестве</a:t>
             </a:r>
             <a:r>
-              <a:rPr sz="1400" spc="-30" dirty="0">
+              <a:rPr sz="1400" spc="-30">
                 <a:solidFill>
                   <a:srgbClr val="002060"/>
                 </a:solidFill>
@@ -2789,7 +2795,7 @@
               <a:t> </a:t>
             </a:r>
             <a:r>
-              <a:rPr sz="1400" spc="-50" dirty="0">
+              <a:rPr sz="1400" spc="-50">
                 <a:solidFill>
                   <a:srgbClr val="002060"/>
                 </a:solidFill>
@@ -2799,7 +2805,7 @@
               </a:rPr>
               <a:t>с</a:t>
             </a:r>
-            <a:endParaRPr sz="1400" dirty="0">
+            <a:endParaRPr sz="1400">
               <a:solidFill>
                 <a:srgbClr val="002060"/>
               </a:solidFill>
@@ -2846,7 +2852,7 @@
               </a:spcBef>
             </a:pPr>
             <a:r>
-              <a:rPr sz="1200" b="1" spc="50" dirty="0">
+              <a:rPr sz="1200" b="1" spc="50">
                 <a:solidFill>
                   <a:srgbClr val="FFFFFF"/>
                 </a:solidFill>
@@ -2856,7 +2862,7 @@
               </a:rPr>
               <a:t>Контакты:</a:t>
             </a:r>
-            <a:endParaRPr sz="1200" dirty="0">
+            <a:endParaRPr sz="1200">
               <a:latin typeface="Century Gothic" panose="020B0502020202020204" pitchFamily="34" charset="0"/>
               <a:ea typeface="Roboto" panose="02000000000000000000" pitchFamily="2" charset="0"/>
               <a:cs typeface="Roboto" panose="02000000000000000000" pitchFamily="2" charset="0"/>
@@ -2900,44 +2906,32 @@
               </a:spcBef>
             </a:pPr>
             <a:r>
-              <a:rPr lang="kk-KZ" sz="1200" dirty="0">
+              <a:rPr lang="de-DE" sz="1200" spc="-10" dirty="0" err="1">
                 <a:solidFill>
                   <a:schemeClr val="bg1"/>
                 </a:solidFill>
                 <a:latin typeface="Century Gothic" panose="020B0502020202020204" pitchFamily="34" charset="0"/>
-                <a:cs typeface="Calibri"/>
-              </a:rPr>
-              <a:t> </a:t>
-            </a:r>
-            <a:r>
-              <a:rPr lang="en-US" sz="1200" dirty="0">
+                <a:ea typeface="Roboto" panose="02000000000000000000" pitchFamily="2" charset="0"/>
+                <a:cs typeface="Roboto" panose="02000000000000000000" pitchFamily="2" charset="0"/>
+                <a:hlinkClick r:id="rId3">
+                  <a:extLst>
+                    <a:ext uri="{A12FA001-AC4F-418D-AE19-62706E023703}">
+                      <ahyp:hlinkClr xmlns:ahyp="http://schemas.microsoft.com/office/drawing/2018/hyperlinkcolor" val="tx"/>
+                    </a:ext>
+                  </a:extLst>
+                </a:hlinkClick>
+              </a:rPr>
+              <a:t>s.bolatkyzy</a:t>
+            </a:r>
+            <a:r>
+              <a:rPr lang="de-DE" sz="1200" spc="-10" dirty="0" err="1">
                 <a:solidFill>
                   <a:schemeClr val="bg1"/>
                 </a:solidFill>
                 <a:latin typeface="Century Gothic" panose="020B0502020202020204" pitchFamily="34" charset="0"/>
-                <a:cs typeface="Calibri"/>
-              </a:rPr>
-              <a:t> </a:t>
-            </a:r>
-            <a:r>
-              <a:rPr lang="en-US" sz="1200" dirty="0" err="1">
-                <a:solidFill>
-                  <a:schemeClr val="bg1"/>
-                </a:solidFill>
-                <a:latin typeface="Century Gothic" panose="020B0502020202020204" pitchFamily="34" charset="0"/>
-                <a:cs typeface="Calibri"/>
-              </a:rPr>
-              <a:t>s.bolatkyzy</a:t>
-            </a:r>
-            <a:r>
-              <a:rPr lang="de-DE" sz="1200" spc="-10" dirty="0">
-                <a:solidFill>
-                  <a:schemeClr val="bg1"/>
-                </a:solidFill>
-                <a:latin typeface="Century Gothic" panose="020B0502020202020204" pitchFamily="34" charset="0"/>
-                <a:ea typeface="Roboto" panose="02000000000000000000" pitchFamily="2" charset="0"/>
-                <a:cs typeface="Roboto" panose="02000000000000000000" pitchFamily="2" charset="0"/>
-                <a:hlinkClick r:id="rId3">
+                <a:ea typeface="Roboto" panose="02000000000000000000" pitchFamily="2" charset="0"/>
+                <a:cs typeface="Roboto" panose="02000000000000000000" pitchFamily="2" charset="0"/>
+                <a:hlinkClick r:id="rId4">
                   <a:extLst>
                     <a:ext uri="{A12FA001-AC4F-418D-AE19-62706E023703}">
                       <ahyp:hlinkClr xmlns:ahyp="http://schemas.microsoft.com/office/drawing/2018/hyperlinkcolor" val="tx"/>
@@ -3015,7 +3009,7 @@
               </a:spcBef>
             </a:pPr>
             <a:r>
-              <a:rPr lang="kk-KZ" sz="1200" b="1" spc="-10" dirty="0">
+              <a:rPr lang="kk-KZ" sz="1200" b="1" spc="-10">
                 <a:solidFill>
                   <a:srgbClr val="FFFFFF"/>
                 </a:solidFill>
@@ -3025,7 +3019,7 @@
               </a:rPr>
               <a:t>Адрес проведения:</a:t>
             </a:r>
-            <a:endParaRPr sz="1200" dirty="0">
+            <a:endParaRPr sz="1200">
               <a:latin typeface="Century Gothic" panose="020B0502020202020204" pitchFamily="34" charset="0"/>
               <a:ea typeface="Roboto" panose="02000000000000000000" pitchFamily="2" charset="0"/>
               <a:cs typeface="Roboto" panose="02000000000000000000" pitchFamily="2" charset="0"/>
@@ -3041,7 +3035,7 @@
               </a:spcBef>
             </a:pPr>
             <a:r>
-              <a:rPr lang="ru-RU" sz="1200" dirty="0" err="1">
+              <a:rPr lang="ru-RU" sz="1200" err="1">
                 <a:solidFill>
                   <a:srgbClr val="FFFFFF"/>
                 </a:solidFill>
@@ -3052,7 +3046,7 @@
               <a:t>Satbayev</a:t>
             </a:r>
             <a:r>
-              <a:rPr lang="ru-RU" sz="1200" dirty="0">
+              <a:rPr lang="ru-RU" sz="1200">
                 <a:solidFill>
                   <a:srgbClr val="FFFFFF"/>
                 </a:solidFill>
@@ -3073,7 +3067,7 @@
               </a:spcBef>
             </a:pPr>
             <a:r>
-              <a:rPr lang="ru-RU" sz="1200" dirty="0" err="1">
+              <a:rPr lang="ru-RU" sz="1200" err="1">
                 <a:solidFill>
                   <a:srgbClr val="FFFFFF"/>
                 </a:solidFill>
@@ -3084,7 +3078,7 @@
               <a:t>Аудидориум</a:t>
             </a:r>
             <a:r>
-              <a:rPr lang="ru-RU" sz="1200" dirty="0">
+              <a:rPr lang="ru-RU" sz="1200">
                 <a:solidFill>
                   <a:srgbClr val="FFFFFF"/>
                 </a:solidFill>
@@ -3095,7 +3089,7 @@
               <a:t> 343</a:t>
             </a:r>
             <a:r>
-              <a:rPr lang="en-US" sz="1200" dirty="0">
+              <a:rPr lang="en-US" sz="1200">
                 <a:solidFill>
                   <a:srgbClr val="FFFFFF"/>
                 </a:solidFill>
@@ -3106,7 +3100,7 @@
               <a:t>, </a:t>
             </a:r>
             <a:r>
-              <a:rPr lang="ru-RU" sz="1200" dirty="0">
+              <a:rPr lang="ru-RU" sz="1200">
                 <a:solidFill>
                   <a:srgbClr val="FFFFFF"/>
                 </a:solidFill>
@@ -3117,7 +3111,7 @@
               <a:t>Актовый зал им. К. </a:t>
             </a:r>
             <a:r>
-              <a:rPr lang="ru-RU" sz="1200" dirty="0" err="1">
+              <a:rPr lang="ru-RU" sz="1200" err="1">
                 <a:solidFill>
                   <a:srgbClr val="FFFFFF"/>
                 </a:solidFill>
@@ -3127,7 +3121,7 @@
               </a:rPr>
               <a:t>Турысова</a:t>
             </a:r>
-            <a:endParaRPr lang="ru-RU" sz="1200" dirty="0">
+            <a:endParaRPr lang="ru-RU" sz="1200">
               <a:solidFill>
                 <a:srgbClr val="FFFFFF"/>
               </a:solidFill>
@@ -3146,7 +3140,7 @@
               </a:spcBef>
             </a:pPr>
             <a:r>
-              <a:rPr lang="ru-RU" sz="1200" dirty="0">
+              <a:rPr lang="ru-RU" sz="1200">
                 <a:solidFill>
                   <a:srgbClr val="FFFFFF"/>
                 </a:solidFill>
@@ -3167,7 +3161,7 @@
               </a:spcBef>
             </a:pPr>
             <a:r>
-              <a:rPr lang="ru-RU" sz="1200" dirty="0">
+              <a:rPr lang="ru-RU" sz="1200">
                 <a:solidFill>
                   <a:srgbClr val="FFFFFF"/>
                 </a:solidFill>
@@ -3187,7 +3181,7 @@
                 <a:spcPts val="10"/>
               </a:spcBef>
             </a:pPr>
-            <a:endParaRPr sz="1200" dirty="0">
+            <a:endParaRPr sz="1200">
               <a:latin typeface="Century Gothic" panose="020B0502020202020204" pitchFamily="34" charset="0"/>
               <a:ea typeface="Roboto" panose="02000000000000000000" pitchFamily="2" charset="0"/>
               <a:cs typeface="Roboto" panose="02000000000000000000" pitchFamily="2" charset="0"/>
@@ -3228,7 +3222,7 @@
               </a:spcBef>
             </a:pPr>
             <a:r>
-              <a:rPr sz="1200" spc="-10" dirty="0">
+              <a:rPr sz="1200" spc="-10">
                 <a:solidFill>
                   <a:srgbClr val="FFFFFF"/>
                 </a:solidFill>
@@ -3238,7 +3232,7 @@
               </a:rPr>
               <a:t>Регистрация</a:t>
             </a:r>
-            <a:endParaRPr sz="1200" dirty="0">
+            <a:endParaRPr sz="1200">
               <a:latin typeface="Century Gothic" panose="020B0502020202020204" pitchFamily="34" charset="0"/>
               <a:ea typeface="Roboto" panose="02000000000000000000" pitchFamily="2" charset="0"/>
               <a:cs typeface="Roboto" panose="02000000000000000000" pitchFamily="2" charset="0"/>
@@ -3251,7 +3245,7 @@
               </a:spcBef>
             </a:pPr>
             <a:r>
-              <a:rPr sz="1200" spc="-10" dirty="0" err="1">
+              <a:rPr sz="1200" spc="-10" err="1">
                 <a:solidFill>
                   <a:srgbClr val="FFFFFF"/>
                 </a:solidFill>
@@ -3262,7 +3256,7 @@
               <a:t>Приветственная</a:t>
             </a:r>
             <a:r>
-              <a:rPr sz="1200" spc="60" dirty="0">
+              <a:rPr sz="1200" spc="60">
                 <a:solidFill>
                   <a:srgbClr val="FFFFFF"/>
                 </a:solidFill>
@@ -3273,7 +3267,7 @@
               <a:t> </a:t>
             </a:r>
             <a:r>
-              <a:rPr sz="1200" spc="-20" dirty="0" err="1">
+              <a:rPr sz="1200" spc="-20" err="1">
                 <a:solidFill>
                   <a:srgbClr val="FFFFFF"/>
                 </a:solidFill>
@@ -3284,7 +3278,7 @@
               <a:t>часть</a:t>
             </a:r>
             <a:r>
-              <a:rPr lang="ru-RU" sz="1200" spc="5" dirty="0">
+              <a:rPr lang="ru-RU" sz="1200" spc="5">
                 <a:solidFill>
                   <a:srgbClr val="FFFFFF"/>
                 </a:solidFill>
@@ -3302,7 +3296,7 @@
               </a:spcBef>
             </a:pPr>
             <a:r>
-              <a:rPr lang="ru-RU" sz="1200" spc="5" dirty="0" err="1">
+              <a:rPr lang="ru-RU" sz="1200" spc="5" err="1">
                 <a:solidFill>
                   <a:srgbClr val="FFFFFF"/>
                 </a:solidFill>
@@ -3313,7 +3307,7 @@
               <a:t>П</a:t>
             </a:r>
             <a:r>
-              <a:rPr lang="ru-RU" sz="1200" spc="-10" dirty="0" err="1">
+              <a:rPr lang="ru-RU" sz="1200" spc="-10" err="1">
                 <a:solidFill>
                   <a:srgbClr val="FFFFFF"/>
                 </a:solidFill>
@@ -3324,7 +3318,7 @@
               <a:t>ле</a:t>
             </a:r>
             <a:r>
-              <a:rPr sz="1200" spc="-10" dirty="0" err="1">
+              <a:rPr sz="1200" spc="-10" err="1">
                 <a:solidFill>
                   <a:srgbClr val="FFFFFF"/>
                 </a:solidFill>
@@ -3335,7 +3329,7 @@
               <a:t>нарное</a:t>
             </a:r>
             <a:r>
-              <a:rPr sz="1200" spc="-10" dirty="0">
+              <a:rPr sz="1200" spc="-10">
                 <a:solidFill>
                   <a:srgbClr val="FFFFFF"/>
                 </a:solidFill>
@@ -3346,7 +3340,7 @@
               <a:t> </a:t>
             </a:r>
             <a:r>
-              <a:rPr sz="1200" dirty="0" err="1">
+              <a:rPr sz="1200" err="1">
                 <a:solidFill>
                   <a:srgbClr val="FFFFFF"/>
                 </a:solidFill>
@@ -3357,7 +3351,7 @@
               <a:t>заседание</a:t>
             </a:r>
             <a:r>
-              <a:rPr sz="1200" spc="-25" dirty="0">
+              <a:rPr sz="1200" spc="-25">
                 <a:solidFill>
                   <a:srgbClr val="FFFFFF"/>
                 </a:solidFill>
@@ -3368,7 +3362,7 @@
               <a:t> </a:t>
             </a:r>
             <a:r>
-              <a:rPr sz="1200" spc="-35" dirty="0">
+              <a:rPr sz="1200" spc="-35">
                 <a:solidFill>
                   <a:srgbClr val="FFFFFF"/>
                 </a:solidFill>
@@ -3378,7 +3372,7 @@
               </a:rPr>
               <a:t> </a:t>
             </a:r>
-            <a:endParaRPr lang="ru-RU" sz="1200" spc="-35" dirty="0">
+            <a:endParaRPr lang="ru-RU" sz="1200" spc="-35">
               <a:solidFill>
                 <a:srgbClr val="FFFFFF"/>
               </a:solidFill>
@@ -3394,7 +3388,7 @@
               </a:spcBef>
             </a:pPr>
             <a:r>
-              <a:rPr lang="ru-RU" sz="1200" dirty="0">
+              <a:rPr lang="ru-RU" sz="1200">
                 <a:solidFill>
                   <a:srgbClr val="FFFFFF"/>
                 </a:solidFill>
@@ -3405,7 +3399,7 @@
               <a:t>О</a:t>
             </a:r>
             <a:r>
-              <a:rPr sz="1200" dirty="0" err="1">
+              <a:rPr sz="1200" err="1">
                 <a:solidFill>
                   <a:srgbClr val="FFFFFF"/>
                 </a:solidFill>
@@ -3416,7 +3410,7 @@
               <a:t>ткрытая</a:t>
             </a:r>
             <a:r>
-              <a:rPr sz="1200" spc="-30" dirty="0">
+              <a:rPr sz="1200" spc="-30">
                 <a:solidFill>
                   <a:srgbClr val="FFFFFF"/>
                 </a:solidFill>
@@ -3427,7 +3421,7 @@
               <a:t> </a:t>
             </a:r>
             <a:r>
-              <a:rPr sz="1200" dirty="0" err="1">
+              <a:rPr sz="1200" err="1">
                 <a:solidFill>
                   <a:srgbClr val="FFFFFF"/>
                 </a:solidFill>
@@ -3437,7 +3431,7 @@
               </a:rPr>
               <a:t>дискуссия</a:t>
             </a:r>
-            <a:endParaRPr lang="ru-RU" sz="1200" dirty="0">
+            <a:endParaRPr lang="ru-RU" sz="1200">
               <a:solidFill>
                 <a:srgbClr val="FFFFFF"/>
               </a:solidFill>
@@ -3453,7 +3447,7 @@
               </a:spcBef>
             </a:pPr>
             <a:r>
-              <a:rPr lang="en-US" sz="1200" dirty="0">
+              <a:rPr lang="en-US" sz="1200">
                 <a:solidFill>
                   <a:srgbClr val="FFFFFF"/>
                 </a:solidFill>
@@ -3464,7 +3458,7 @@
               <a:t>B2B </a:t>
             </a:r>
             <a:r>
-              <a:rPr lang="kk-KZ" sz="1200" dirty="0">
+              <a:rPr lang="kk-KZ" sz="1200">
                 <a:solidFill>
                   <a:srgbClr val="FFFFFF"/>
                 </a:solidFill>
@@ -3474,7 +3468,7 @@
               </a:rPr>
               <a:t>встречи</a:t>
             </a:r>
-            <a:endParaRPr sz="1200" dirty="0">
+            <a:endParaRPr sz="1200">
               <a:latin typeface="Century Gothic" panose="020B0502020202020204" pitchFamily="34" charset="0"/>
               <a:ea typeface="Roboto" panose="02000000000000000000" pitchFamily="2" charset="0"/>
               <a:cs typeface="Roboto" panose="02000000000000000000" pitchFamily="2" charset="0"/>
@@ -3483,7 +3477,7 @@
           <a:p>
             <a:pPr marL="12700"/>
             <a:r>
-              <a:rPr sz="1200" dirty="0">
+              <a:rPr sz="1200">
                 <a:solidFill>
                   <a:srgbClr val="FFFFFF"/>
                 </a:solidFill>
@@ -3494,7 +3488,7 @@
               <a:t>Вечерний</a:t>
             </a:r>
             <a:r>
-              <a:rPr sz="1200" spc="-50" dirty="0">
+              <a:rPr sz="1200" spc="-50">
                 <a:solidFill>
                   <a:srgbClr val="FFFFFF"/>
                 </a:solidFill>
@@ -3505,7 +3499,7 @@
               <a:t> </a:t>
             </a:r>
             <a:r>
-              <a:rPr sz="1200" spc="-10" dirty="0">
+              <a:rPr sz="1200" spc="-10">
                 <a:solidFill>
                   <a:srgbClr val="FFFFFF"/>
                 </a:solidFill>
@@ -3515,7 +3509,7 @@
               </a:rPr>
               <a:t>прием</a:t>
             </a:r>
-            <a:endParaRPr sz="1200" dirty="0">
+            <a:endParaRPr sz="1200">
               <a:latin typeface="Century Gothic" panose="020B0502020202020204" pitchFamily="34" charset="0"/>
               <a:ea typeface="Roboto" panose="02000000000000000000" pitchFamily="2" charset="0"/>
               <a:cs typeface="Roboto" panose="02000000000000000000" pitchFamily="2" charset="0"/>
@@ -3559,7 +3553,7 @@
               </a:spcBef>
             </a:pPr>
             <a:r>
-              <a:rPr lang="kk-KZ" sz="1200" b="1" i="1" spc="70" dirty="0">
+              <a:rPr lang="kk-KZ" sz="1200" b="1" i="1" spc="70">
                 <a:solidFill>
                   <a:schemeClr val="bg1"/>
                 </a:solidFill>
@@ -3570,7 +3564,7 @@
               <a:t>Заявки для участие в форуме и В2В встречах</a:t>
             </a:r>
             <a:r>
-              <a:rPr lang="ru-RU" sz="1200" b="1" i="1" spc="70" dirty="0">
+              <a:rPr lang="ru-RU" sz="1200" b="1" i="1" spc="70">
                 <a:solidFill>
                   <a:schemeClr val="bg1"/>
                 </a:solidFill>
@@ -3581,7 +3575,7 @@
               <a:t> принимаются по </a:t>
             </a:r>
             <a:r>
-              <a:rPr lang="en-US" sz="1200" b="1" i="1" spc="70" dirty="0">
+              <a:rPr lang="en-US" sz="1200" b="1" i="1" spc="70">
                 <a:solidFill>
                   <a:schemeClr val="bg1"/>
                 </a:solidFill>
@@ -3591,7 +3585,7 @@
               </a:rPr>
               <a:t>email:</a:t>
             </a:r>
-            <a:endParaRPr sz="1200" dirty="0">
+            <a:endParaRPr sz="1200">
               <a:solidFill>
                 <a:schemeClr val="bg1"/>
               </a:solidFill>
@@ -3602,36 +3596,6 @@
           </a:p>
         </p:txBody>
       </p:sp>
-      <p:pic>
-        <p:nvPicPr>
-          <p:cNvPr id="3" name="Рисунок 2">
-            <a:extLst>
-              <a:ext uri="{FF2B5EF4-FFF2-40B4-BE49-F238E27FC236}">
-                <a16:creationId xmlns:a16="http://schemas.microsoft.com/office/drawing/2014/main" id="{93E46722-83BE-E5A0-9726-AC4013CE40A2}"/>
-              </a:ext>
-            </a:extLst>
-          </p:cNvPr>
-          <p:cNvPicPr>
-            <a:picLocks noChangeAspect="1"/>
-          </p:cNvPicPr>
-          <p:nvPr/>
-        </p:nvPicPr>
-        <p:blipFill>
-          <a:blip r:embed="rId4"/>
-          <a:stretch>
-            <a:fillRect/>
-          </a:stretch>
-        </p:blipFill>
-        <p:spPr>
-          <a:xfrm>
-            <a:off x="4518271" y="5270293"/>
-            <a:ext cx="2179213" cy="871685"/>
-          </a:xfrm>
-          <a:prstGeom prst="rect">
-            <a:avLst/>
-          </a:prstGeom>
-        </p:spPr>
-      </p:pic>
       <p:sp>
         <p:nvSpPr>
           <p:cNvPr id="8" name="object 3">
@@ -3646,7 +3610,7 @@
         </p:nvSpPr>
         <p:spPr>
           <a:xfrm>
-            <a:off x="3926698" y="9687079"/>
+            <a:off x="3941446" y="9687079"/>
             <a:ext cx="3294380" cy="226344"/>
           </a:xfrm>
           <a:prstGeom prst="rect">
@@ -3668,44 +3632,32 @@
               </a:spcBef>
             </a:pPr>
             <a:r>
-              <a:rPr lang="en-US" sz="1200" dirty="0">
+              <a:rPr lang="de-DE" sz="1200" spc="-10" dirty="0" err="1">
                 <a:solidFill>
                   <a:schemeClr val="bg1"/>
                 </a:solidFill>
                 <a:latin typeface="Century Gothic" panose="020B0502020202020204" pitchFamily="34" charset="0"/>
-                <a:cs typeface="Calibri"/>
-              </a:rPr>
-              <a:t> </a:t>
-            </a:r>
-            <a:r>
-              <a:rPr lang="en-US" sz="1200" dirty="0" err="1">
+                <a:ea typeface="Roboto" panose="02000000000000000000" pitchFamily="2" charset="0"/>
+                <a:cs typeface="Roboto" panose="02000000000000000000" pitchFamily="2" charset="0"/>
+                <a:hlinkClick r:id="rId3">
+                  <a:extLst>
+                    <a:ext uri="{A12FA001-AC4F-418D-AE19-62706E023703}">
+                      <ahyp:hlinkClr xmlns:ahyp="http://schemas.microsoft.com/office/drawing/2018/hyperlinkcolor" val="tx"/>
+                    </a:ext>
+                  </a:extLst>
+                </a:hlinkClick>
+              </a:rPr>
+              <a:t>s.bolatkyzy</a:t>
+            </a:r>
+            <a:r>
+              <a:rPr lang="de-DE" sz="1200" spc="-10" dirty="0" err="1">
                 <a:solidFill>
                   <a:schemeClr val="bg1"/>
                 </a:solidFill>
                 <a:latin typeface="Century Gothic" panose="020B0502020202020204" pitchFamily="34" charset="0"/>
-                <a:cs typeface="Calibri"/>
-              </a:rPr>
-              <a:t>s.bolatkyzy</a:t>
-            </a:r>
-            <a:r>
-              <a:rPr lang="en-US" sz="1200" dirty="0">
-                <a:solidFill>
-                  <a:schemeClr val="bg1"/>
-                </a:solidFill>
-                <a:latin typeface="Century Gothic" panose="020B0502020202020204" pitchFamily="34" charset="0"/>
-                <a:cs typeface="Calibri"/>
-              </a:rPr>
-              <a:t> </a:t>
-            </a:r>
-            <a:r>
-              <a:rPr lang="de-DE" sz="1200" spc="-10" dirty="0">
-                <a:solidFill>
-                  <a:schemeClr val="bg1"/>
-                </a:solidFill>
-                <a:latin typeface="Century Gothic" panose="020B0502020202020204" pitchFamily="34" charset="0"/>
-                <a:ea typeface="Roboto" panose="02000000000000000000" pitchFamily="2" charset="0"/>
-                <a:cs typeface="Roboto" panose="02000000000000000000" pitchFamily="2" charset="0"/>
-                <a:hlinkClick r:id="rId3">
+                <a:ea typeface="Roboto" panose="02000000000000000000" pitchFamily="2" charset="0"/>
+                <a:cs typeface="Roboto" panose="02000000000000000000" pitchFamily="2" charset="0"/>
+                <a:hlinkClick r:id="rId4">
                   <a:extLst>
                     <a:ext uri="{A12FA001-AC4F-418D-AE19-62706E023703}">
                       <ahyp:hlinkClr xmlns:ahyp="http://schemas.microsoft.com/office/drawing/2018/hyperlinkcolor" val="tx"/>
@@ -3726,53 +3678,6 @@
           </a:p>
         </p:txBody>
       </p:sp>
-      <p:pic>
-        <p:nvPicPr>
-          <p:cNvPr id="1028" name="Picture 4" descr="Фотосурет сипаттамасы жоқ.">
-            <a:extLst>
-              <a:ext uri="{FF2B5EF4-FFF2-40B4-BE49-F238E27FC236}">
-                <a16:creationId xmlns:a16="http://schemas.microsoft.com/office/drawing/2014/main" id="{C16B9B65-7ADD-D9AD-BA6D-2DA381DA3141}"/>
-              </a:ext>
-            </a:extLst>
-          </p:cNvPr>
-          <p:cNvPicPr>
-            <a:picLocks noChangeAspect="1" noChangeArrowheads="1"/>
-          </p:cNvPicPr>
-          <p:nvPr/>
-        </p:nvPicPr>
-        <p:blipFill>
-          <a:blip r:embed="rId5" cstate="print">
-            <a:extLst>
-              <a:ext uri="{28A0092B-C50C-407E-A947-70E740481C1C}">
-                <a14:useLocalDpi xmlns:a14="http://schemas.microsoft.com/office/drawing/2010/main" val="0"/>
-              </a:ext>
-            </a:extLst>
-          </a:blip>
-          <a:srcRect/>
-          <a:stretch>
-            <a:fillRect/>
-          </a:stretch>
-        </p:blipFill>
-        <p:spPr bwMode="auto">
-          <a:xfrm>
-            <a:off x="928879" y="5444674"/>
-            <a:ext cx="1390929" cy="1240160"/>
-          </a:xfrm>
-          <a:prstGeom prst="rect">
-            <a:avLst/>
-          </a:prstGeom>
-          <a:noFill/>
-          <a:extLst>
-            <a:ext uri="{909E8E84-426E-40DD-AFC4-6F175D3DCCD1}">
-              <a14:hiddenFill xmlns:a14="http://schemas.microsoft.com/office/drawing/2010/main">
-                <a:solidFill>
-                  <a:srgbClr val="FFFFFF"/>
-                </a:solidFill>
-              </a14:hiddenFill>
-            </a:ext>
-          </a:extLst>
-        </p:spPr>
-      </p:pic>
       <p:sp>
         <p:nvSpPr>
           <p:cNvPr id="2" name="object 4">
@@ -3809,7 +3714,7 @@
               </a:spcBef>
             </a:pPr>
             <a:r>
-              <a:rPr lang="kk-KZ" sz="1200" b="1" i="1" spc="70" dirty="0">
+              <a:rPr lang="kk-KZ" sz="1200" b="1" i="1" spc="70">
                 <a:solidFill>
                   <a:schemeClr val="bg1"/>
                 </a:solidFill>
@@ -3820,7 +3725,7 @@
               <a:t>Сайт</a:t>
             </a:r>
             <a:r>
-              <a:rPr lang="ru-RU" sz="1200" b="1" i="1" spc="70" dirty="0">
+              <a:rPr lang="ru-RU" sz="1200" b="1" i="1" spc="70">
                 <a:solidFill>
                   <a:schemeClr val="bg1"/>
                 </a:solidFill>
@@ -3831,7 +3736,7 @@
               <a:t> мероприятия: </a:t>
             </a:r>
             <a:r>
-              <a:rPr lang="de-DE" sz="1200" b="1" i="1" spc="70" dirty="0">
+              <a:rPr lang="de-DE" sz="1200" b="1" i="1" spc="70">
                 <a:solidFill>
                   <a:schemeClr val="bg1"/>
                 </a:solidFill>
@@ -3842,7 +3747,7 @@
               <a:t>kazgerlogisticsforum.kz </a:t>
             </a:r>
             <a:r>
-              <a:rPr lang="ru-RU" sz="1200" b="1" i="1" spc="70" dirty="0">
+              <a:rPr lang="ru-RU" sz="1200" b="1" i="1" spc="70">
                 <a:solidFill>
                   <a:schemeClr val="bg1"/>
                 </a:solidFill>
@@ -3852,7 +3757,7 @@
               </a:rPr>
               <a:t> </a:t>
             </a:r>
-            <a:endParaRPr sz="1200" dirty="0">
+            <a:endParaRPr sz="1200">
               <a:solidFill>
                 <a:schemeClr val="bg1"/>
               </a:solidFill>
@@ -3865,10 +3770,10 @@
       </p:sp>
       <p:pic>
         <p:nvPicPr>
-          <p:cNvPr id="19" name="Рисунок 18" descr="Изображение выглядит как Графика, Шрифт, графический дизайн, снимок экрана&#10;&#10;Автоматически созданное описание">
+          <p:cNvPr id="22" name="Рисунок 21" descr="Изображение выглядит как Графика, Шрифт, графический дизайн, снимок экрана&#10;&#10;Автоматически созданное описание">
             <a:extLst>
               <a:ext uri="{FF2B5EF4-FFF2-40B4-BE49-F238E27FC236}">
-                <a16:creationId xmlns:a16="http://schemas.microsoft.com/office/drawing/2014/main" id="{8F33752A-5400-C3BA-1FAC-339A0CEBA65F}"/>
+                <a16:creationId xmlns:a16="http://schemas.microsoft.com/office/drawing/2014/main" id="{1D6A952D-A16E-01DD-37DC-8BC325D6C8B3}"/>
               </a:ext>
             </a:extLst>
           </p:cNvPr>
@@ -3878,7 +3783,7 @@
           <p:nvPr/>
         </p:nvPicPr>
         <p:blipFill>
-          <a:blip r:embed="rId6" cstate="print">
+          <a:blip r:embed="rId5" cstate="print">
             <a:extLst>
               <a:ext uri="{28A0092B-C50C-407E-A947-70E740481C1C}">
                 <a14:useLocalDpi xmlns:a14="http://schemas.microsoft.com/office/drawing/2010/main" val="0"/>
@@ -3891,8 +3796,8 @@
         </p:blipFill>
         <p:spPr>
           <a:xfrm>
-            <a:off x="2934245" y="5442239"/>
-            <a:ext cx="1155408" cy="544293"/>
+            <a:off x="356595" y="310292"/>
+            <a:ext cx="1197622" cy="564179"/>
           </a:xfrm>
           <a:prstGeom prst="rect">
             <a:avLst/>
@@ -3901,10 +3806,57 @@
       </p:pic>
       <p:pic>
         <p:nvPicPr>
-          <p:cNvPr id="21" name="Рисунок 20" descr="Изображение выглядит как текст, графический дизайн, Графика, Шрифт&#10;&#10;Автоматически созданное описание">
+          <p:cNvPr id="7" name="Picture 4" descr="Фотосурет сипаттамасы жоқ.">
             <a:extLst>
               <a:ext uri="{FF2B5EF4-FFF2-40B4-BE49-F238E27FC236}">
-                <a16:creationId xmlns:a16="http://schemas.microsoft.com/office/drawing/2014/main" id="{8213D2C3-7A38-6D32-9379-3BE386688FEC}"/>
+                <a16:creationId xmlns:a16="http://schemas.microsoft.com/office/drawing/2014/main" id="{E23DFBB0-6041-6588-6DE4-A0ED4293F77C}"/>
+              </a:ext>
+            </a:extLst>
+          </p:cNvPr>
+          <p:cNvPicPr>
+            <a:picLocks noChangeAspect="1" noChangeArrowheads="1"/>
+          </p:cNvPicPr>
+          <p:nvPr/>
+        </p:nvPicPr>
+        <p:blipFill>
+          <a:blip r:embed="rId6" cstate="print">
+            <a:extLst>
+              <a:ext uri="{28A0092B-C50C-407E-A947-70E740481C1C}">
+                <a14:useLocalDpi xmlns:a14="http://schemas.microsoft.com/office/drawing/2010/main" val="0"/>
+              </a:ext>
+            </a:extLst>
+          </a:blip>
+          <a:srcRect/>
+          <a:stretch>
+            <a:fillRect/>
+          </a:stretch>
+        </p:blipFill>
+        <p:spPr bwMode="auto">
+          <a:xfrm>
+            <a:off x="1897474" y="5753663"/>
+            <a:ext cx="866955" cy="772982"/>
+          </a:xfrm>
+          <a:prstGeom prst="rect">
+            <a:avLst/>
+          </a:prstGeom>
+          <a:noFill/>
+          <a:extLst>
+            <a:ext uri="{909E8E84-426E-40DD-AFC4-6F175D3DCCD1}">
+              <a14:hiddenFill xmlns:a14="http://schemas.microsoft.com/office/drawing/2010/main">
+                <a:solidFill>
+                  <a:srgbClr val="FFFFFF"/>
+                </a:solidFill>
+              </a14:hiddenFill>
+            </a:ext>
+          </a:extLst>
+        </p:spPr>
+      </p:pic>
+      <p:pic>
+        <p:nvPicPr>
+          <p:cNvPr id="15" name="Picture 14">
+            <a:extLst>
+              <a:ext uri="{FF2B5EF4-FFF2-40B4-BE49-F238E27FC236}">
+                <a16:creationId xmlns:a16="http://schemas.microsoft.com/office/drawing/2014/main" id="{981D4A18-3C44-DA16-C1D3-88A722B4BE25}"/>
               </a:ext>
             </a:extLst>
           </p:cNvPr>
@@ -3927,8 +3879,8 @@
         </p:blipFill>
         <p:spPr>
           <a:xfrm>
-            <a:off x="2712418" y="6299274"/>
-            <a:ext cx="2895237" cy="1063688"/>
+            <a:off x="1891699" y="160331"/>
+            <a:ext cx="2527794" cy="928692"/>
           </a:xfrm>
           <a:prstGeom prst="rect">
             <a:avLst/>
@@ -3937,10 +3889,10 @@
       </p:pic>
       <p:pic>
         <p:nvPicPr>
-          <p:cNvPr id="22" name="Рисунок 21" descr="Изображение выглядит как Графика, Шрифт, графический дизайн, снимок экрана&#10;&#10;Автоматически созданное описание">
+          <p:cNvPr id="17" name="Рисунок 2">
             <a:extLst>
               <a:ext uri="{FF2B5EF4-FFF2-40B4-BE49-F238E27FC236}">
-                <a16:creationId xmlns:a16="http://schemas.microsoft.com/office/drawing/2014/main" id="{1D6A952D-A16E-01DD-37DC-8BC325D6C8B3}"/>
+                <a16:creationId xmlns:a16="http://schemas.microsoft.com/office/drawing/2014/main" id="{B79B64B9-B898-849D-3CCE-9FD3BD9439E7}"/>
               </a:ext>
             </a:extLst>
           </p:cNvPr>
@@ -3950,21 +3902,15 @@
           <p:nvPr/>
         </p:nvPicPr>
         <p:blipFill>
-          <a:blip r:embed="rId8" cstate="print">
-            <a:extLst>
-              <a:ext uri="{28A0092B-C50C-407E-A947-70E740481C1C}">
-                <a14:useLocalDpi xmlns:a14="http://schemas.microsoft.com/office/drawing/2010/main" val="0"/>
-              </a:ext>
-            </a:extLst>
-          </a:blip>
+          <a:blip r:embed="rId8"/>
           <a:stretch>
             <a:fillRect/>
           </a:stretch>
         </p:blipFill>
         <p:spPr>
           <a:xfrm>
-            <a:off x="356595" y="310292"/>
-            <a:ext cx="1197622" cy="564179"/>
+            <a:off x="3151440" y="5717075"/>
+            <a:ext cx="2059868" cy="823947"/>
           </a:xfrm>
           <a:prstGeom prst="rect">
             <a:avLst/>
@@ -4069,7 +4015,7 @@
         <p:spPr>
           <a:xfrm>
             <a:off x="576944" y="1359809"/>
-            <a:ext cx="6839857" cy="8927059"/>
+            <a:ext cx="6839857" cy="9614170"/>
           </a:xfrm>
           <a:prstGeom prst="rect">
             <a:avLst/>
@@ -4244,17 +4190,47 @@
                 <a:latin typeface="Century Gothic" panose="020B0502020202020204" pitchFamily="34" charset="0"/>
                 <a:cs typeface="Calibri"/>
               </a:rPr>
-              <a:t> (BVL, Германия) приглашает</a:t>
-            </a:r>
-            <a:r>
-              <a:rPr lang="ru-RU" sz="1200" spc="-5" noProof="0" dirty="0">
-                <a:solidFill>
-                  <a:srgbClr val="002060"/>
-                </a:solidFill>
-                <a:latin typeface="Century Gothic" panose="020B0502020202020204" pitchFamily="34" charset="0"/>
-                <a:cs typeface="Calibri"/>
-              </a:rPr>
-              <a:t> </a:t>
+              <a:t> (BVL, Германия</a:t>
+            </a:r>
+            <a:r>
+              <a:rPr lang="ru-RU" sz="1200" dirty="0">
+                <a:solidFill>
+                  <a:srgbClr val="002060"/>
+                </a:solidFill>
+                <a:latin typeface="Century Gothic" panose="020B0502020202020204" pitchFamily="34" charset="0"/>
+                <a:cs typeface="Calibri"/>
+              </a:rPr>
+              <a:t>) </a:t>
+            </a:r>
+            <a:r>
+              <a:rPr lang="az-Cyrl-AZ" sz="1200" dirty="0">
+                <a:solidFill>
+                  <a:srgbClr val="002060"/>
+                </a:solidFill>
+                <a:latin typeface="Century Gothic" panose="020B0502020202020204" pitchFamily="34" charset="0"/>
+                <a:cs typeface="Calibri"/>
+              </a:rPr>
+              <a:t>и Германским обществом по международному сотрудничеству (</a:t>
+            </a:r>
+            <a:r>
+              <a:rPr lang="de-DE" sz="1200" dirty="0">
+                <a:solidFill>
+                  <a:srgbClr val="002060"/>
+                </a:solidFill>
+                <a:latin typeface="Century Gothic" panose="020B0502020202020204" pitchFamily="34" charset="0"/>
+                <a:cs typeface="Calibri"/>
+              </a:rPr>
+              <a:t>Deutsche Gesellschaft für Internationale Zusammenarbeit GmbH, GIZ) </a:t>
+            </a:r>
+            <a:r>
+              <a:rPr lang="ru-RU" sz="1200" dirty="0">
+                <a:solidFill>
+                  <a:srgbClr val="002060"/>
+                </a:solidFill>
+                <a:latin typeface="Century Gothic" panose="020B0502020202020204" pitchFamily="34" charset="0"/>
+                <a:cs typeface="Calibri"/>
+              </a:rPr>
+              <a:t>приглашает </a:t>
             </a:r>
             <a:r>
               <a:rPr lang="ru-RU" sz="1200" noProof="0" dirty="0">
@@ -4550,266 +4526,17 @@
                 <a:latin typeface="Century Gothic" panose="020B0502020202020204" pitchFamily="34" charset="0"/>
                 <a:cs typeface="Calibri"/>
               </a:rPr>
-              <a:t>Для получения дополнительной информации Вы можете обращаться по следующим контактам</a:t>
-            </a:r>
-            <a:r>
-              <a:rPr lang="kk-KZ" sz="1200" dirty="0">
-                <a:solidFill>
-                  <a:srgbClr val="002060"/>
-                </a:solidFill>
-                <a:latin typeface="Century Gothic" panose="020B0502020202020204" pitchFamily="34" charset="0"/>
-                <a:cs typeface="Calibri"/>
-              </a:rPr>
-              <a:t>; </a:t>
-            </a:r>
-            <a:r>
-              <a:rPr lang="en-US" sz="1200" dirty="0">
-                <a:solidFill>
-                  <a:srgbClr val="002060"/>
-                </a:solidFill>
-                <a:latin typeface="Century Gothic" panose="020B0502020202020204" pitchFamily="34" charset="0"/>
-                <a:cs typeface="Calibri"/>
-              </a:rPr>
-              <a:t> </a:t>
-            </a:r>
-            <a:r>
-              <a:rPr lang="en-US" sz="1200" dirty="0" err="1">
-                <a:solidFill>
-                  <a:srgbClr val="002060"/>
-                </a:solidFill>
-                <a:latin typeface="Century Gothic" panose="020B0502020202020204" pitchFamily="34" charset="0"/>
-                <a:cs typeface="Calibri"/>
-              </a:rPr>
-              <a:t>s.bolatkyzy</a:t>
-            </a:r>
-            <a:r>
-              <a:rPr lang="de-DE" sz="1200" noProof="0" dirty="0">
-                <a:solidFill>
-                  <a:srgbClr val="002060"/>
-                </a:solidFill>
-                <a:latin typeface="Century Gothic" panose="020B0502020202020204" pitchFamily="34" charset="0"/>
-                <a:cs typeface="Calibri"/>
-                <a:hlinkClick r:id="rId3"/>
-              </a:rPr>
-              <a:t>@satbayev.university</a:t>
-            </a:r>
-            <a:r>
-              <a:rPr lang="ru-RU" sz="1200" noProof="0" dirty="0">
-                <a:solidFill>
-                  <a:srgbClr val="002060"/>
-                </a:solidFill>
-                <a:latin typeface="Century Gothic" panose="020B0502020202020204" pitchFamily="34" charset="0"/>
-                <a:cs typeface="Calibri"/>
-              </a:rPr>
-              <a:t> </a:t>
-            </a:r>
-          </a:p>
-          <a:p>
-            <a:pPr marL="12700" indent="349250" algn="just">
-              <a:spcBef>
-                <a:spcPts val="455"/>
-              </a:spcBef>
-            </a:pPr>
-            <a:r>
-              <a:rPr lang="ru-RU" sz="1200" noProof="0" dirty="0">
-                <a:solidFill>
-                  <a:srgbClr val="002060"/>
-                </a:solidFill>
-                <a:latin typeface="Century Gothic" panose="020B0502020202020204" pitchFamily="34" charset="0"/>
-                <a:cs typeface="Calibri"/>
-              </a:rPr>
-              <a:t>Ваши</a:t>
-            </a:r>
-            <a:r>
-              <a:rPr lang="ru-RU" sz="1200" spc="-5" noProof="0" dirty="0">
-                <a:solidFill>
-                  <a:srgbClr val="002060"/>
-                </a:solidFill>
-                <a:latin typeface="Century Gothic" panose="020B0502020202020204" pitchFamily="34" charset="0"/>
-                <a:cs typeface="Calibri"/>
-              </a:rPr>
-              <a:t> </a:t>
-            </a:r>
-            <a:r>
-              <a:rPr lang="ru-RU" sz="1200" noProof="0" dirty="0">
-                <a:solidFill>
-                  <a:srgbClr val="002060"/>
-                </a:solidFill>
-                <a:latin typeface="Century Gothic" panose="020B0502020202020204" pitchFamily="34" charset="0"/>
-                <a:cs typeface="Calibri"/>
-              </a:rPr>
-              <a:t>вопросы</a:t>
-            </a:r>
-            <a:r>
-              <a:rPr lang="ru-RU" sz="1200" spc="-5" noProof="0" dirty="0">
-                <a:solidFill>
-                  <a:srgbClr val="002060"/>
-                </a:solidFill>
-                <a:latin typeface="Century Gothic" panose="020B0502020202020204" pitchFamily="34" charset="0"/>
-                <a:cs typeface="Calibri"/>
-              </a:rPr>
-              <a:t> </a:t>
-            </a:r>
-            <a:r>
-              <a:rPr lang="ru-RU" sz="1200" noProof="0" dirty="0">
-                <a:solidFill>
-                  <a:srgbClr val="002060"/>
-                </a:solidFill>
-                <a:latin typeface="Century Gothic" panose="020B0502020202020204" pitchFamily="34" charset="0"/>
-                <a:cs typeface="Calibri"/>
-              </a:rPr>
-              <a:t>для</a:t>
-            </a:r>
-            <a:r>
-              <a:rPr lang="ru-RU" sz="1200" spc="-15" noProof="0" dirty="0">
-                <a:solidFill>
-                  <a:srgbClr val="002060"/>
-                </a:solidFill>
-                <a:latin typeface="Century Gothic" panose="020B0502020202020204" pitchFamily="34" charset="0"/>
-                <a:cs typeface="Calibri"/>
-              </a:rPr>
-              <a:t> </a:t>
-            </a:r>
-            <a:r>
-              <a:rPr lang="ru-RU" sz="1200" spc="-10" noProof="0" dirty="0">
-                <a:solidFill>
-                  <a:srgbClr val="002060"/>
-                </a:solidFill>
-                <a:latin typeface="Century Gothic" panose="020B0502020202020204" pitchFamily="34" charset="0"/>
-                <a:cs typeface="Calibri"/>
-              </a:rPr>
-              <a:t>открытой </a:t>
-            </a:r>
-            <a:r>
-              <a:rPr lang="ru-RU" sz="1200" noProof="0" dirty="0">
-                <a:solidFill>
-                  <a:srgbClr val="002060"/>
-                </a:solidFill>
-                <a:latin typeface="Century Gothic" panose="020B0502020202020204" pitchFamily="34" charset="0"/>
-                <a:cs typeface="Calibri"/>
-              </a:rPr>
-              <a:t>дискуссии</a:t>
-            </a:r>
-            <a:r>
-              <a:rPr lang="ru-RU" sz="1200" spc="-5" noProof="0" dirty="0">
-                <a:solidFill>
-                  <a:srgbClr val="002060"/>
-                </a:solidFill>
-                <a:latin typeface="Century Gothic" panose="020B0502020202020204" pitchFamily="34" charset="0"/>
-                <a:cs typeface="Calibri"/>
-              </a:rPr>
-              <a:t> </a:t>
-            </a:r>
-            <a:r>
-              <a:rPr lang="ru-RU" sz="1200" noProof="0" dirty="0">
-                <a:solidFill>
-                  <a:srgbClr val="002060"/>
-                </a:solidFill>
-                <a:latin typeface="Century Gothic" panose="020B0502020202020204" pitchFamily="34" charset="0"/>
-                <a:cs typeface="Calibri"/>
-              </a:rPr>
-              <a:t>Вы</a:t>
-            </a:r>
-            <a:r>
-              <a:rPr lang="ru-RU" sz="1200" spc="-10" noProof="0" dirty="0">
-                <a:solidFill>
-                  <a:srgbClr val="002060"/>
-                </a:solidFill>
-                <a:latin typeface="Century Gothic" panose="020B0502020202020204" pitchFamily="34" charset="0"/>
-                <a:cs typeface="Calibri"/>
-              </a:rPr>
-              <a:t> </a:t>
-            </a:r>
-            <a:r>
-              <a:rPr lang="ru-RU" sz="1200" noProof="0" dirty="0">
-                <a:solidFill>
-                  <a:srgbClr val="002060"/>
-                </a:solidFill>
-                <a:latin typeface="Century Gothic" panose="020B0502020202020204" pitchFamily="34" charset="0"/>
-                <a:cs typeface="Calibri"/>
-              </a:rPr>
-              <a:t>можете</a:t>
-            </a:r>
-            <a:r>
-              <a:rPr lang="ru-RU" sz="1200" spc="-5" noProof="0" dirty="0">
-                <a:solidFill>
-                  <a:srgbClr val="002060"/>
-                </a:solidFill>
-                <a:latin typeface="Century Gothic" panose="020B0502020202020204" pitchFamily="34" charset="0"/>
-                <a:cs typeface="Calibri"/>
-              </a:rPr>
-              <a:t> </a:t>
-            </a:r>
-            <a:r>
-              <a:rPr lang="ru-RU" sz="1200" noProof="0" dirty="0">
-                <a:solidFill>
-                  <a:srgbClr val="002060"/>
-                </a:solidFill>
-                <a:latin typeface="Century Gothic" panose="020B0502020202020204" pitchFamily="34" charset="0"/>
-                <a:cs typeface="Calibri"/>
-              </a:rPr>
-              <a:t>направить</a:t>
-            </a:r>
-            <a:r>
-              <a:rPr lang="ru-RU" sz="1200" spc="-10" noProof="0" dirty="0">
-                <a:solidFill>
-                  <a:srgbClr val="002060"/>
-                </a:solidFill>
-                <a:latin typeface="Century Gothic" panose="020B0502020202020204" pitchFamily="34" charset="0"/>
-                <a:cs typeface="Calibri"/>
-              </a:rPr>
-              <a:t> </a:t>
-            </a:r>
-            <a:r>
-              <a:rPr lang="ru-RU" sz="1200" noProof="0" dirty="0">
-                <a:solidFill>
-                  <a:srgbClr val="002060"/>
-                </a:solidFill>
-                <a:latin typeface="Century Gothic" panose="020B0502020202020204" pitchFamily="34" charset="0"/>
-                <a:cs typeface="Calibri"/>
-              </a:rPr>
-              <a:t>нам заранее</a:t>
-            </a:r>
-          </a:p>
-          <a:p>
-            <a:pPr marL="12700" indent="349250" algn="just">
-              <a:spcBef>
-                <a:spcPts val="455"/>
-              </a:spcBef>
-            </a:pPr>
-            <a:r>
-              <a:rPr lang="ru-RU" sz="1200" noProof="0" dirty="0">
-                <a:solidFill>
-                  <a:srgbClr val="002060"/>
-                </a:solidFill>
-                <a:latin typeface="Century Gothic" panose="020B0502020202020204" pitchFamily="34" charset="0"/>
-                <a:cs typeface="Calibri"/>
-              </a:rPr>
-              <a:t>по адресу</a:t>
-            </a:r>
-            <a:r>
-              <a:rPr lang="ru-RU" sz="1200" spc="5" noProof="0" dirty="0">
-                <a:solidFill>
-                  <a:srgbClr val="002060"/>
-                </a:solidFill>
-                <a:latin typeface="Century Gothic" panose="020B0502020202020204" pitchFamily="34" charset="0"/>
-                <a:cs typeface="Calibri"/>
-              </a:rPr>
-              <a:t> </a:t>
-            </a:r>
-            <a:r>
-              <a:rPr lang="ru-RU" sz="1200" u="sng" spc="-10" noProof="0" dirty="0">
-                <a:solidFill>
-                  <a:srgbClr val="002060"/>
-                </a:solidFill>
-                <a:uFill>
-                  <a:solidFill>
-                    <a:srgbClr val="0000FF"/>
-                  </a:solidFill>
-                </a:uFill>
-                <a:latin typeface="Century Gothic" panose="020B0502020202020204" pitchFamily="34" charset="0"/>
-                <a:cs typeface="Calibri"/>
-                <a:hlinkClick r:id="rId4">
+              <a:t>Для получения дополнительной информации Вы можете обращаться по следующим контактам: </a:t>
+            </a:r>
+            <a:r>
+              <a:rPr lang="de-DE" sz="1200" spc="-10" dirty="0" err="1">
+                <a:solidFill>
+                  <a:schemeClr val="accent1"/>
+                </a:solidFill>
+                <a:latin typeface="Century Gothic" panose="020B0502020202020204" pitchFamily="34" charset="0"/>
+                <a:ea typeface="Roboto" panose="02000000000000000000" pitchFamily="2" charset="0"/>
+                <a:cs typeface="Roboto" panose="02000000000000000000" pitchFamily="2" charset="0"/>
+                <a:hlinkClick r:id="rId3">
                   <a:extLst>
                     <a:ext uri="{A12FA001-AC4F-418D-AE19-62706E023703}">
                       <ahyp:hlinkClr xmlns:ahyp="http://schemas.microsoft.com/office/drawing/2018/hyperlinkcolor" val="tx"/>
@@ -4817,6 +4544,243 @@
                   </a:extLst>
                 </a:hlinkClick>
               </a:rPr>
+              <a:t>s.bolatkyzy</a:t>
+            </a:r>
+            <a:r>
+              <a:rPr lang="de-DE" sz="1200" noProof="0" dirty="0">
+                <a:solidFill>
+                  <a:srgbClr val="002060"/>
+                </a:solidFill>
+                <a:latin typeface="Century Gothic" panose="020B0502020202020204" pitchFamily="34" charset="0"/>
+                <a:cs typeface="Calibri"/>
+                <a:hlinkClick r:id="rId4"/>
+              </a:rPr>
+              <a:t>@satbayev.university</a:t>
+            </a:r>
+            <a:r>
+              <a:rPr lang="ru-RU" sz="1200" noProof="0" dirty="0">
+                <a:solidFill>
+                  <a:srgbClr val="002060"/>
+                </a:solidFill>
+                <a:latin typeface="Century Gothic" panose="020B0502020202020204" pitchFamily="34" charset="0"/>
+                <a:cs typeface="Calibri"/>
+              </a:rPr>
+              <a:t> </a:t>
+            </a:r>
+          </a:p>
+          <a:p>
+            <a:pPr marL="12700" indent="349250" algn="just">
+              <a:spcBef>
+                <a:spcPts val="455"/>
+              </a:spcBef>
+            </a:pPr>
+            <a:r>
+              <a:rPr lang="ru-RU" sz="1200" noProof="0" dirty="0">
+                <a:solidFill>
+                  <a:srgbClr val="002060"/>
+                </a:solidFill>
+                <a:latin typeface="Century Gothic" panose="020B0502020202020204" pitchFamily="34" charset="0"/>
+                <a:cs typeface="Calibri"/>
+              </a:rPr>
+              <a:t>Ваши</a:t>
+            </a:r>
+            <a:r>
+              <a:rPr lang="ru-RU" sz="1200" spc="-5" noProof="0" dirty="0">
+                <a:solidFill>
+                  <a:srgbClr val="002060"/>
+                </a:solidFill>
+                <a:latin typeface="Century Gothic" panose="020B0502020202020204" pitchFamily="34" charset="0"/>
+                <a:cs typeface="Calibri"/>
+              </a:rPr>
+              <a:t> </a:t>
+            </a:r>
+            <a:r>
+              <a:rPr lang="ru-RU" sz="1200" noProof="0" dirty="0">
+                <a:solidFill>
+                  <a:srgbClr val="002060"/>
+                </a:solidFill>
+                <a:latin typeface="Century Gothic" panose="020B0502020202020204" pitchFamily="34" charset="0"/>
+                <a:cs typeface="Calibri"/>
+              </a:rPr>
+              <a:t>вопросы</a:t>
+            </a:r>
+            <a:r>
+              <a:rPr lang="ru-RU" sz="1200" spc="-5" noProof="0" dirty="0">
+                <a:solidFill>
+                  <a:srgbClr val="002060"/>
+                </a:solidFill>
+                <a:latin typeface="Century Gothic" panose="020B0502020202020204" pitchFamily="34" charset="0"/>
+                <a:cs typeface="Calibri"/>
+              </a:rPr>
+              <a:t> </a:t>
+            </a:r>
+            <a:r>
+              <a:rPr lang="ru-RU" sz="1200" noProof="0" dirty="0">
+                <a:solidFill>
+                  <a:srgbClr val="002060"/>
+                </a:solidFill>
+                <a:latin typeface="Century Gothic" panose="020B0502020202020204" pitchFamily="34" charset="0"/>
+                <a:cs typeface="Calibri"/>
+              </a:rPr>
+              <a:t>для</a:t>
+            </a:r>
+            <a:r>
+              <a:rPr lang="ru-RU" sz="1200" spc="-15" noProof="0" dirty="0">
+                <a:solidFill>
+                  <a:srgbClr val="002060"/>
+                </a:solidFill>
+                <a:latin typeface="Century Gothic" panose="020B0502020202020204" pitchFamily="34" charset="0"/>
+                <a:cs typeface="Calibri"/>
+              </a:rPr>
+              <a:t> </a:t>
+            </a:r>
+            <a:r>
+              <a:rPr lang="ru-RU" sz="1200" spc="-10" noProof="0" dirty="0">
+                <a:solidFill>
+                  <a:srgbClr val="002060"/>
+                </a:solidFill>
+                <a:latin typeface="Century Gothic" panose="020B0502020202020204" pitchFamily="34" charset="0"/>
+                <a:cs typeface="Calibri"/>
+              </a:rPr>
+              <a:t>открытой </a:t>
+            </a:r>
+            <a:r>
+              <a:rPr lang="ru-RU" sz="1200" noProof="0" dirty="0">
+                <a:solidFill>
+                  <a:srgbClr val="002060"/>
+                </a:solidFill>
+                <a:latin typeface="Century Gothic" panose="020B0502020202020204" pitchFamily="34" charset="0"/>
+                <a:cs typeface="Calibri"/>
+              </a:rPr>
+              <a:t>дискуссии</a:t>
+            </a:r>
+            <a:r>
+              <a:rPr lang="ru-RU" sz="1200" spc="-5" noProof="0" dirty="0">
+                <a:solidFill>
+                  <a:srgbClr val="002060"/>
+                </a:solidFill>
+                <a:latin typeface="Century Gothic" panose="020B0502020202020204" pitchFamily="34" charset="0"/>
+                <a:cs typeface="Calibri"/>
+              </a:rPr>
+              <a:t> </a:t>
+            </a:r>
+            <a:r>
+              <a:rPr lang="ru-RU" sz="1200" noProof="0" dirty="0">
+                <a:solidFill>
+                  <a:srgbClr val="002060"/>
+                </a:solidFill>
+                <a:latin typeface="Century Gothic" panose="020B0502020202020204" pitchFamily="34" charset="0"/>
+                <a:cs typeface="Calibri"/>
+              </a:rPr>
+              <a:t>Вы</a:t>
+            </a:r>
+            <a:r>
+              <a:rPr lang="ru-RU" sz="1200" spc="-10" noProof="0" dirty="0">
+                <a:solidFill>
+                  <a:srgbClr val="002060"/>
+                </a:solidFill>
+                <a:latin typeface="Century Gothic" panose="020B0502020202020204" pitchFamily="34" charset="0"/>
+                <a:cs typeface="Calibri"/>
+              </a:rPr>
+              <a:t> </a:t>
+            </a:r>
+            <a:r>
+              <a:rPr lang="ru-RU" sz="1200" noProof="0" dirty="0">
+                <a:solidFill>
+                  <a:srgbClr val="002060"/>
+                </a:solidFill>
+                <a:latin typeface="Century Gothic" panose="020B0502020202020204" pitchFamily="34" charset="0"/>
+                <a:cs typeface="Calibri"/>
+              </a:rPr>
+              <a:t>можете</a:t>
+            </a:r>
+            <a:r>
+              <a:rPr lang="ru-RU" sz="1200" spc="-5" noProof="0" dirty="0">
+                <a:solidFill>
+                  <a:srgbClr val="002060"/>
+                </a:solidFill>
+                <a:latin typeface="Century Gothic" panose="020B0502020202020204" pitchFamily="34" charset="0"/>
+                <a:cs typeface="Calibri"/>
+              </a:rPr>
+              <a:t> </a:t>
+            </a:r>
+            <a:r>
+              <a:rPr lang="ru-RU" sz="1200" noProof="0" dirty="0">
+                <a:solidFill>
+                  <a:srgbClr val="002060"/>
+                </a:solidFill>
+                <a:latin typeface="Century Gothic" panose="020B0502020202020204" pitchFamily="34" charset="0"/>
+                <a:cs typeface="Calibri"/>
+              </a:rPr>
+              <a:t>направить</a:t>
+            </a:r>
+            <a:r>
+              <a:rPr lang="ru-RU" sz="1200" spc="-10" noProof="0" dirty="0">
+                <a:solidFill>
+                  <a:srgbClr val="002060"/>
+                </a:solidFill>
+                <a:latin typeface="Century Gothic" panose="020B0502020202020204" pitchFamily="34" charset="0"/>
+                <a:cs typeface="Calibri"/>
+              </a:rPr>
+              <a:t> </a:t>
+            </a:r>
+            <a:r>
+              <a:rPr lang="ru-RU" sz="1200" noProof="0" dirty="0">
+                <a:solidFill>
+                  <a:srgbClr val="002060"/>
+                </a:solidFill>
+                <a:latin typeface="Century Gothic" panose="020B0502020202020204" pitchFamily="34" charset="0"/>
+                <a:cs typeface="Calibri"/>
+              </a:rPr>
+              <a:t>нам заранее</a:t>
+            </a:r>
+          </a:p>
+          <a:p>
+            <a:pPr marL="12700" indent="349250" algn="just">
+              <a:spcBef>
+                <a:spcPts val="455"/>
+              </a:spcBef>
+            </a:pPr>
+            <a:r>
+              <a:rPr lang="ru-RU" sz="1200" noProof="0" dirty="0">
+                <a:solidFill>
+                  <a:srgbClr val="002060"/>
+                </a:solidFill>
+                <a:latin typeface="Century Gothic" panose="020B0502020202020204" pitchFamily="34" charset="0"/>
+                <a:cs typeface="Calibri"/>
+              </a:rPr>
+              <a:t>по адресу</a:t>
+            </a:r>
+            <a:r>
+              <a:rPr lang="ru-RU" sz="1200" spc="5" noProof="0" dirty="0">
+                <a:solidFill>
+                  <a:srgbClr val="002060"/>
+                </a:solidFill>
+                <a:latin typeface="Century Gothic" panose="020B0502020202020204" pitchFamily="34" charset="0"/>
+                <a:cs typeface="Calibri"/>
+              </a:rPr>
+              <a:t> </a:t>
+            </a:r>
+            <a:r>
+              <a:rPr lang="ru-RU" sz="1200" u="sng" spc="-10" noProof="0" dirty="0">
+                <a:solidFill>
+                  <a:srgbClr val="002060"/>
+                </a:solidFill>
+                <a:uFill>
+                  <a:solidFill>
+                    <a:srgbClr val="0000FF"/>
+                  </a:solidFill>
+                </a:uFill>
+                <a:latin typeface="Century Gothic" panose="020B0502020202020204" pitchFamily="34" charset="0"/>
+                <a:cs typeface="Calibri"/>
+                <a:hlinkClick r:id="rId5">
+                  <a:extLst>
+                    <a:ext uri="{A12FA001-AC4F-418D-AE19-62706E023703}">
+                      <ahyp:hlinkClr xmlns:ahyp="http://schemas.microsoft.com/office/drawing/2018/hyperlinkcolor" val="tx"/>
+                    </a:ext>
+                  </a:extLst>
+                </a:hlinkClick>
+              </a:rPr>
               <a:t>info@logistics-alliance-germany.de</a:t>
             </a:r>
             <a:r>
@@ -4826,7 +4790,7 @@
                 </a:solidFill>
                 <a:latin typeface="Century Gothic" panose="020B0502020202020204" pitchFamily="34" charset="0"/>
                 <a:cs typeface="Calibri"/>
-                <a:hlinkClick r:id="rId4">
+                <a:hlinkClick r:id="rId5">
                   <a:extLst>
                     <a:ext uri="{A12FA001-AC4F-418D-AE19-62706E023703}">
                       <ahyp:hlinkClr xmlns:ahyp="http://schemas.microsoft.com/office/drawing/2018/hyperlinkcolor" val="tx"/>
@@ -4856,7 +4820,7 @@
                 <a:spcPts val="455"/>
               </a:spcBef>
             </a:pPr>
-            <a:endParaRPr lang="ru-RU" sz="1200" noProof="0" dirty="0">
+            <a:endParaRPr lang="ru-RU" sz="600" noProof="0" dirty="0">
               <a:solidFill>
                 <a:srgbClr val="002060"/>
               </a:solidFill>
@@ -5004,17 +4968,7 @@
               </a:rPr>
               <a:t> University</a:t>
             </a:r>
-          </a:p>
-          <a:p>
-            <a:pPr marL="12700" indent="349250" algn="just">
-              <a:lnSpc>
-                <a:spcPct val="100000"/>
-              </a:lnSpc>
-              <a:spcBef>
-                <a:spcPts val="625"/>
-              </a:spcBef>
-            </a:pPr>
-            <a:endParaRPr lang="ru-RU" sz="1200" b="1" spc="-20" dirty="0">
+            <a:endParaRPr lang="ru-RU" sz="1200" b="1" i="1" spc="-20" dirty="0">
               <a:solidFill>
                 <a:srgbClr val="002060"/>
               </a:solidFill>
@@ -5024,31 +4978,11 @@
           </a:p>
           <a:p>
             <a:pPr marL="12700" indent="349250" algn="just">
-              <a:lnSpc>
-                <a:spcPct val="100000"/>
-              </a:lnSpc>
-              <a:spcBef>
-                <a:spcPts val="625"/>
-              </a:spcBef>
-            </a:pPr>
-            <a:r>
-              <a:rPr lang="ru-RU" sz="1200" b="1" i="1" spc="-20" dirty="0">
-                <a:solidFill>
-                  <a:srgbClr val="002060"/>
-                </a:solidFill>
-                <a:latin typeface="Century Gothic" panose="020B0502020202020204" pitchFamily="34" charset="0"/>
-                <a:cs typeface="Calibri"/>
-              </a:rPr>
-              <a:t>и</a:t>
-            </a:r>
-          </a:p>
-          <a:p>
-            <a:pPr marL="12700" indent="349250" algn="just">
               <a:spcBef>
                 <a:spcPts val="710"/>
               </a:spcBef>
             </a:pPr>
-            <a:endParaRPr lang="ru-RU" sz="1200" b="1" spc="-10" noProof="0" dirty="0">
+            <a:endParaRPr lang="ru-RU" sz="200" b="1" spc="-10" noProof="0" dirty="0">
               <a:solidFill>
                 <a:srgbClr val="002060"/>
               </a:solidFill>
@@ -5169,10 +5103,10 @@
                 <a:latin typeface="Century Gothic" panose="020B0502020202020204" pitchFamily="34" charset="0"/>
                 <a:cs typeface="Calibri"/>
               </a:rPr>
-              <a:t> </a:t>
-            </a:r>
-            <a:r>
-              <a:rPr lang="en-US" sz="1200" b="1" spc="-10" noProof="0" dirty="0" err="1">
+              <a:t> Logistik (BVL), </a:t>
+            </a:r>
+            <a:r>
+              <a:rPr lang="ru-RU" sz="1200" b="1" spc="-10" noProof="0" dirty="0">
                 <a:solidFill>
                   <a:srgbClr val="002060"/>
                 </a:solidFill>
@@ -5184,39 +5118,122 @@
                 <a:latin typeface="Century Gothic" panose="020B0502020202020204" pitchFamily="34" charset="0"/>
                 <a:cs typeface="Calibri"/>
               </a:rPr>
-              <a:t>Logistik</a:t>
-            </a:r>
-            <a:r>
-              <a:rPr lang="en-US" sz="1200" b="1" spc="-10" noProof="0" dirty="0">
-                <a:solidFill>
-                  <a:srgbClr val="002060"/>
-                </a:solidFill>
-                <a:uFill>
-                  <a:solidFill>
-                    <a:srgbClr val="39A0D2"/>
-                  </a:solidFill>
-                </a:uFill>
-                <a:latin typeface="Century Gothic" panose="020B0502020202020204" pitchFamily="34" charset="0"/>
-                <a:cs typeface="Calibri"/>
-              </a:rPr>
-              <a:t> (BVL), </a:t>
-            </a:r>
-            <a:r>
-              <a:rPr lang="ru-RU" sz="1200" b="1" spc="-10" noProof="0" dirty="0">
-                <a:solidFill>
-                  <a:srgbClr val="002060"/>
-                </a:solidFill>
-                <a:uFill>
-                  <a:solidFill>
-                    <a:srgbClr val="39A0D2"/>
-                  </a:solidFill>
-                </a:uFill>
-                <a:latin typeface="Century Gothic" panose="020B0502020202020204" pitchFamily="34" charset="0"/>
-                <a:cs typeface="Calibri"/>
-              </a:rPr>
               <a:t>Германия</a:t>
             </a:r>
-            <a:endParaRPr lang="ru-RU" sz="1200" spc="-20" noProof="0" dirty="0">
+            <a:endParaRPr lang="de-DE" sz="1200" b="1" spc="-10" noProof="0" dirty="0">
+              <a:solidFill>
+                <a:srgbClr val="002060"/>
+              </a:solidFill>
+              <a:uFill>
+                <a:solidFill>
+                  <a:srgbClr val="39A0D2"/>
+                </a:solidFill>
+              </a:uFill>
+              <a:latin typeface="Century Gothic" panose="020B0502020202020204" pitchFamily="34" charset="0"/>
+              <a:cs typeface="Calibri"/>
+            </a:endParaRPr>
+          </a:p>
+          <a:p>
+            <a:pPr marL="12700" indent="349250" algn="just">
+              <a:spcBef>
+                <a:spcPts val="710"/>
+              </a:spcBef>
+            </a:pPr>
+            <a:endParaRPr lang="de-DE" sz="200" b="1" spc="-10" noProof="0" dirty="0">
+              <a:solidFill>
+                <a:srgbClr val="002060"/>
+              </a:solidFill>
+              <a:uFill>
+                <a:solidFill>
+                  <a:srgbClr val="39A0D2"/>
+                </a:solidFill>
+              </a:uFill>
+              <a:latin typeface="Century Gothic" panose="020B0502020202020204" pitchFamily="34" charset="0"/>
+              <a:cs typeface="Calibri"/>
+            </a:endParaRPr>
+          </a:p>
+          <a:p>
+            <a:pPr marL="12700" indent="349250" algn="just">
+              <a:spcBef>
+                <a:spcPts val="710"/>
+              </a:spcBef>
+            </a:pPr>
+            <a:r>
+              <a:rPr lang="de-DE" sz="1200" b="1" dirty="0">
+                <a:solidFill>
+                  <a:srgbClr val="002060"/>
+                </a:solidFill>
+                <a:latin typeface="Century Gothic" panose="020B0502020202020204" pitchFamily="34" charset="0"/>
+                <a:cs typeface="Calibri"/>
+              </a:rPr>
+              <a:t>Judith Blank</a:t>
+            </a:r>
+            <a:r>
+              <a:rPr lang="ru-RU" sz="1200" b="1" dirty="0">
+                <a:solidFill>
+                  <a:srgbClr val="002060"/>
+                </a:solidFill>
+                <a:latin typeface="Century Gothic" panose="020B0502020202020204" pitchFamily="34" charset="0"/>
+                <a:cs typeface="Calibri"/>
+              </a:rPr>
+              <a:t>, </a:t>
+            </a:r>
+            <a:endParaRPr lang="de-DE" sz="1200" b="1" dirty="0">
+              <a:solidFill>
+                <a:srgbClr val="002060"/>
+              </a:solidFill>
+              <a:latin typeface="Century Gothic" panose="020B0502020202020204" pitchFamily="34" charset="0"/>
+              <a:cs typeface="Calibri"/>
+            </a:endParaRPr>
+          </a:p>
+          <a:p>
+            <a:pPr marL="12700" indent="349250" algn="just">
+              <a:spcBef>
+                <a:spcPts val="710"/>
+              </a:spcBef>
+            </a:pPr>
+            <a:r>
+              <a:rPr lang="ru-RU" sz="1200" b="1" dirty="0">
+                <a:solidFill>
+                  <a:srgbClr val="002060"/>
+                </a:solidFill>
+                <a:latin typeface="Century Gothic" panose="020B0502020202020204" pitchFamily="34" charset="0"/>
+                <a:cs typeface="Calibri"/>
+              </a:rPr>
+              <a:t>Руководитель проекта, Региональная программа содействия торговле в </a:t>
+            </a:r>
+            <a:endParaRPr lang="de-DE" sz="1200" b="1" dirty="0">
+              <a:solidFill>
+                <a:srgbClr val="002060"/>
+              </a:solidFill>
+              <a:latin typeface="Century Gothic" panose="020B0502020202020204" pitchFamily="34" charset="0"/>
+              <a:cs typeface="Calibri"/>
+            </a:endParaRPr>
+          </a:p>
+          <a:p>
+            <a:pPr marL="12700" indent="349250" algn="just">
+              <a:spcBef>
+                <a:spcPts val="710"/>
+              </a:spcBef>
+            </a:pPr>
+            <a:r>
+              <a:rPr lang="ru-RU" sz="1200" b="1" dirty="0">
+                <a:solidFill>
+                  <a:srgbClr val="002060"/>
+                </a:solidFill>
+                <a:latin typeface="Century Gothic" panose="020B0502020202020204" pitchFamily="34" charset="0"/>
+                <a:cs typeface="Calibri"/>
+              </a:rPr>
+              <a:t>Центральной Азии/Программа развития потенциала TCTC, GIZ Центральная Азия</a:t>
+            </a:r>
+          </a:p>
+          <a:p>
+            <a:pPr marL="12700" indent="349250" algn="just">
+              <a:spcBef>
+                <a:spcPts val="710"/>
+              </a:spcBef>
+            </a:pPr>
+            <a:endParaRPr lang="ru-RU" sz="200" spc="-20" noProof="0" dirty="0">
               <a:solidFill>
                 <a:srgbClr val="002060"/>
               </a:solidFill>
@@ -5241,7 +5258,7 @@
           <p:nvPr/>
         </p:nvPicPr>
         <p:blipFill>
-          <a:blip r:embed="rId5" cstate="print">
+          <a:blip r:embed="rId6" cstate="print">
             <a:extLst>
               <a:ext uri="{28A0092B-C50C-407E-A947-70E740481C1C}">
                 <a14:useLocalDpi xmlns:a14="http://schemas.microsoft.com/office/drawing/2010/main" val="0"/>
@@ -5256,6 +5273,42 @@
           <a:xfrm>
             <a:off x="356595" y="310292"/>
             <a:ext cx="1197622" cy="564179"/>
+          </a:xfrm>
+          <a:prstGeom prst="rect">
+            <a:avLst/>
+          </a:prstGeom>
+        </p:spPr>
+      </p:pic>
+      <p:pic>
+        <p:nvPicPr>
+          <p:cNvPr id="4" name="Picture 14">
+            <a:extLst>
+              <a:ext uri="{FF2B5EF4-FFF2-40B4-BE49-F238E27FC236}">
+                <a16:creationId xmlns:a16="http://schemas.microsoft.com/office/drawing/2014/main" id="{B7084795-A430-5D6D-B787-A1147DD6174E}"/>
+              </a:ext>
+            </a:extLst>
+          </p:cNvPr>
+          <p:cNvPicPr>
+            <a:picLocks noChangeAspect="1"/>
+          </p:cNvPicPr>
+          <p:nvPr/>
+        </p:nvPicPr>
+        <p:blipFill>
+          <a:blip r:embed="rId7" cstate="print">
+            <a:extLst>
+              <a:ext uri="{28A0092B-C50C-407E-A947-70E740481C1C}">
+                <a14:useLocalDpi xmlns:a14="http://schemas.microsoft.com/office/drawing/2010/main" val="0"/>
+              </a:ext>
+            </a:extLst>
+          </a:blip>
+          <a:stretch>
+            <a:fillRect/>
+          </a:stretch>
+        </p:blipFill>
+        <p:spPr>
+          <a:xfrm>
+            <a:off x="1891699" y="160331"/>
+            <a:ext cx="2527794" cy="928692"/>
           </a:xfrm>
           <a:prstGeom prst="rect">
             <a:avLst/>
@@ -5360,7 +5413,7 @@
         <p:spPr>
           <a:xfrm>
             <a:off x="595086" y="1202505"/>
-            <a:ext cx="6502400" cy="8871852"/>
+            <a:ext cx="6502400" cy="9041129"/>
           </a:xfrm>
           <a:prstGeom prst="rect">
             <a:avLst/>
@@ -5862,6 +5915,45 @@
               </a:rPr>
               <a:t>региональный директор GIZ по Центральной Азии</a:t>
             </a:r>
+            <a:r>
+              <a:rPr kumimoji="0" lang="de-DE" altLang="ru-RU" sz="1100" i="0" u="none" strike="noStrike" cap="none" normalizeH="0" baseline="0" dirty="0">
+                <a:ln>
+                  <a:noFill/>
+                </a:ln>
+                <a:solidFill>
+                  <a:srgbClr val="002060"/>
+                </a:solidFill>
+                <a:effectLst/>
+                <a:latin typeface="Century Gothic" panose="020B0502020202020204" pitchFamily="34" charset="0"/>
+              </a:rPr>
+              <a:t> (</a:t>
+            </a:r>
+            <a:r>
+              <a:rPr kumimoji="0" lang="de-DE" altLang="ru-RU" sz="1100" i="0" u="none" strike="noStrike" cap="none" normalizeH="0" baseline="0" dirty="0" err="1">
+                <a:ln>
+                  <a:noFill/>
+                </a:ln>
+                <a:solidFill>
+                  <a:srgbClr val="002060"/>
+                </a:solidFill>
+                <a:effectLst/>
+                <a:latin typeface="Century Gothic" panose="020B0502020202020204" pitchFamily="34" charset="0"/>
+              </a:rPr>
+              <a:t>tbc</a:t>
+            </a:r>
+            <a:r>
+              <a:rPr kumimoji="0" lang="de-DE" altLang="ru-RU" sz="1100" i="0" u="none" strike="noStrike" cap="none" normalizeH="0" baseline="0" dirty="0">
+                <a:ln>
+                  <a:noFill/>
+                </a:ln>
+                <a:solidFill>
+                  <a:srgbClr val="002060"/>
+                </a:solidFill>
+                <a:effectLst/>
+                <a:latin typeface="Century Gothic" panose="020B0502020202020204" pitchFamily="34" charset="0"/>
+              </a:rPr>
+              <a:t>)</a:t>
+            </a:r>
             <a:endParaRPr sz="1100" dirty="0">
               <a:solidFill>
                 <a:srgbClr val="002060"/>
@@ -6311,17 +6403,117 @@
                 <a:latin typeface="Century Gothic" panose="020B0502020202020204" pitchFamily="34" charset="0"/>
                 <a:cs typeface="Calibri"/>
               </a:rPr>
-              <a:t>Представители казахстанских и немецких компаний </a:t>
-            </a:r>
-            <a:r>
-              <a:rPr lang="ru-RU" sz="1100">
-                <a:solidFill>
-                  <a:srgbClr val="002060"/>
-                </a:solidFill>
-                <a:latin typeface="Century Gothic" panose="020B0502020202020204" pitchFamily="34" charset="0"/>
-                <a:cs typeface="Calibri"/>
-              </a:rPr>
-              <a:t>и учреждений</a:t>
+              <a:t>Представители казахстанских и немецких компаний и учреждений (Казахстан Темир Жолы, ​​</a:t>
+            </a:r>
+            <a:r>
+              <a:rPr lang="ru-RU" sz="1100" dirty="0" err="1">
+                <a:solidFill>
+                  <a:srgbClr val="002060"/>
+                </a:solidFill>
+                <a:latin typeface="Century Gothic" panose="020B0502020202020204" pitchFamily="34" charset="0"/>
+                <a:cs typeface="Calibri"/>
+              </a:rPr>
+              <a:t>Eastcomtrans</a:t>
+            </a:r>
+            <a:r>
+              <a:rPr lang="ru-RU" sz="1100" dirty="0">
+                <a:solidFill>
+                  <a:srgbClr val="002060"/>
+                </a:solidFill>
+                <a:latin typeface="Century Gothic" panose="020B0502020202020204" pitchFamily="34" charset="0"/>
+                <a:cs typeface="Calibri"/>
+              </a:rPr>
+              <a:t>, </a:t>
+            </a:r>
+            <a:r>
+              <a:rPr lang="ru-RU" sz="1100" dirty="0" err="1">
+                <a:solidFill>
+                  <a:srgbClr val="002060"/>
+                </a:solidFill>
+                <a:latin typeface="Century Gothic" panose="020B0502020202020204" pitchFamily="34" charset="0"/>
+                <a:cs typeface="Calibri"/>
+              </a:rPr>
+              <a:t>AsstrA</a:t>
+            </a:r>
+            <a:r>
+              <a:rPr lang="ru-RU" sz="1100" dirty="0">
+                <a:solidFill>
+                  <a:srgbClr val="002060"/>
+                </a:solidFill>
+                <a:latin typeface="Century Gothic" panose="020B0502020202020204" pitchFamily="34" charset="0"/>
+                <a:cs typeface="Calibri"/>
+              </a:rPr>
+              <a:t>, </a:t>
+            </a:r>
+            <a:r>
+              <a:rPr lang="ru-RU" sz="1100" dirty="0" err="1">
+                <a:solidFill>
+                  <a:srgbClr val="002060"/>
+                </a:solidFill>
+                <a:latin typeface="Century Gothic" panose="020B0502020202020204" pitchFamily="34" charset="0"/>
+                <a:cs typeface="Calibri"/>
+              </a:rPr>
+              <a:t>Ge</a:t>
+            </a:r>
+            <a:r>
+              <a:rPr lang="de-DE" sz="1100" dirty="0">
+                <a:solidFill>
+                  <a:srgbClr val="002060"/>
+                </a:solidFill>
+                <a:latin typeface="Century Gothic" panose="020B0502020202020204" pitchFamily="34" charset="0"/>
+                <a:cs typeface="Calibri"/>
+              </a:rPr>
+              <a:t>b</a:t>
+            </a:r>
+            <a:r>
+              <a:rPr lang="ru-RU" sz="1100" dirty="0" err="1">
+                <a:solidFill>
+                  <a:srgbClr val="002060"/>
+                </a:solidFill>
+                <a:latin typeface="Century Gothic" panose="020B0502020202020204" pitchFamily="34" charset="0"/>
+                <a:cs typeface="Calibri"/>
+              </a:rPr>
+              <a:t>rueder</a:t>
+            </a:r>
+            <a:r>
+              <a:rPr lang="ru-RU" sz="1100" dirty="0">
+                <a:solidFill>
+                  <a:srgbClr val="002060"/>
+                </a:solidFill>
+                <a:latin typeface="Century Gothic" panose="020B0502020202020204" pitchFamily="34" charset="0"/>
+                <a:cs typeface="Calibri"/>
+              </a:rPr>
+              <a:t> </a:t>
+            </a:r>
+            <a:r>
+              <a:rPr lang="ru-RU" sz="1100" dirty="0" err="1">
+                <a:solidFill>
+                  <a:srgbClr val="002060"/>
+                </a:solidFill>
+                <a:latin typeface="Century Gothic" panose="020B0502020202020204" pitchFamily="34" charset="0"/>
+                <a:cs typeface="Calibri"/>
+              </a:rPr>
+              <a:t>Weiss</a:t>
+            </a:r>
+            <a:r>
+              <a:rPr lang="ru-RU" sz="1100" dirty="0">
+                <a:solidFill>
+                  <a:srgbClr val="002060"/>
+                </a:solidFill>
+                <a:latin typeface="Century Gothic" panose="020B0502020202020204" pitchFamily="34" charset="0"/>
+                <a:cs typeface="Calibri"/>
+              </a:rPr>
+              <a:t> и </a:t>
+            </a:r>
+            <a:r>
+              <a:rPr lang="ru-RU" sz="1100" dirty="0" err="1">
+                <a:solidFill>
+                  <a:srgbClr val="002060"/>
+                </a:solidFill>
+                <a:latin typeface="Century Gothic" panose="020B0502020202020204" pitchFamily="34" charset="0"/>
+                <a:cs typeface="Calibri"/>
+              </a:rPr>
+              <a:t>др</a:t>
             </a:r>
             <a:endParaRPr lang="ru-RU" sz="1100" dirty="0">
               <a:solidFill>
@@ -6501,7 +6693,7 @@
               <a:t> </a:t>
             </a:r>
             <a:r>
-              <a:rPr sz="1100" b="1" spc="-10" dirty="0">
+              <a:rPr sz="1100" b="1" spc="-10" dirty="0" err="1">
                 <a:solidFill>
                   <a:srgbClr val="002060"/>
                 </a:solidFill>
@@ -6521,7 +6713,7 @@
               <a:t> </a:t>
             </a:r>
             <a:r>
-              <a:rPr sz="1100" b="1" spc="-10" dirty="0">
+              <a:rPr sz="1100" b="1" spc="-10" dirty="0" err="1">
                 <a:solidFill>
                   <a:srgbClr val="002060"/>
                 </a:solidFill>
@@ -6582,42 +6774,17 @@
               <a:t> </a:t>
             </a:r>
             <a:r>
-              <a:rPr sz="1100" b="1" spc="-20" dirty="0" err="1">
-                <a:solidFill>
-                  <a:srgbClr val="002060"/>
-                </a:solidFill>
-                <a:latin typeface="Century Gothic" panose="020B0502020202020204" pitchFamily="34" charset="0"/>
-                <a:cs typeface="Calibri"/>
-              </a:rPr>
-              <a:t>прием</a:t>
-            </a:r>
-            <a:r>
-              <a:rPr lang="ru-RU" sz="1100" b="1" spc="-20" dirty="0">
-                <a:solidFill>
-                  <a:srgbClr val="002060"/>
-                </a:solidFill>
-                <a:latin typeface="Century Gothic" panose="020B0502020202020204" pitchFamily="34" charset="0"/>
-                <a:cs typeface="Calibri"/>
-              </a:rPr>
-              <a:t> </a:t>
-            </a:r>
-            <a:r>
-              <a:rPr lang="en-US" sz="1100" spc="-10" noProof="0" dirty="0">
-                <a:solidFill>
-                  <a:srgbClr val="002060"/>
-                </a:solidFill>
-                <a:uFill>
-                  <a:solidFill>
-                    <a:srgbClr val="39A0D2"/>
-                  </a:solidFill>
-                </a:uFill>
-                <a:latin typeface="Century Gothic" panose="020B0502020202020204" pitchFamily="34" charset="0"/>
-                <a:cs typeface="Calibri"/>
-              </a:rPr>
-              <a:t>(</a:t>
-            </a:r>
-            <a:r>
-              <a:rPr lang="en-US" sz="1100" spc="-10" noProof="0" dirty="0" err="1">
+              <a:rPr sz="1100" b="1" spc="-20">
+                <a:solidFill>
+                  <a:srgbClr val="002060"/>
+                </a:solidFill>
+                <a:latin typeface="Century Gothic" panose="020B0502020202020204" pitchFamily="34" charset="0"/>
+                <a:cs typeface="Calibri"/>
+              </a:rPr>
+              <a:t>прие</a:t>
+            </a:r>
+            <a:r>
+              <a:rPr lang="en-US" sz="1100" spc="-10" noProof="0">
                 <a:solidFill>
                   <a:srgbClr val="002060"/>
                 </a:solidFill>
@@ -6632,62 +6799,23 @@
                 <a:latin typeface="Century Gothic" panose="020B0502020202020204" pitchFamily="34" charset="0"/>
                 <a:cs typeface="Calibri"/>
               </a:rPr>
-              <a:t>Paulaner</a:t>
-            </a:r>
-            <a:r>
-              <a:rPr lang="en-US" sz="1100" spc="-10" noProof="0" dirty="0">
-                <a:solidFill>
-                  <a:srgbClr val="002060"/>
-                </a:solidFill>
-                <a:highlight>
-                  <a:srgbClr val="FFFF00"/>
-                </a:highlight>
-                <a:uFill>
-                  <a:solidFill>
-                    <a:srgbClr val="39A0D2"/>
-                  </a:solidFill>
-                </a:uFill>
-                <a:latin typeface="Century Gothic" panose="020B0502020202020204" pitchFamily="34" charset="0"/>
-                <a:cs typeface="Calibri"/>
-              </a:rPr>
-              <a:t> </a:t>
-            </a:r>
-            <a:r>
-              <a:rPr lang="en-US" sz="1100" spc="-10" noProof="0" dirty="0" err="1">
-                <a:solidFill>
-                  <a:srgbClr val="002060"/>
-                </a:solidFill>
-                <a:highlight>
-                  <a:srgbClr val="FFFF00"/>
-                </a:highlight>
-                <a:uFill>
-                  <a:solidFill>
-                    <a:srgbClr val="39A0D2"/>
-                  </a:solidFill>
-                </a:uFill>
-                <a:latin typeface="Century Gothic" panose="020B0502020202020204" pitchFamily="34" charset="0"/>
-                <a:cs typeface="Calibri"/>
-              </a:rPr>
-              <a:t>Bräuhaus</a:t>
-            </a:r>
-            <a:r>
-              <a:rPr lang="en-US" sz="1100" spc="-10" noProof="0" dirty="0">
-                <a:solidFill>
-                  <a:srgbClr val="002060"/>
-                </a:solidFill>
-                <a:highlight>
-                  <a:srgbClr val="FFFF00"/>
-                </a:highlight>
-                <a:uFill>
-                  <a:solidFill>
-                    <a:srgbClr val="39A0D2"/>
-                  </a:solidFill>
-                </a:uFill>
-                <a:latin typeface="Century Gothic" panose="020B0502020202020204" pitchFamily="34" charset="0"/>
-                <a:cs typeface="Calibri"/>
-              </a:rPr>
-              <a:t> Almaty)</a:t>
-            </a:r>
+              <a:t>)</a:t>
+            </a:r>
+            <a:endParaRPr lang="en-US" sz="1100" spc="-10" noProof="0" dirty="0">
+              <a:solidFill>
+                <a:srgbClr val="002060"/>
+              </a:solidFill>
+              <a:highlight>
+                <a:srgbClr val="FFFF00"/>
+              </a:highlight>
+              <a:uFill>
+                <a:solidFill>
+                  <a:srgbClr val="39A0D2"/>
+                </a:solidFill>
+              </a:uFill>
+              <a:latin typeface="Century Gothic" panose="020B0502020202020204" pitchFamily="34" charset="0"/>
+              <a:cs typeface="Calibri"/>
+            </a:endParaRPr>
           </a:p>
           <a:p>
             <a:pPr marL="26034" algn="just">
@@ -6723,8 +6851,45 @@
                 <a:latin typeface="Century Gothic" panose="020B0502020202020204" pitchFamily="34" charset="0"/>
                 <a:cs typeface="Calibri"/>
               </a:rPr>
-              <a:t>, вечерний фуршет</a:t>
-            </a:r>
+              <a:t>, </a:t>
+            </a:r>
+            <a:r>
+              <a:rPr sz="1100" b="1" spc="-20" dirty="0" err="1">
+                <a:solidFill>
+                  <a:srgbClr val="002060"/>
+                </a:solidFill>
+                <a:latin typeface="Century Gothic" panose="020B0502020202020204" pitchFamily="34" charset="0"/>
+                <a:cs typeface="Calibri"/>
+              </a:rPr>
+              <a:t>вечерний</a:t>
+            </a:r>
+            <a:r>
+              <a:rPr sz="1100" b="1" spc="-20" dirty="0">
+                <a:solidFill>
+                  <a:srgbClr val="002060"/>
+                </a:solidFill>
+                <a:latin typeface="Century Gothic" panose="020B0502020202020204" pitchFamily="34" charset="0"/>
+                <a:cs typeface="Calibri"/>
+              </a:rPr>
+              <a:t> </a:t>
+            </a:r>
+            <a:r>
+              <a:rPr sz="1100" b="1" spc="-20" dirty="0" err="1">
+                <a:solidFill>
+                  <a:srgbClr val="002060"/>
+                </a:solidFill>
+                <a:latin typeface="Century Gothic" panose="020B0502020202020204" pitchFamily="34" charset="0"/>
+                <a:cs typeface="Calibri"/>
+              </a:rPr>
+              <a:t>фуршет</a:t>
+            </a:r>
+            <a:endParaRPr sz="1100" b="1" spc="-20" dirty="0">
+              <a:solidFill>
+                <a:srgbClr val="002060"/>
+              </a:solidFill>
+              <a:latin typeface="Century Gothic" panose="020B0502020202020204" pitchFamily="34" charset="0"/>
+              <a:cs typeface="Calibri"/>
+            </a:endParaRPr>
           </a:p>
           <a:p>
             <a:pPr marL="26034" algn="just">
@@ -6776,7 +6941,7 @@
               <a:t> </a:t>
             </a:r>
             <a:r>
-              <a:rPr sz="1100" b="1" spc="-10" dirty="0">
+              <a:rPr sz="1100" b="1" spc="-10" dirty="0" err="1">
                 <a:solidFill>
                   <a:srgbClr val="002060"/>
                 </a:solidFill>
@@ -6868,6 +7033,42 @@
           <a:xfrm>
             <a:off x="356595" y="310292"/>
             <a:ext cx="1197622" cy="564179"/>
+          </a:xfrm>
+          <a:prstGeom prst="rect">
+            <a:avLst/>
+          </a:prstGeom>
+        </p:spPr>
+      </p:pic>
+      <p:pic>
+        <p:nvPicPr>
+          <p:cNvPr id="4" name="Picture 14">
+            <a:extLst>
+              <a:ext uri="{FF2B5EF4-FFF2-40B4-BE49-F238E27FC236}">
+                <a16:creationId xmlns:a16="http://schemas.microsoft.com/office/drawing/2014/main" id="{3B544CD0-EB0C-1EE6-672E-21EF56E96ADC}"/>
+              </a:ext>
+            </a:extLst>
+          </p:cNvPr>
+          <p:cNvPicPr>
+            <a:picLocks noChangeAspect="1"/>
+          </p:cNvPicPr>
+          <p:nvPr/>
+        </p:nvPicPr>
+        <p:blipFill>
+          <a:blip r:embed="rId4" cstate="print">
+            <a:extLst>
+              <a:ext uri="{28A0092B-C50C-407E-A947-70E740481C1C}">
+                <a14:useLocalDpi xmlns:a14="http://schemas.microsoft.com/office/drawing/2010/main" val="0"/>
+              </a:ext>
+            </a:extLst>
+          </a:blip>
+          <a:stretch>
+            <a:fillRect/>
+          </a:stretch>
+        </p:blipFill>
+        <p:spPr>
+          <a:xfrm>
+            <a:off x="1891699" y="160331"/>
+            <a:ext cx="2527794" cy="928692"/>
           </a:xfrm>
           <a:prstGeom prst="rect">
             <a:avLst/>
@@ -7483,4 +7684,309 @@
     </a:ext>
   </a:extLst>
 </a:theme>
+</file>
+
+<file path=customXml/item1.xml><?xml version="1.0" encoding="utf-8"?>
+<ct:contentTypeSchema xmlns:ct="http://schemas.microsoft.com/office/2006/metadata/contentType" xmlns:ma="http://schemas.microsoft.com/office/2006/metadata/properties/metaAttributes" ct:_="" ma:_="" ma:contentTypeName="Dokument" ma:contentTypeID="0x0101004840DA7A1AA00843BF7BE267E1CB408D" ma:contentTypeVersion="16" ma:contentTypeDescription="Ein neues Dokument erstellen." ma:contentTypeScope="" ma:versionID="cf8e11fa954ad01a02db4d0e36146d6b">
+  <xsd:schema xmlns:xsd="http://www.w3.org/2001/XMLSchema" xmlns:xs="http://www.w3.org/2001/XMLSchema" xmlns:p="http://schemas.microsoft.com/office/2006/metadata/properties" xmlns:ns2="dd447142-1aa6-4a72-a007-63df8aaaa9f8" xmlns:ns3="c945b90e-fc88-49af-b28e-2201e397b9a1" targetNamespace="http://schemas.microsoft.com/office/2006/metadata/properties" ma:root="true" ma:fieldsID="1462049e7e9ba608de639a380a24340d" ns2:_="" ns3:_="">
+    <xsd:import namespace="dd447142-1aa6-4a72-a007-63df8aaaa9f8"/>
+    <xsd:import namespace="c945b90e-fc88-49af-b28e-2201e397b9a1"/>
+    <xsd:element name="properties">
+      <xsd:complexType>
+        <xsd:sequence>
+          <xsd:element name="documentManagement">
+            <xsd:complexType>
+              <xsd:all>
+                <xsd:element ref="ns2:MediaServiceMetadata" minOccurs="0"/>
+                <xsd:element ref="ns2:MediaServiceFastMetadata" minOccurs="0"/>
+                <xsd:element ref="ns2:MediaServiceObjectDetectorVersions" minOccurs="0"/>
+                <xsd:element ref="ns3:SharedWithUsers" minOccurs="0"/>
+                <xsd:element ref="ns3:SharedWithDetails" minOccurs="0"/>
+                <xsd:element ref="ns2:MediaServiceDateTaken" minOccurs="0"/>
+                <xsd:element ref="ns2:MediaServiceGenerationTime" minOccurs="0"/>
+                <xsd:element ref="ns2:MediaServiceEventHashCode" minOccurs="0"/>
+                <xsd:element ref="ns2:MediaLengthInSeconds" minOccurs="0"/>
+                <xsd:element ref="ns2:lcf76f155ced4ddcb4097134ff3c332f" minOccurs="0"/>
+                <xsd:element ref="ns3:TaxCatchAll" minOccurs="0"/>
+                <xsd:element ref="ns2:MediaServiceOCR" minOccurs="0"/>
+                <xsd:element ref="ns2:MediaServiceSearchProperties" minOccurs="0"/>
+                <xsd:element ref="ns2:MediaServiceLocation" minOccurs="0"/>
+                <xsd:element ref="ns2:MediaServiceBillingMetadata" minOccurs="0"/>
+              </xsd:all>
+            </xsd:complexType>
+          </xsd:element>
+        </xsd:sequence>
+      </xsd:complexType>
+    </xsd:element>
+  </xsd:schema>
+  <xsd:schema xmlns:xsd="http://www.w3.org/2001/XMLSchema" xmlns:xs="http://www.w3.org/2001/XMLSchema" xmlns:dms="http://schemas.microsoft.com/office/2006/documentManagement/types" xmlns:pc="http://schemas.microsoft.com/office/infopath/2007/PartnerControls" targetNamespace="dd447142-1aa6-4a72-a007-63df8aaaa9f8" elementFormDefault="qualified">
+    <xsd:import namespace="http://schemas.microsoft.com/office/2006/documentManagement/types"/>
+    <xsd:import namespace="http://schemas.microsoft.com/office/infopath/2007/PartnerControls"/>
+    <xsd:element name="MediaServiceMetadata" ma:index="8" nillable="true" ma:displayName="MediaServiceMetadata" ma:hidden="true" ma:internalName="MediaServiceMetadata" ma:readOnly="true">
+      <xsd:simpleType>
+        <xsd:restriction base="dms:Note"/>
+      </xsd:simpleType>
+    </xsd:element>
+    <xsd:element name="MediaServiceFastMetadata" ma:index="9" nillable="true" ma:displayName="MediaServiceFastMetadata" ma:hidden="true" ma:internalName="MediaServiceFastMetadata" ma:readOnly="true">
+      <xsd:simpleType>
+        <xsd:restriction base="dms:Note"/>
+      </xsd:simpleType>
+    </xsd:element>
+    <xsd:element name="MediaServiceObjectDetectorVersions" ma:index="10" nillable="true" ma:displayName="MediaServiceObjectDetectorVersions" ma:hidden="true" ma:indexed="true" ma:internalName="MediaServiceObjectDetectorVersions" ma:readOnly="true">
+      <xsd:simpleType>
+        <xsd:restriction base="dms:Text"/>
+      </xsd:simpleType>
+    </xsd:element>
+    <xsd:element name="MediaServiceDateTaken" ma:index="13" nillable="true" ma:displayName="MediaServiceDateTaken" ma:hidden="true" ma:indexed="true" ma:internalName="MediaServiceDateTaken" ma:readOnly="true">
+      <xsd:simpleType>
+        <xsd:restriction base="dms:Text"/>
+      </xsd:simpleType>
+    </xsd:element>
+    <xsd:element name="MediaServiceGenerationTime" ma:index="14" nillable="true" ma:displayName="MediaServiceGenerationTime" ma:hidden="true" ma:internalName="MediaServiceGenerationTime" ma:readOnly="true">
+      <xsd:simpleType>
+        <xsd:restriction base="dms:Text"/>
+      </xsd:simpleType>
+    </xsd:element>
+    <xsd:element name="MediaServiceEventHashCode" ma:index="15" nillable="true" ma:displayName="MediaServiceEventHashCode" ma:hidden="true" ma:internalName="MediaServiceEventHashCode" ma:readOnly="true">
+      <xsd:simpleType>
+        <xsd:restriction base="dms:Text"/>
+      </xsd:simpleType>
+    </xsd:element>
+    <xsd:element name="MediaLengthInSeconds" ma:index="16" nillable="true" ma:displayName="MediaLengthInSeconds" ma:hidden="true" ma:internalName="MediaLengthInSeconds" ma:readOnly="true">
+      <xsd:simpleType>
+        <xsd:restriction base="dms:Unknown"/>
+      </xsd:simpleType>
+    </xsd:element>
+    <xsd:element name="lcf76f155ced4ddcb4097134ff3c332f" ma:index="18" nillable="true" ma:taxonomy="true" ma:internalName="lcf76f155ced4ddcb4097134ff3c332f" ma:taxonomyFieldName="MediaServiceImageTags" ma:displayName="Bildmarkierungen" ma:readOnly="false" ma:fieldId="{5cf76f15-5ced-4ddc-b409-7134ff3c332f}" ma:taxonomyMulti="true" ma:sspId="0aed264e-563a-469a-8ebe-271e849ec10c" ma:termSetId="09814cd3-568e-fe90-9814-8d621ff8fb84" ma:anchorId="fba54fb3-c3e1-fe81-a776-ca4b69148c4d" ma:open="true" ma:isKeyword="false">
+      <xsd:complexType>
+        <xsd:sequence>
+          <xsd:element ref="pc:Terms" minOccurs="0" maxOccurs="1"/>
+        </xsd:sequence>
+      </xsd:complexType>
+    </xsd:element>
+    <xsd:element name="MediaServiceOCR" ma:index="20" nillable="true" ma:displayName="Extracted Text" ma:internalName="MediaServiceOCR" ma:readOnly="true">
+      <xsd:simpleType>
+        <xsd:restriction base="dms:Note">
+          <xsd:maxLength value="255"/>
+        </xsd:restriction>
+      </xsd:simpleType>
+    </xsd:element>
+    <xsd:element name="MediaServiceSearchProperties" ma:index="21" nillable="true" ma:displayName="MediaServiceSearchProperties" ma:hidden="true" ma:internalName="MediaServiceSearchProperties" ma:readOnly="true">
+      <xsd:simpleType>
+        <xsd:restriction base="dms:Note"/>
+      </xsd:simpleType>
+    </xsd:element>
+    <xsd:element name="MediaServiceLocation" ma:index="22" nillable="true" ma:displayName="Location" ma:indexed="true" ma:internalName="MediaServiceLocation" ma:readOnly="true">
+      <xsd:simpleType>
+        <xsd:restriction base="dms:Text"/>
+      </xsd:simpleType>
+    </xsd:element>
+    <xsd:element name="MediaServiceBillingMetadata" ma:index="23" nillable="true" ma:displayName="MediaServiceBillingMetadata" ma:hidden="true" ma:internalName="MediaServiceBillingMetadata" ma:readOnly="true">
+      <xsd:simpleType>
+        <xsd:restriction base="dms:Note"/>
+      </xsd:simpleType>
+    </xsd:element>
+  </xsd:schema>
+  <xsd:schema xmlns:xsd="http://www.w3.org/2001/XMLSchema" xmlns:xs="http://www.w3.org/2001/XMLSchema" xmlns:dms="http://schemas.microsoft.com/office/2006/documentManagement/types" xmlns:pc="http://schemas.microsoft.com/office/infopath/2007/PartnerControls" targetNamespace="c945b90e-fc88-49af-b28e-2201e397b9a1" elementFormDefault="qualified">
+    <xsd:import namespace="http://schemas.microsoft.com/office/2006/documentManagement/types"/>
+    <xsd:import namespace="http://schemas.microsoft.com/office/infopath/2007/PartnerControls"/>
+    <xsd:element name="SharedWithUsers" ma:index="11" nillable="true" ma:displayName="Freigegeben für" ma:internalName="SharedWithUsers" ma:readOnly="true">
+      <xsd:complexType>
+        <xsd:complexContent>
+          <xsd:extension base="dms:UserMulti">
+            <xsd:sequence>
+              <xsd:element name="UserInfo" minOccurs="0" maxOccurs="unbounded">
+                <xsd:complexType>
+                  <xsd:sequence>
+                    <xsd:element name="DisplayName" type="xsd:string" minOccurs="0"/>
+                    <xsd:element name="AccountId" type="dms:UserId" minOccurs="0" nillable="true"/>
+                    <xsd:element name="AccountType" type="xsd:string" minOccurs="0"/>
+                  </xsd:sequence>
+                </xsd:complexType>
+              </xsd:element>
+            </xsd:sequence>
+          </xsd:extension>
+        </xsd:complexContent>
+      </xsd:complexType>
+    </xsd:element>
+    <xsd:element name="SharedWithDetails" ma:index="12" nillable="true" ma:displayName="Freigegeben für - Details" ma:internalName="SharedWithDetails" ma:readOnly="true">
+      <xsd:simpleType>
+        <xsd:restriction base="dms:Note">
+          <xsd:maxLength value="255"/>
+        </xsd:restriction>
+      </xsd:simpleType>
+    </xsd:element>
+    <xsd:element name="TaxCatchAll" ma:index="19" nillable="true" ma:displayName="Taxonomy Catch All Column" ma:hidden="true" ma:list="{12ee92ea-e074-4350-ac3b-5cf132dea3f3}" ma:internalName="TaxCatchAll" ma:showField="CatchAllData" ma:web="c945b90e-fc88-49af-b28e-2201e397b9a1">
+      <xsd:complexType>
+        <xsd:complexContent>
+          <xsd:extension base="dms:MultiChoiceLookup">
+            <xsd:sequence>
+              <xsd:element name="Value" type="dms:Lookup" maxOccurs="unbounded" minOccurs="0" nillable="true"/>
+            </xsd:sequence>
+          </xsd:extension>
+        </xsd:complexContent>
+      </xsd:complexType>
+    </xsd:element>
+  </xsd:schema>
+  <xsd:schema xmlns="http://schemas.openxmlformats.org/package/2006/metadata/core-properties" xmlns:xsd="http://www.w3.org/2001/XMLSchema" xmlns:xsi="http://www.w3.org/2001/XMLSchema-instance" xmlns:dc="http://purl.org/dc/elements/1.1/" xmlns:dcterms="http://purl.org/dc/terms/" xmlns:odoc="http://schemas.microsoft.com/internal/obd" targetNamespace="http://schemas.openxmlformats.org/package/2006/metadata/core-properties" elementFormDefault="qualified" attributeFormDefault="unqualified" blockDefault="#all">
+    <xsd:import namespace="http://purl.org/dc/elements/1.1/" schemaLocation="http://dublincore.org/schemas/xmls/qdc/2003/04/02/dc.xsd"/>
+    <xsd:import namespace="http://purl.org/dc/terms/" schemaLocation="http://dublincore.org/schemas/xmls/qdc/2003/04/02/dcterms.xsd"/>
+    <xsd:element name="coreProperties" type="CT_coreProperties"/>
+    <xsd:complexType name="CT_coreProperties">
+      <xsd:all>
+        <xsd:element ref="dc:creator" minOccurs="0" maxOccurs="1"/>
+        <xsd:element ref="dcterms:created" minOccurs="0" maxOccurs="1"/>
+        <xsd:element ref="dc:identifier" minOccurs="0" maxOccurs="1"/>
+        <xsd:element name="contentType" minOccurs="0" maxOccurs="1" type="xsd:string" ma:index="0" ma:displayName="Inhaltstyp"/>
+        <xsd:element ref="dc:title" minOccurs="0" maxOccurs="1" ma:index="4" ma:displayName="Titel"/>
+        <xsd:element ref="dc:subject" minOccurs="0" maxOccurs="1"/>
+        <xsd:element ref="dc:description" minOccurs="0" maxOccurs="1"/>
+        <xsd:element name="keywords" minOccurs="0" maxOccurs="1" type="xsd:string"/>
+        <xsd:element ref="dc:language" minOccurs="0" maxOccurs="1"/>
+        <xsd:element name="category" minOccurs="0" maxOccurs="1" type="xsd:string"/>
+        <xsd:element name="version" minOccurs="0" maxOccurs="1" type="xsd:string"/>
+        <xsd:element name="revision" minOccurs="0" maxOccurs="1" type="xsd:string">
+          <xsd:annotation>
+            <xsd:documentation>
+                        This value indicates the number of saves or revisions. The application is responsible for updating this value after each revision.
+                    </xsd:documentation>
+          </xsd:annotation>
+        </xsd:element>
+        <xsd:element name="lastModifiedBy" minOccurs="0" maxOccurs="1" type="xsd:string"/>
+        <xsd:element ref="dcterms:modified" minOccurs="0" maxOccurs="1"/>
+        <xsd:element name="contentStatus" minOccurs="0" maxOccurs="1" type="xsd:string"/>
+      </xsd:all>
+    </xsd:complexType>
+  </xsd:schema>
+  <xs:schema xmlns:pc="http://schemas.microsoft.com/office/infopath/2007/PartnerControls" xmlns:xs="http://www.w3.org/2001/XMLSchema" targetNamespace="http://schemas.microsoft.com/office/infopath/2007/PartnerControls" elementFormDefault="qualified" attributeFormDefault="unqualified">
+    <xs:element name="Person">
+      <xs:complexType>
+        <xs:sequence>
+          <xs:element ref="pc:DisplayName" minOccurs="0"/>
+          <xs:element ref="pc:AccountId" minOccurs="0"/>
+          <xs:element ref="pc:AccountType" minOccurs="0"/>
+        </xs:sequence>
+      </xs:complexType>
+    </xs:element>
+    <xs:element name="DisplayName" type="xs:string"/>
+    <xs:element name="AccountId" type="xs:string"/>
+    <xs:element name="AccountType" type="xs:string"/>
+    <xs:element name="BDCAssociatedEntity">
+      <xs:complexType>
+        <xs:sequence>
+          <xs:element ref="pc:BDCEntity" minOccurs="0" maxOccurs="unbounded"/>
+        </xs:sequence>
+        <xs:attribute ref="pc:EntityNamespace"/>
+        <xs:attribute ref="pc:EntityName"/>
+        <xs:attribute ref="pc:SystemInstanceName"/>
+        <xs:attribute ref="pc:AssociationName"/>
+      </xs:complexType>
+    </xs:element>
+    <xs:attribute name="EntityNamespace" type="xs:string"/>
+    <xs:attribute name="EntityName" type="xs:string"/>
+    <xs:attribute name="SystemInstanceName" type="xs:string"/>
+    <xs:attribute name="AssociationName" type="xs:string"/>
+    <xs:element name="BDCEntity">
+      <xs:complexType>
+        <xs:sequence>
+          <xs:element ref="pc:EntityDisplayName" minOccurs="0"/>
+          <xs:element ref="pc:EntityInstanceReference" minOccurs="0"/>
+          <xs:element ref="pc:EntityId1" minOccurs="0"/>
+          <xs:element ref="pc:EntityId2" minOccurs="0"/>
+          <xs:element ref="pc:EntityId3" minOccurs="0"/>
+          <xs:element ref="pc:EntityId4" minOccurs="0"/>
+          <xs:element ref="pc:EntityId5" minOccurs="0"/>
+        </xs:sequence>
+      </xs:complexType>
+    </xs:element>
+    <xs:element name="EntityDisplayName" type="xs:string"/>
+    <xs:element name="EntityInstanceReference" type="xs:string"/>
+    <xs:element name="EntityId1" type="xs:string"/>
+    <xs:element name="EntityId2" type="xs:string"/>
+    <xs:element name="EntityId3" type="xs:string"/>
+    <xs:element name="EntityId4" type="xs:string"/>
+    <xs:element name="EntityId5" type="xs:string"/>
+    <xs:element name="Terms">
+      <xs:complexType>
+        <xs:sequence>
+          <xs:element ref="pc:TermInfo" minOccurs="0" maxOccurs="unbounded"/>
+        </xs:sequence>
+      </xs:complexType>
+    </xs:element>
+    <xs:element name="TermInfo">
+      <xs:complexType>
+        <xs:sequence>
+          <xs:element ref="pc:TermName" minOccurs="0"/>
+          <xs:element ref="pc:TermId" minOccurs="0"/>
+        </xs:sequence>
+      </xs:complexType>
+    </xs:element>
+    <xs:element name="TermName" type="xs:string"/>
+    <xs:element name="TermId" type="xs:string"/>
+  </xs:schema>
+</ct:contentTypeSchema>
+</file>
+
+<file path=customXml/item2.xml><?xml version="1.0" encoding="utf-8"?>
+<p:properties xmlns:p="http://schemas.microsoft.com/office/2006/metadata/properties" xmlns:xsi="http://www.w3.org/2001/XMLSchema-instance" xmlns:pc="http://schemas.microsoft.com/office/infopath/2007/PartnerControls">
+  <documentManagement>
+    <TaxCatchAll xmlns="c945b90e-fc88-49af-b28e-2201e397b9a1" xsi:nil="true"/>
+    <lcf76f155ced4ddcb4097134ff3c332f xmlns="dd447142-1aa6-4a72-a007-63df8aaaa9f8">
+      <Terms xmlns="http://schemas.microsoft.com/office/infopath/2007/PartnerControls"/>
+    </lcf76f155ced4ddcb4097134ff3c332f>
+  </documentManagement>
+</p:properties>
+</file>
+
+<file path=customXml/item3.xml><?xml version="1.0" encoding="utf-8"?>
+<?mso-contentType ?>
+<FormTemplates xmlns="http://schemas.microsoft.com/sharepoint/v3/contenttype/forms">
+  <Display>DocumentLibraryForm</Display>
+  <Edit>DocumentLibraryForm</Edit>
+  <New>DocumentLibraryForm</New>
+</FormTemplates>
+</file>
+
+<file path=customXml/itemProps1.xml><?xml version="1.0" encoding="utf-8"?>
+<ds:datastoreItem xmlns:ds="http://schemas.openxmlformats.org/officeDocument/2006/customXml" ds:itemID="{D25356EC-F188-4420-B47E-503E430DAC3F}">
+  <ds:schemaRefs>
+    <ds:schemaRef ds:uri="c945b90e-fc88-49af-b28e-2201e397b9a1"/>
+    <ds:schemaRef ds:uri="dd447142-1aa6-4a72-a007-63df8aaaa9f8"/>
+    <ds:schemaRef ds:uri="http://purl.org/dc/elements/1.1/"/>
+    <ds:schemaRef ds:uri="http://purl.org/dc/terms/"/>
+    <ds:schemaRef ds:uri="http://schemas.microsoft.com/internal/obd"/>
+    <ds:schemaRef ds:uri="http://schemas.microsoft.com/office/2006/documentManagement/types"/>
+    <ds:schemaRef ds:uri="http://schemas.microsoft.com/office/2006/metadata/contentType"/>
+    <ds:schemaRef ds:uri="http://schemas.microsoft.com/office/2006/metadata/properties"/>
+    <ds:schemaRef ds:uri="http://schemas.microsoft.com/office/2006/metadata/properties/metaAttributes"/>
+    <ds:schemaRef ds:uri="http://schemas.microsoft.com/office/infopath/2007/PartnerControls"/>
+    <ds:schemaRef ds:uri="http://schemas.openxmlformats.org/package/2006/metadata/core-properties"/>
+    <ds:schemaRef ds:uri="http://www.w3.org/2001/XMLSchema"/>
+  </ds:schemaRefs>
+</ds:datastoreItem>
+</file>
+
+<file path=customXml/itemProps2.xml><?xml version="1.0" encoding="utf-8"?>
+<ds:datastoreItem xmlns:ds="http://schemas.openxmlformats.org/officeDocument/2006/customXml" ds:itemID="{E55AB60D-2716-48DE-AB04-F482F3AD5D1B}">
+  <ds:schemaRefs>
+    <ds:schemaRef ds:uri="http://schemas.microsoft.com/office/2006/documentManagement/types"/>
+    <ds:schemaRef ds:uri="http://schemas.microsoft.com/office/infopath/2007/PartnerControls"/>
+    <ds:schemaRef ds:uri="http://www.w3.org/XML/1998/namespace"/>
+    <ds:schemaRef ds:uri="http://purl.org/dc/elements/1.1/"/>
+    <ds:schemaRef ds:uri="http://purl.org/dc/terms/"/>
+    <ds:schemaRef ds:uri="dd447142-1aa6-4a72-a007-63df8aaaa9f8"/>
+    <ds:schemaRef ds:uri="http://schemas.microsoft.com/office/2006/metadata/properties"/>
+    <ds:schemaRef ds:uri="http://schemas.openxmlformats.org/package/2006/metadata/core-properties"/>
+    <ds:schemaRef ds:uri="c945b90e-fc88-49af-b28e-2201e397b9a1"/>
+    <ds:schemaRef ds:uri="http://purl.org/dc/dcmitype/"/>
+  </ds:schemaRefs>
+</ds:datastoreItem>
+</file>
+
+<file path=customXml/itemProps3.xml><?xml version="1.0" encoding="utf-8"?>
+<ds:datastoreItem xmlns:ds="http://schemas.openxmlformats.org/officeDocument/2006/customXml" ds:itemID="{B241A017-8C39-425C-ACA6-F70EA2C5E548}">
+  <ds:schemaRefs>
+    <ds:schemaRef ds:uri="http://schemas.microsoft.com/sharepoint/v3/contenttype/forms"/>
+  </ds:schemaRefs>
+</ds:datastoreItem>
 </file>
--- a/public/program-ru.pptx
+++ b/public/program-ru.pptx
@@ -141,7 +141,7 @@
           <a:p>
             <a:fld id="{0C391B6F-BBFA-438A-9286-1FC62C3499A0}" type="datetimeFigureOut">
               <a:rPr lang="ru-RU" smtClean="0"/>
-              <a:t>01.04.2026</a:t>
+              <a:t>23.04.2026</a:t>
             </a:fld>
             <a:endParaRPr lang="ru-RU"/>
           </a:p>
@@ -385,7 +385,7 @@
           <a:p>
             <a:fld id="{1D8BD707-D9CF-40AE-B4C6-C98DA3205C09}" type="datetimeFigureOut">
               <a:rPr lang="en-US"/>
-              <a:t>4/1/2026</a:t>
+              <a:t>4/23/2026</a:t>
             </a:fld>
             <a:endParaRPr lang="en-US"/>
           </a:p>
@@ -828,7 +828,7 @@
           <a:p>
             <a:fld id="{1D8BD707-D9CF-40AE-B4C6-C98DA3205C09}" type="datetimeFigureOut">
               <a:rPr lang="en-US"/>
-              <a:t>4/1/2026</a:t>
+              <a:t>4/23/2026</a:t>
             </a:fld>
             <a:endParaRPr lang="en-US"/>
           </a:p>
@@ -1042,7 +1042,7 @@
           <a:p>
             <a:fld id="{1D8BD707-D9CF-40AE-B4C6-C98DA3205C09}" type="datetimeFigureOut">
               <a:rPr lang="en-US"/>
-              <a:t>4/1/2026</a:t>
+              <a:t>4/23/2026</a:t>
             </a:fld>
             <a:endParaRPr lang="en-US"/>
           </a:p>
@@ -1190,7 +1190,7 @@
           <a:p>
             <a:fld id="{1D8BD707-D9CF-40AE-B4C6-C98DA3205C09}" type="datetimeFigureOut">
               <a:rPr lang="en-US"/>
-              <a:t>4/1/2026</a:t>
+              <a:t>4/23/2026</a:t>
             </a:fld>
             <a:endParaRPr lang="en-US"/>
           </a:p>
@@ -1389,7 +1389,7 @@
           <a:p>
             <a:fld id="{1D8BD707-D9CF-40AE-B4C6-C98DA3205C09}" type="datetimeFigureOut">
               <a:rPr lang="en-US"/>
-              <a:t>4/1/2026</a:t>
+              <a:t>4/23/2026</a:t>
             </a:fld>
             <a:endParaRPr lang="en-US"/>
           </a:p>
@@ -1612,7 +1612,7 @@
           <a:p>
             <a:fld id="{1D8BD707-D9CF-40AE-B4C6-C98DA3205C09}" type="datetimeFigureOut">
               <a:rPr lang="en-US"/>
-              <a:t>4/1/2026</a:t>
+              <a:t>4/23/2026</a:t>
             </a:fld>
             <a:endParaRPr lang="en-US"/>
           </a:p>
@@ -6356,6 +6356,26 @@
               </a:spcBef>
             </a:pPr>
             <a:r>
+              <a:rPr lang="ru-RU" sz="1100">
+                <a:solidFill>
+                  <a:srgbClr val="002060"/>
+                </a:solidFill>
+                <a:latin typeface="Century Gothic" panose="020B0502020202020204" pitchFamily="34" charset="0"/>
+                <a:cs typeface="Calibri"/>
+              </a:rPr>
+              <a:t> </a:t>
+            </a:r>
+            <a:r>
+              <a:rPr lang="ru-RU" sz="1100" dirty="0" err="1">
+                <a:solidFill>
+                  <a:srgbClr val="002060"/>
+                </a:solidFill>
+                <a:latin typeface="Century Gothic" panose="020B0502020202020204" pitchFamily="34" charset="0"/>
+                <a:cs typeface="Calibri"/>
+              </a:rPr>
+              <a:t>Представитель</a:t>
+            </a:r>
+            <a:r>
               <a:rPr lang="ru-RU" sz="1100" dirty="0">
                 <a:solidFill>
                   <a:srgbClr val="002060"/>
@@ -6363,28 +6383,25 @@
                 <a:latin typeface="Century Gothic" panose="020B0502020202020204" pitchFamily="34" charset="0"/>
                 <a:cs typeface="Calibri"/>
               </a:rPr>
-              <a:t>Представитель Ассоциации «</a:t>
-            </a:r>
-            <a:r>
-              <a:rPr lang="ru-RU" sz="1100" dirty="0" err="1">
-                <a:solidFill>
-                  <a:srgbClr val="002060"/>
-                </a:solidFill>
-                <a:latin typeface="Century Gothic" panose="020B0502020202020204" pitchFamily="34" charset="0"/>
-                <a:cs typeface="Calibri"/>
-              </a:rPr>
-              <a:t>КазЛогистик</a:t>
-            </a:r>
-            <a:r>
-              <a:rPr lang="ru-RU" sz="1100" dirty="0">
-                <a:solidFill>
-                  <a:srgbClr val="002060"/>
-                </a:solidFill>
-                <a:latin typeface="Century Gothic" panose="020B0502020202020204" pitchFamily="34" charset="0"/>
-                <a:cs typeface="Calibri"/>
-              </a:rPr>
-              <a:t>»</a:t>
-            </a:r>
+              <a:t> Союз транспортников Казахстана "</a:t>
+            </a:r>
+            <a:r>
+              <a:rPr lang="de-DE" sz="1100" dirty="0">
+                <a:solidFill>
+                  <a:srgbClr val="002060"/>
+                </a:solidFill>
+                <a:latin typeface="Century Gothic" panose="020B0502020202020204" pitchFamily="34" charset="0"/>
+                <a:cs typeface="Calibri"/>
+              </a:rPr>
+              <a:t>KAZLOGISTICS«</a:t>
+            </a:r>
+            <a:endParaRPr lang="ru-RU" sz="1100" dirty="0">
+              <a:solidFill>
+                <a:srgbClr val="002060"/>
+              </a:solidFill>
+              <a:latin typeface="Century Gothic" panose="020B0502020202020204" pitchFamily="34" charset="0"/>
+              <a:cs typeface="Calibri"/>
+            </a:endParaRPr>
           </a:p>
           <a:p>
             <a:pPr marL="358775" algn="just">
@@ -6774,7 +6791,7 @@
               <a:t> </a:t>
             </a:r>
             <a:r>
-              <a:rPr sz="1100" b="1" spc="-20">
+              <a:rPr sz="1100" b="1" spc="-20" dirty="0" err="1">
                 <a:solidFill>
                   <a:srgbClr val="002060"/>
                 </a:solidFill>
@@ -6784,7 +6801,7 @@
               <a:t>прие</a:t>
             </a:r>
             <a:r>
-              <a:rPr lang="en-US" sz="1100" spc="-10" noProof="0">
+              <a:rPr lang="en-US" sz="1100" spc="-10" noProof="0" dirty="0">
                 <a:solidFill>
                   <a:srgbClr val="002060"/>
                 </a:solidFill>
@@ -6801,21 +6818,6 @@
               </a:rPr>
               <a:t>)</a:t>
             </a:r>
-            <a:endParaRPr lang="en-US" sz="1100" spc="-10" noProof="0" dirty="0">
-              <a:solidFill>
-                <a:srgbClr val="002060"/>
-              </a:solidFill>
-              <a:highlight>
-                <a:srgbClr val="FFFF00"/>
-              </a:highlight>
-              <a:uFill>
-                <a:solidFill>
-                  <a:srgbClr val="39A0D2"/>
-                </a:solidFill>
-              </a:uFill>
-              <a:latin typeface="Century Gothic" panose="020B0502020202020204" pitchFamily="34" charset="0"/>
-              <a:cs typeface="Calibri"/>
-            </a:endParaRPr>
           </a:p>
           <a:p>
             <a:pPr marL="26034" algn="just">
@@ -7687,6 +7689,26 @@
 </file>
 
 <file path=customXml/item1.xml><?xml version="1.0" encoding="utf-8"?>
+<?mso-contentType ?>
+<FormTemplates xmlns="http://schemas.microsoft.com/sharepoint/v3/contenttype/forms">
+  <Display>DocumentLibraryForm</Display>
+  <Edit>DocumentLibraryForm</Edit>
+  <New>DocumentLibraryForm</New>
+</FormTemplates>
+</file>
+
+<file path=customXml/item2.xml><?xml version="1.0" encoding="utf-8"?>
+<p:properties xmlns:p="http://schemas.microsoft.com/office/2006/metadata/properties" xmlns:xsi="http://www.w3.org/2001/XMLSchema-instance" xmlns:pc="http://schemas.microsoft.com/office/infopath/2007/PartnerControls">
+  <documentManagement>
+    <TaxCatchAll xmlns="c945b90e-fc88-49af-b28e-2201e397b9a1" xsi:nil="true"/>
+    <lcf76f155ced4ddcb4097134ff3c332f xmlns="dd447142-1aa6-4a72-a007-63df8aaaa9f8">
+      <Terms xmlns="http://schemas.microsoft.com/office/infopath/2007/PartnerControls"/>
+    </lcf76f155ced4ddcb4097134ff3c332f>
+  </documentManagement>
+</p:properties>
+</file>
+
+<file path=customXml/item3.xml><?xml version="1.0" encoding="utf-8"?>
 <ct:contentTypeSchema xmlns:ct="http://schemas.microsoft.com/office/2006/metadata/contentType" xmlns:ma="http://schemas.microsoft.com/office/2006/metadata/properties/metaAttributes" ct:_="" ma:_="" ma:contentTypeName="Dokument" ma:contentTypeID="0x0101004840DA7A1AA00843BF7BE267E1CB408D" ma:contentTypeVersion="16" ma:contentTypeDescription="Ein neues Dokument erstellen." ma:contentTypeScope="" ma:versionID="cf8e11fa954ad01a02db4d0e36146d6b">
   <xsd:schema xmlns:xsd="http://www.w3.org/2001/XMLSchema" xmlns:xs="http://www.w3.org/2001/XMLSchema" xmlns:p="http://schemas.microsoft.com/office/2006/metadata/properties" xmlns:ns2="dd447142-1aa6-4a72-a007-63df8aaaa9f8" xmlns:ns3="c945b90e-fc88-49af-b28e-2201e397b9a1" targetNamespace="http://schemas.microsoft.com/office/2006/metadata/properties" ma:root="true" ma:fieldsID="1462049e7e9ba608de639a380a24340d" ns2:_="" ns3:_="">
     <xsd:import namespace="dd447142-1aa6-4a72-a007-63df8aaaa9f8"/>
@@ -7927,41 +7949,10 @@
 </ct:contentTypeSchema>
 </file>
 
-<file path=customXml/item2.xml><?xml version="1.0" encoding="utf-8"?>
-<p:properties xmlns:p="http://schemas.microsoft.com/office/2006/metadata/properties" xmlns:xsi="http://www.w3.org/2001/XMLSchema-instance" xmlns:pc="http://schemas.microsoft.com/office/infopath/2007/PartnerControls">
-  <documentManagement>
-    <TaxCatchAll xmlns="c945b90e-fc88-49af-b28e-2201e397b9a1" xsi:nil="true"/>
-    <lcf76f155ced4ddcb4097134ff3c332f xmlns="dd447142-1aa6-4a72-a007-63df8aaaa9f8">
-      <Terms xmlns="http://schemas.microsoft.com/office/infopath/2007/PartnerControls"/>
-    </lcf76f155ced4ddcb4097134ff3c332f>
-  </documentManagement>
-</p:properties>
-</file>
-
-<file path=customXml/item3.xml><?xml version="1.0" encoding="utf-8"?>
-<?mso-contentType ?>
-<FormTemplates xmlns="http://schemas.microsoft.com/sharepoint/v3/contenttype/forms">
-  <Display>DocumentLibraryForm</Display>
-  <Edit>DocumentLibraryForm</Edit>
-  <New>DocumentLibraryForm</New>
-</FormTemplates>
-</file>
-
 <file path=customXml/itemProps1.xml><?xml version="1.0" encoding="utf-8"?>
-<ds:datastoreItem xmlns:ds="http://schemas.openxmlformats.org/officeDocument/2006/customXml" ds:itemID="{D25356EC-F188-4420-B47E-503E430DAC3F}">
+<ds:datastoreItem xmlns:ds="http://schemas.openxmlformats.org/officeDocument/2006/customXml" ds:itemID="{B241A017-8C39-425C-ACA6-F70EA2C5E548}">
   <ds:schemaRefs>
-    <ds:schemaRef ds:uri="c945b90e-fc88-49af-b28e-2201e397b9a1"/>
-    <ds:schemaRef ds:uri="dd447142-1aa6-4a72-a007-63df8aaaa9f8"/>
-    <ds:schemaRef ds:uri="http://purl.org/dc/elements/1.1/"/>
-    <ds:schemaRef ds:uri="http://purl.org/dc/terms/"/>
-    <ds:schemaRef ds:uri="http://schemas.microsoft.com/internal/obd"/>
-    <ds:schemaRef ds:uri="http://schemas.microsoft.com/office/2006/documentManagement/types"/>
-    <ds:schemaRef ds:uri="http://schemas.microsoft.com/office/2006/metadata/contentType"/>
-    <ds:schemaRef ds:uri="http://schemas.microsoft.com/office/2006/metadata/properties"/>
-    <ds:schemaRef ds:uri="http://schemas.microsoft.com/office/2006/metadata/properties/metaAttributes"/>
-    <ds:schemaRef ds:uri="http://schemas.microsoft.com/office/infopath/2007/PartnerControls"/>
-    <ds:schemaRef ds:uri="http://schemas.openxmlformats.org/package/2006/metadata/core-properties"/>
-    <ds:schemaRef ds:uri="http://www.w3.org/2001/XMLSchema"/>
+    <ds:schemaRef ds:uri="http://schemas.microsoft.com/sharepoint/v3/contenttype/forms"/>
   </ds:schemaRefs>
 </ds:datastoreItem>
 </file>
@@ -7984,9 +7975,20 @@
 </file>
 
 <file path=customXml/itemProps3.xml><?xml version="1.0" encoding="utf-8"?>
-<ds:datastoreItem xmlns:ds="http://schemas.openxmlformats.org/officeDocument/2006/customXml" ds:itemID="{B241A017-8C39-425C-ACA6-F70EA2C5E548}">
+<ds:datastoreItem xmlns:ds="http://schemas.openxmlformats.org/officeDocument/2006/customXml" ds:itemID="{D25356EC-F188-4420-B47E-503E430DAC3F}">
   <ds:schemaRefs>
-    <ds:schemaRef ds:uri="http://schemas.microsoft.com/sharepoint/v3/contenttype/forms"/>
+    <ds:schemaRef ds:uri="c945b90e-fc88-49af-b28e-2201e397b9a1"/>
+    <ds:schemaRef ds:uri="dd447142-1aa6-4a72-a007-63df8aaaa9f8"/>
+    <ds:schemaRef ds:uri="http://purl.org/dc/elements/1.1/"/>
+    <ds:schemaRef ds:uri="http://purl.org/dc/terms/"/>
+    <ds:schemaRef ds:uri="http://schemas.microsoft.com/internal/obd"/>
+    <ds:schemaRef ds:uri="http://schemas.microsoft.com/office/2006/documentManagement/types"/>
+    <ds:schemaRef ds:uri="http://schemas.microsoft.com/office/2006/metadata/contentType"/>
+    <ds:schemaRef ds:uri="http://schemas.microsoft.com/office/2006/metadata/properties"/>
+    <ds:schemaRef ds:uri="http://schemas.microsoft.com/office/2006/metadata/properties/metaAttributes"/>
+    <ds:schemaRef ds:uri="http://schemas.microsoft.com/office/infopath/2007/PartnerControls"/>
+    <ds:schemaRef ds:uri="http://schemas.openxmlformats.org/package/2006/metadata/core-properties"/>
+    <ds:schemaRef ds:uri="http://www.w3.org/2001/XMLSchema"/>
   </ds:schemaRefs>
 </ds:datastoreItem>
 </file>